--- a/tbb.pptx
+++ b/tbb.pptx
@@ -7964,7 +7964,7 @@
           <a:p>
             <a:fld id="{72A559F6-5B7D-4313-A416-AF59A4E68915}" type="datetimeFigureOut">
               <a:rPr lang="en-US" smtClean="0"/>
-              <a:t>2019-08-23</a:t>
+              <a:t>2026-05-06</a:t>
             </a:fld>
             <a:endParaRPr lang="en-US"/>
           </a:p>
@@ -8028,38 +8028,37 @@
           <a:p>
             <a:pPr lvl="0"/>
             <a:r>
-              <a:rPr lang="en-US" smtClean="0"/>
+              <a:rPr lang="en-US"/>
               <a:t>Edit Master text styles</a:t>
             </a:r>
           </a:p>
           <a:p>
             <a:pPr lvl="1"/>
             <a:r>
-              <a:rPr lang="en-US" smtClean="0"/>
+              <a:rPr lang="en-US"/>
               <a:t>Second level</a:t>
             </a:r>
           </a:p>
           <a:p>
             <a:pPr lvl="2"/>
             <a:r>
-              <a:rPr lang="en-US" smtClean="0"/>
+              <a:rPr lang="en-US"/>
               <a:t>Third level</a:t>
             </a:r>
           </a:p>
           <a:p>
             <a:pPr lvl="3"/>
             <a:r>
-              <a:rPr lang="en-US" smtClean="0"/>
+              <a:rPr lang="en-US"/>
               <a:t>Fourth level</a:t>
             </a:r>
           </a:p>
           <a:p>
             <a:pPr lvl="4"/>
             <a:r>
-              <a:rPr lang="en-US" smtClean="0"/>
+              <a:rPr lang="en-US"/>
               <a:t>Fifth level</a:t>
             </a:r>
-            <a:endParaRPr lang="en-US"/>
           </a:p>
         </p:txBody>
       </p:sp>
@@ -8274,10 +8273,9 @@
           </a:lstStyle>
           <a:p>
             <a:r>
-              <a:rPr lang="en-US" smtClean="0"/>
+              <a:rPr lang="en-US"/>
               <a:t>Click to edit Master title style</a:t>
             </a:r>
-            <a:endParaRPr lang="en-US"/>
           </a:p>
         </p:txBody>
       </p:sp>
@@ -8339,10 +8337,9 @@
           </a:lstStyle>
           <a:p>
             <a:r>
-              <a:rPr lang="en-US" smtClean="0"/>
+              <a:rPr lang="en-US"/>
               <a:t>Click to edit Master subtitle style</a:t>
             </a:r>
-            <a:endParaRPr lang="en-US"/>
           </a:p>
         </p:txBody>
       </p:sp>
@@ -8363,7 +8360,7 @@
           <a:p>
             <a:fld id="{10BAA852-CFF9-48BA-A628-AE9DB7CB9A88}" type="datetime1">
               <a:rPr lang="en-US" smtClean="0"/>
-              <a:t>2019-08-23</a:t>
+              <a:t>2026-05-06</a:t>
             </a:fld>
             <a:endParaRPr lang="en-US"/>
           </a:p>
@@ -8457,10 +8454,9 @@
           <a:lstStyle/>
           <a:p>
             <a:r>
-              <a:rPr lang="en-US" smtClean="0"/>
+              <a:rPr lang="en-US"/>
               <a:t>Click to edit Master title style</a:t>
             </a:r>
-            <a:endParaRPr lang="en-US"/>
           </a:p>
         </p:txBody>
       </p:sp>
@@ -8481,38 +8477,37 @@
           <a:p>
             <a:pPr lvl="0"/>
             <a:r>
-              <a:rPr lang="en-US" smtClean="0"/>
+              <a:rPr lang="en-US"/>
               <a:t>Edit Master text styles</a:t>
             </a:r>
           </a:p>
           <a:p>
             <a:pPr lvl="1"/>
             <a:r>
-              <a:rPr lang="en-US" smtClean="0"/>
+              <a:rPr lang="en-US"/>
               <a:t>Second level</a:t>
             </a:r>
           </a:p>
           <a:p>
             <a:pPr lvl="2"/>
             <a:r>
-              <a:rPr lang="en-US" smtClean="0"/>
+              <a:rPr lang="en-US"/>
               <a:t>Third level</a:t>
             </a:r>
           </a:p>
           <a:p>
             <a:pPr lvl="3"/>
             <a:r>
-              <a:rPr lang="en-US" smtClean="0"/>
+              <a:rPr lang="en-US"/>
               <a:t>Fourth level</a:t>
             </a:r>
           </a:p>
           <a:p>
             <a:pPr lvl="4"/>
             <a:r>
-              <a:rPr lang="en-US" smtClean="0"/>
+              <a:rPr lang="en-US"/>
               <a:t>Fifth level</a:t>
             </a:r>
-            <a:endParaRPr lang="en-US"/>
           </a:p>
         </p:txBody>
       </p:sp>
@@ -8533,7 +8528,7 @@
           <a:p>
             <a:fld id="{6AE9B819-3E52-43A1-8A40-2B7C4C434AEB}" type="datetime1">
               <a:rPr lang="en-US" smtClean="0"/>
-              <a:t>2019-08-23</a:t>
+              <a:t>2026-05-06</a:t>
             </a:fld>
             <a:endParaRPr lang="en-US"/>
           </a:p>
@@ -8632,10 +8627,9 @@
           <a:lstStyle/>
           <a:p>
             <a:r>
-              <a:rPr lang="en-US" smtClean="0"/>
+              <a:rPr lang="en-US"/>
               <a:t>Click to edit Master title style</a:t>
             </a:r>
-            <a:endParaRPr lang="en-US"/>
           </a:p>
         </p:txBody>
       </p:sp>
@@ -8661,38 +8655,37 @@
           <a:p>
             <a:pPr lvl="0"/>
             <a:r>
-              <a:rPr lang="en-US" smtClean="0"/>
+              <a:rPr lang="en-US"/>
               <a:t>Edit Master text styles</a:t>
             </a:r>
           </a:p>
           <a:p>
             <a:pPr lvl="1"/>
             <a:r>
-              <a:rPr lang="en-US" smtClean="0"/>
+              <a:rPr lang="en-US"/>
               <a:t>Second level</a:t>
             </a:r>
           </a:p>
           <a:p>
             <a:pPr lvl="2"/>
             <a:r>
-              <a:rPr lang="en-US" smtClean="0"/>
+              <a:rPr lang="en-US"/>
               <a:t>Third level</a:t>
             </a:r>
           </a:p>
           <a:p>
             <a:pPr lvl="3"/>
             <a:r>
-              <a:rPr lang="en-US" smtClean="0"/>
+              <a:rPr lang="en-US"/>
               <a:t>Fourth level</a:t>
             </a:r>
           </a:p>
           <a:p>
             <a:pPr lvl="4"/>
             <a:r>
-              <a:rPr lang="en-US" smtClean="0"/>
+              <a:rPr lang="en-US"/>
               <a:t>Fifth level</a:t>
             </a:r>
-            <a:endParaRPr lang="en-US"/>
           </a:p>
         </p:txBody>
       </p:sp>
@@ -8713,7 +8706,7 @@
           <a:p>
             <a:fld id="{8E838FA6-5F9F-4ECF-8918-25AD07791A8E}" type="datetime1">
               <a:rPr lang="en-US" smtClean="0"/>
-              <a:t>2019-08-23</a:t>
+              <a:t>2026-05-06</a:t>
             </a:fld>
             <a:endParaRPr lang="en-US"/>
           </a:p>
@@ -8876,10 +8869,9 @@
           </a:lstStyle>
           <a:p>
             <a:r>
-              <a:rPr lang="en-US" dirty="0" smtClean="0"/>
+              <a:rPr lang="en-US" dirty="0"/>
               <a:t>Click to edit Master title style</a:t>
             </a:r>
-            <a:endParaRPr lang="en-US" dirty="0"/>
           </a:p>
         </p:txBody>
       </p:sp>
@@ -8941,10 +8933,9 @@
           </a:lstStyle>
           <a:p>
             <a:r>
-              <a:rPr lang="en-US" smtClean="0"/>
+              <a:rPr lang="en-US"/>
               <a:t>Click to edit Master subtitle style</a:t>
             </a:r>
-            <a:endParaRPr lang="en-US"/>
           </a:p>
         </p:txBody>
       </p:sp>
@@ -8973,7 +8964,7 @@
           <a:p>
             <a:fld id="{E8BA1A0E-364C-4183-A995-0F7F3E7596BF}" type="datetime1">
               <a:rPr lang="en-US" smtClean="0"/>
-              <a:t>2019-08-23</a:t>
+              <a:t>2026-05-06</a:t>
             </a:fld>
             <a:endParaRPr lang="en-US"/>
           </a:p>
@@ -9276,7 +9267,7 @@
           <a:lstStyle/>
           <a:p>
             <a:r>
-              <a:rPr lang="en-US" dirty="0" smtClean="0">
+              <a:rPr lang="en-US" dirty="0">
                 <a:solidFill>
                   <a:schemeClr val="bg2"/>
                 </a:solidFill>
@@ -9285,18 +9276,13 @@
               <a:t>vscentrum</a:t>
             </a:r>
             <a:r>
-              <a:rPr lang="en-US" dirty="0" smtClean="0">
+              <a:rPr lang="en-US" dirty="0">
                 <a:solidFill>
                   <a:schemeClr val="bg2"/>
                 </a:solidFill>
               </a:rPr>
               <a:t>.be</a:t>
             </a:r>
-            <a:endParaRPr lang="en-US" dirty="0">
-              <a:solidFill>
-                <a:schemeClr val="bg2"/>
-              </a:solidFill>
-            </a:endParaRPr>
           </a:p>
         </p:txBody>
       </p:sp>
@@ -9333,14 +9319,7 @@
   <p:clrMapOvr>
     <a:masterClrMapping/>
   </p:clrMapOvr>
-  <p:timing>
-    <p:tnLst>
-      <p:par>
-        <p:cTn id="1" dur="indefinite" restart="never" nodeType="tmRoot"/>
-      </p:par>
-    </p:tnLst>
-  </p:timing>
-  <p:extLst mod="1">
+  <p:extLst>
     <p:ext uri="{DCECCB84-F9BA-43D5-87BE-67443E8EF086}">
       <p15:sldGuideLst xmlns:p15="http://schemas.microsoft.com/office/powerpoint/2012/main">
         <p15:guide id="1" orient="horz" pos="2160">
@@ -9401,10 +9380,9 @@
           </a:lstStyle>
           <a:p>
             <a:r>
-              <a:rPr lang="en-US" smtClean="0"/>
+              <a:rPr lang="en-US"/>
               <a:t>Click to edit Master title style</a:t>
             </a:r>
-            <a:endParaRPr lang="en-US"/>
           </a:p>
         </p:txBody>
       </p:sp>
@@ -9458,38 +9436,37 @@
           <a:p>
             <a:pPr lvl="0"/>
             <a:r>
-              <a:rPr lang="en-US" smtClean="0"/>
+              <a:rPr lang="en-US"/>
               <a:t>Edit Master text styles</a:t>
             </a:r>
           </a:p>
           <a:p>
             <a:pPr lvl="1"/>
             <a:r>
-              <a:rPr lang="en-US" smtClean="0"/>
+              <a:rPr lang="en-US"/>
               <a:t>Second level</a:t>
             </a:r>
           </a:p>
           <a:p>
             <a:pPr lvl="2"/>
             <a:r>
-              <a:rPr lang="en-US" smtClean="0"/>
+              <a:rPr lang="en-US"/>
               <a:t>Third level</a:t>
             </a:r>
           </a:p>
           <a:p>
             <a:pPr lvl="3"/>
             <a:r>
-              <a:rPr lang="en-US" smtClean="0"/>
+              <a:rPr lang="en-US"/>
               <a:t>Fourth level</a:t>
             </a:r>
           </a:p>
           <a:p>
             <a:pPr lvl="4"/>
             <a:r>
-              <a:rPr lang="en-US" smtClean="0"/>
+              <a:rPr lang="en-US"/>
               <a:t>Fifth level</a:t>
             </a:r>
-            <a:endParaRPr lang="en-US"/>
           </a:p>
         </p:txBody>
       </p:sp>
@@ -9552,7 +9529,7 @@
           <a:p>
             <a:pPr lvl="0"/>
             <a:r>
-              <a:rPr lang="en-US" smtClean="0"/>
+              <a:rPr lang="en-US"/>
               <a:t>Edit Master text styles</a:t>
             </a:r>
           </a:p>
@@ -9591,13 +9568,6 @@
   <p:clrMapOvr>
     <a:masterClrMapping/>
   </p:clrMapOvr>
-  <p:timing>
-    <p:tnLst>
-      <p:par>
-        <p:cTn id="1" dur="indefinite" restart="never" nodeType="tmRoot"/>
-      </p:par>
-    </p:tnLst>
-  </p:timing>
 </p:sldLayout>
 </file>
 
@@ -9643,10 +9613,9 @@
           </a:lstStyle>
           <a:p>
             <a:r>
-              <a:rPr lang="en-US" smtClean="0"/>
+              <a:rPr lang="en-US"/>
               <a:t>Click to edit Master title style</a:t>
             </a:r>
-            <a:endParaRPr lang="en-US"/>
           </a:p>
         </p:txBody>
       </p:sp>
@@ -9770,7 +9739,7 @@
           <a:p>
             <a:pPr lvl="0"/>
             <a:r>
-              <a:rPr lang="en-US" smtClean="0"/>
+              <a:rPr lang="en-US"/>
               <a:t>Edit Master text styles</a:t>
             </a:r>
           </a:p>
@@ -9845,10 +9814,9 @@
           <a:lstStyle/>
           <a:p>
             <a:r>
-              <a:rPr lang="en-US" smtClean="0"/>
+              <a:rPr lang="en-US"/>
               <a:t>Click to edit Master title style</a:t>
             </a:r>
-            <a:endParaRPr lang="en-US"/>
           </a:p>
         </p:txBody>
       </p:sp>
@@ -9869,38 +9837,37 @@
           <a:p>
             <a:pPr lvl="0"/>
             <a:r>
-              <a:rPr lang="en-US" smtClean="0"/>
+              <a:rPr lang="en-US"/>
               <a:t>Edit Master text styles</a:t>
             </a:r>
           </a:p>
           <a:p>
             <a:pPr lvl="1"/>
             <a:r>
-              <a:rPr lang="en-US" smtClean="0"/>
+              <a:rPr lang="en-US"/>
               <a:t>Second level</a:t>
             </a:r>
           </a:p>
           <a:p>
             <a:pPr lvl="2"/>
             <a:r>
-              <a:rPr lang="en-US" smtClean="0"/>
+              <a:rPr lang="en-US"/>
               <a:t>Third level</a:t>
             </a:r>
           </a:p>
           <a:p>
             <a:pPr lvl="3"/>
             <a:r>
-              <a:rPr lang="en-US" smtClean="0"/>
+              <a:rPr lang="en-US"/>
               <a:t>Fourth level</a:t>
             </a:r>
           </a:p>
           <a:p>
             <a:pPr lvl="4"/>
             <a:r>
-              <a:rPr lang="en-US" smtClean="0"/>
+              <a:rPr lang="en-US"/>
               <a:t>Fifth level</a:t>
             </a:r>
-            <a:endParaRPr lang="en-US"/>
           </a:p>
         </p:txBody>
       </p:sp>
@@ -10046,13 +10013,6 @@
   <p:clrMapOvr>
     <a:masterClrMapping/>
   </p:clrMapOvr>
-  <p:timing>
-    <p:tnLst>
-      <p:par>
-        <p:cTn id="1" dur="indefinite" restart="never" nodeType="tmRoot"/>
-      </p:par>
-    </p:tnLst>
-  </p:timing>
 </p:sldLayout>
 </file>
 
@@ -10162,13 +10122,6 @@
   <p:clrMapOvr>
     <a:masterClrMapping/>
   </p:clrMapOvr>
-  <p:timing>
-    <p:tnLst>
-      <p:par>
-        <p:cTn id="1" dur="indefinite" restart="never" nodeType="tmRoot"/>
-      </p:par>
-    </p:tnLst>
-  </p:timing>
 </p:sldLayout>
 </file>
 
@@ -10280,13 +10233,6 @@
   <p:clrMapOvr>
     <a:masterClrMapping/>
   </p:clrMapOvr>
-  <p:timing>
-    <p:tnLst>
-      <p:par>
-        <p:cTn id="1" dur="indefinite" restart="never" nodeType="tmRoot"/>
-      </p:par>
-    </p:tnLst>
-  </p:timing>
 </p:sldLayout>
 </file>
 
@@ -10359,13 +10305,6 @@
   <p:clrMapOvr>
     <a:masterClrMapping/>
   </p:clrMapOvr>
-  <p:timing>
-    <p:tnLst>
-      <p:par>
-        <p:cTn id="1" dur="indefinite" restart="never" nodeType="tmRoot"/>
-      </p:par>
-    </p:tnLst>
-  </p:timing>
 </p:sldLayout>
 </file>
 
@@ -10402,10 +10341,9 @@
           <a:lstStyle/>
           <a:p>
             <a:r>
-              <a:rPr lang="en-US" smtClean="0"/>
+              <a:rPr lang="en-US"/>
               <a:t>Click to edit Master title style</a:t>
             </a:r>
-            <a:endParaRPr lang="en-US"/>
           </a:p>
         </p:txBody>
       </p:sp>
@@ -10426,38 +10364,37 @@
           <a:p>
             <a:pPr lvl="0"/>
             <a:r>
-              <a:rPr lang="en-US" smtClean="0"/>
+              <a:rPr lang="en-US"/>
               <a:t>Edit Master text styles</a:t>
             </a:r>
           </a:p>
           <a:p>
             <a:pPr lvl="1"/>
             <a:r>
-              <a:rPr lang="en-US" smtClean="0"/>
+              <a:rPr lang="en-US"/>
               <a:t>Second level</a:t>
             </a:r>
           </a:p>
           <a:p>
             <a:pPr lvl="2"/>
             <a:r>
-              <a:rPr lang="en-US" smtClean="0"/>
+              <a:rPr lang="en-US"/>
               <a:t>Third level</a:t>
             </a:r>
           </a:p>
           <a:p>
             <a:pPr lvl="3"/>
             <a:r>
-              <a:rPr lang="en-US" smtClean="0"/>
+              <a:rPr lang="en-US"/>
               <a:t>Fourth level</a:t>
             </a:r>
           </a:p>
           <a:p>
             <a:pPr lvl="4"/>
             <a:r>
-              <a:rPr lang="en-US" smtClean="0"/>
+              <a:rPr lang="en-US"/>
               <a:t>Fifth level</a:t>
             </a:r>
-            <a:endParaRPr lang="en-US"/>
           </a:p>
         </p:txBody>
       </p:sp>
@@ -10478,7 +10415,7 @@
           <a:p>
             <a:fld id="{4940FBB2-602E-4B42-A747-9CF7EF118304}" type="datetime1">
               <a:rPr lang="en-US" smtClean="0"/>
-              <a:t>2019-08-23</a:t>
+              <a:t>2026-05-06</a:t>
             </a:fld>
             <a:endParaRPr lang="en-US"/>
           </a:p>
@@ -10793,13 +10730,6 @@
   <p:clrMapOvr>
     <a:masterClrMapping/>
   </p:clrMapOvr>
-  <p:timing>
-    <p:tnLst>
-      <p:par>
-        <p:cTn id="1" dur="indefinite" restart="never" nodeType="tmRoot"/>
-      </p:par>
-    </p:tnLst>
-  </p:timing>
 </p:sldLayout>
 </file>
 
@@ -12436,10 +12366,9 @@
           </a:lstStyle>
           <a:p>
             <a:r>
-              <a:rPr lang="en-US" smtClean="0"/>
+              <a:rPr lang="en-US"/>
               <a:t>Click to edit Master title style</a:t>
             </a:r>
-            <a:endParaRPr lang="en-US"/>
           </a:p>
         </p:txBody>
       </p:sp>
@@ -12556,7 +12485,7 @@
           <a:p>
             <a:pPr lvl="0"/>
             <a:r>
-              <a:rPr lang="en-US" smtClean="0"/>
+              <a:rPr lang="en-US"/>
               <a:t>Edit Master text styles</a:t>
             </a:r>
           </a:p>
@@ -12579,7 +12508,7 @@
           <a:p>
             <a:fld id="{4AB9213C-A76D-4936-9EE8-1986AC361683}" type="datetime1">
               <a:rPr lang="en-US" smtClean="0"/>
-              <a:t>2019-08-23</a:t>
+              <a:t>2026-05-06</a:t>
             </a:fld>
             <a:endParaRPr lang="en-US"/>
           </a:p>
@@ -12668,13 +12597,6 @@
     <a:masterClrMapping/>
   </p:clrMapOvr>
   <p:transition advClick="0"/>
-  <p:timing>
-    <p:tnLst>
-      <p:par>
-        <p:cTn id="1" dur="indefinite" restart="never" nodeType="tmRoot"/>
-      </p:par>
-    </p:tnLst>
-  </p:timing>
 </p:sldLayout>
 </file>
 
@@ -12711,10 +12633,9 @@
           <a:lstStyle/>
           <a:p>
             <a:r>
-              <a:rPr lang="en-US" smtClean="0"/>
+              <a:rPr lang="en-US"/>
               <a:t>Click to edit Master title style</a:t>
             </a:r>
-            <a:endParaRPr lang="en-US"/>
           </a:p>
         </p:txBody>
       </p:sp>
@@ -12740,38 +12661,37 @@
           <a:p>
             <a:pPr lvl="0"/>
             <a:r>
-              <a:rPr lang="en-US" smtClean="0"/>
+              <a:rPr lang="en-US"/>
               <a:t>Edit Master text styles</a:t>
             </a:r>
           </a:p>
           <a:p>
             <a:pPr lvl="1"/>
             <a:r>
-              <a:rPr lang="en-US" smtClean="0"/>
+              <a:rPr lang="en-US"/>
               <a:t>Second level</a:t>
             </a:r>
           </a:p>
           <a:p>
             <a:pPr lvl="2"/>
             <a:r>
-              <a:rPr lang="en-US" smtClean="0"/>
+              <a:rPr lang="en-US"/>
               <a:t>Third level</a:t>
             </a:r>
           </a:p>
           <a:p>
             <a:pPr lvl="3"/>
             <a:r>
-              <a:rPr lang="en-US" smtClean="0"/>
+              <a:rPr lang="en-US"/>
               <a:t>Fourth level</a:t>
             </a:r>
           </a:p>
           <a:p>
             <a:pPr lvl="4"/>
             <a:r>
-              <a:rPr lang="en-US" smtClean="0"/>
+              <a:rPr lang="en-US"/>
               <a:t>Fifth level</a:t>
             </a:r>
-            <a:endParaRPr lang="en-US"/>
           </a:p>
         </p:txBody>
       </p:sp>
@@ -12797,38 +12717,37 @@
           <a:p>
             <a:pPr lvl="0"/>
             <a:r>
-              <a:rPr lang="en-US" smtClean="0"/>
+              <a:rPr lang="en-US"/>
               <a:t>Edit Master text styles</a:t>
             </a:r>
           </a:p>
           <a:p>
             <a:pPr lvl="1"/>
             <a:r>
-              <a:rPr lang="en-US" smtClean="0"/>
+              <a:rPr lang="en-US"/>
               <a:t>Second level</a:t>
             </a:r>
           </a:p>
           <a:p>
             <a:pPr lvl="2"/>
             <a:r>
-              <a:rPr lang="en-US" smtClean="0"/>
+              <a:rPr lang="en-US"/>
               <a:t>Third level</a:t>
             </a:r>
           </a:p>
           <a:p>
             <a:pPr lvl="3"/>
             <a:r>
-              <a:rPr lang="en-US" smtClean="0"/>
+              <a:rPr lang="en-US"/>
               <a:t>Fourth level</a:t>
             </a:r>
           </a:p>
           <a:p>
             <a:pPr lvl="4"/>
             <a:r>
-              <a:rPr lang="en-US" smtClean="0"/>
+              <a:rPr lang="en-US"/>
               <a:t>Fifth level</a:t>
             </a:r>
-            <a:endParaRPr lang="en-US"/>
           </a:p>
         </p:txBody>
       </p:sp>
@@ -12849,7 +12768,7 @@
           <a:p>
             <a:fld id="{14EFB339-1FD7-4DAE-BB11-806F6BD9CFA9}" type="datetime1">
               <a:rPr lang="en-US" smtClean="0"/>
-              <a:t>2019-08-23</a:t>
+              <a:t>2026-05-06</a:t>
             </a:fld>
             <a:endParaRPr lang="en-US"/>
           </a:p>
@@ -12948,10 +12867,9 @@
           <a:lstStyle/>
           <a:p>
             <a:r>
-              <a:rPr lang="en-US" smtClean="0"/>
+              <a:rPr lang="en-US"/>
               <a:t>Click to edit Master title style</a:t>
             </a:r>
-            <a:endParaRPr lang="en-US"/>
           </a:p>
         </p:txBody>
       </p:sp>
@@ -13014,7 +12932,7 @@
           <a:p>
             <a:pPr lvl="0"/>
             <a:r>
-              <a:rPr lang="en-US" smtClean="0"/>
+              <a:rPr lang="en-US"/>
               <a:t>Edit Master text styles</a:t>
             </a:r>
           </a:p>
@@ -13042,38 +12960,37 @@
           <a:p>
             <a:pPr lvl="0"/>
             <a:r>
-              <a:rPr lang="en-US" smtClean="0"/>
+              <a:rPr lang="en-US"/>
               <a:t>Edit Master text styles</a:t>
             </a:r>
           </a:p>
           <a:p>
             <a:pPr lvl="1"/>
             <a:r>
-              <a:rPr lang="en-US" smtClean="0"/>
+              <a:rPr lang="en-US"/>
               <a:t>Second level</a:t>
             </a:r>
           </a:p>
           <a:p>
             <a:pPr lvl="2"/>
             <a:r>
-              <a:rPr lang="en-US" smtClean="0"/>
+              <a:rPr lang="en-US"/>
               <a:t>Third level</a:t>
             </a:r>
           </a:p>
           <a:p>
             <a:pPr lvl="3"/>
             <a:r>
-              <a:rPr lang="en-US" smtClean="0"/>
+              <a:rPr lang="en-US"/>
               <a:t>Fourth level</a:t>
             </a:r>
           </a:p>
           <a:p>
             <a:pPr lvl="4"/>
             <a:r>
-              <a:rPr lang="en-US" smtClean="0"/>
+              <a:rPr lang="en-US"/>
               <a:t>Fifth level</a:t>
             </a:r>
-            <a:endParaRPr lang="en-US"/>
           </a:p>
         </p:txBody>
       </p:sp>
@@ -13136,7 +13053,7 @@
           <a:p>
             <a:pPr lvl="0"/>
             <a:r>
-              <a:rPr lang="en-US" smtClean="0"/>
+              <a:rPr lang="en-US"/>
               <a:t>Edit Master text styles</a:t>
             </a:r>
           </a:p>
@@ -13164,38 +13081,37 @@
           <a:p>
             <a:pPr lvl="0"/>
             <a:r>
-              <a:rPr lang="en-US" smtClean="0"/>
+              <a:rPr lang="en-US"/>
               <a:t>Edit Master text styles</a:t>
             </a:r>
           </a:p>
           <a:p>
             <a:pPr lvl="1"/>
             <a:r>
-              <a:rPr lang="en-US" smtClean="0"/>
+              <a:rPr lang="en-US"/>
               <a:t>Second level</a:t>
             </a:r>
           </a:p>
           <a:p>
             <a:pPr lvl="2"/>
             <a:r>
-              <a:rPr lang="en-US" smtClean="0"/>
+              <a:rPr lang="en-US"/>
               <a:t>Third level</a:t>
             </a:r>
           </a:p>
           <a:p>
             <a:pPr lvl="3"/>
             <a:r>
-              <a:rPr lang="en-US" smtClean="0"/>
+              <a:rPr lang="en-US"/>
               <a:t>Fourth level</a:t>
             </a:r>
           </a:p>
           <a:p>
             <a:pPr lvl="4"/>
             <a:r>
-              <a:rPr lang="en-US" smtClean="0"/>
+              <a:rPr lang="en-US"/>
               <a:t>Fifth level</a:t>
             </a:r>
-            <a:endParaRPr lang="en-US"/>
           </a:p>
         </p:txBody>
       </p:sp>
@@ -13216,7 +13132,7 @@
           <a:p>
             <a:fld id="{0E1F55F6-D9C4-4241-908D-398DED6EBAB1}" type="datetime1">
               <a:rPr lang="en-US" smtClean="0"/>
-              <a:t>2019-08-23</a:t>
+              <a:t>2026-05-06</a:t>
             </a:fld>
             <a:endParaRPr lang="en-US"/>
           </a:p>
@@ -13310,10 +13226,9 @@
           <a:lstStyle/>
           <a:p>
             <a:r>
-              <a:rPr lang="en-US" smtClean="0"/>
+              <a:rPr lang="en-US"/>
               <a:t>Click to edit Master title style</a:t>
             </a:r>
-            <a:endParaRPr lang="en-US"/>
           </a:p>
         </p:txBody>
       </p:sp>
@@ -13334,7 +13249,7 @@
           <a:p>
             <a:fld id="{92FB5E62-F774-4F65-B3A2-2213C25A5AEA}" type="datetime1">
               <a:rPr lang="en-US" smtClean="0"/>
-              <a:t>2019-08-23</a:t>
+              <a:t>2026-05-06</a:t>
             </a:fld>
             <a:endParaRPr lang="en-US"/>
           </a:p>
@@ -13429,7 +13344,7 @@
           <a:p>
             <a:fld id="{4CED0878-CF1B-49ED-AD4E-5ED3D953F768}" type="datetime1">
               <a:rPr lang="en-US" smtClean="0"/>
-              <a:t>2019-08-23</a:t>
+              <a:t>2026-05-06</a:t>
             </a:fld>
             <a:endParaRPr lang="en-US"/>
           </a:p>
@@ -13532,10 +13447,9 @@
           </a:lstStyle>
           <a:p>
             <a:r>
-              <a:rPr lang="en-US" smtClean="0"/>
+              <a:rPr lang="en-US"/>
               <a:t>Click to edit Master title style</a:t>
             </a:r>
-            <a:endParaRPr lang="en-US"/>
           </a:p>
         </p:txBody>
       </p:sp>
@@ -13589,38 +13503,37 @@
           <a:p>
             <a:pPr lvl="0"/>
             <a:r>
-              <a:rPr lang="en-US" smtClean="0"/>
+              <a:rPr lang="en-US"/>
               <a:t>Edit Master text styles</a:t>
             </a:r>
           </a:p>
           <a:p>
             <a:pPr lvl="1"/>
             <a:r>
-              <a:rPr lang="en-US" smtClean="0"/>
+              <a:rPr lang="en-US"/>
               <a:t>Second level</a:t>
             </a:r>
           </a:p>
           <a:p>
             <a:pPr lvl="2"/>
             <a:r>
-              <a:rPr lang="en-US" smtClean="0"/>
+              <a:rPr lang="en-US"/>
               <a:t>Third level</a:t>
             </a:r>
           </a:p>
           <a:p>
             <a:pPr lvl="3"/>
             <a:r>
-              <a:rPr lang="en-US" smtClean="0"/>
+              <a:rPr lang="en-US"/>
               <a:t>Fourth level</a:t>
             </a:r>
           </a:p>
           <a:p>
             <a:pPr lvl="4"/>
             <a:r>
-              <a:rPr lang="en-US" smtClean="0"/>
+              <a:rPr lang="en-US"/>
               <a:t>Fifth level</a:t>
             </a:r>
-            <a:endParaRPr lang="en-US"/>
           </a:p>
         </p:txBody>
       </p:sp>
@@ -13683,7 +13596,7 @@
           <a:p>
             <a:pPr lvl="0"/>
             <a:r>
-              <a:rPr lang="en-US" smtClean="0"/>
+              <a:rPr lang="en-US"/>
               <a:t>Edit Master text styles</a:t>
             </a:r>
           </a:p>
@@ -13706,7 +13619,7 @@
           <a:p>
             <a:fld id="{B3D32334-80A3-4CEF-85FC-5DDF56E1E7C0}" type="datetime1">
               <a:rPr lang="en-US" smtClean="0"/>
-              <a:t>2019-08-23</a:t>
+              <a:t>2026-05-06</a:t>
             </a:fld>
             <a:endParaRPr lang="en-US"/>
           </a:p>
@@ -13809,10 +13722,9 @@
           </a:lstStyle>
           <a:p>
             <a:r>
-              <a:rPr lang="en-US" smtClean="0"/>
+              <a:rPr lang="en-US"/>
               <a:t>Click to edit Master title style</a:t>
             </a:r>
-            <a:endParaRPr lang="en-US"/>
           </a:p>
         </p:txBody>
       </p:sp>
@@ -13936,7 +13848,7 @@
           <a:p>
             <a:pPr lvl="0"/>
             <a:r>
-              <a:rPr lang="en-US" smtClean="0"/>
+              <a:rPr lang="en-US"/>
               <a:t>Edit Master text styles</a:t>
             </a:r>
           </a:p>
@@ -13959,7 +13871,7 @@
           <a:p>
             <a:fld id="{CA404258-DD8C-4FD4-A6A9-83DE392C6C3F}" type="datetime1">
               <a:rPr lang="en-US" smtClean="0"/>
-              <a:t>2019-08-23</a:t>
+              <a:t>2026-05-06</a:t>
             </a:fld>
             <a:endParaRPr lang="en-US"/>
           </a:p>
@@ -14068,10 +13980,9 @@
           <a:lstStyle/>
           <a:p>
             <a:r>
-              <a:rPr lang="en-US" smtClean="0"/>
+              <a:rPr lang="en-US"/>
               <a:t>Click to edit Master title style</a:t>
             </a:r>
-            <a:endParaRPr lang="en-US"/>
           </a:p>
         </p:txBody>
       </p:sp>
@@ -14102,38 +14013,37 @@
           <a:p>
             <a:pPr lvl="0"/>
             <a:r>
-              <a:rPr lang="en-US" smtClean="0"/>
+              <a:rPr lang="en-US"/>
               <a:t>Edit Master text styles</a:t>
             </a:r>
           </a:p>
           <a:p>
             <a:pPr lvl="1"/>
             <a:r>
-              <a:rPr lang="en-US" smtClean="0"/>
+              <a:rPr lang="en-US"/>
               <a:t>Second level</a:t>
             </a:r>
           </a:p>
           <a:p>
             <a:pPr lvl="2"/>
             <a:r>
-              <a:rPr lang="en-US" smtClean="0"/>
+              <a:rPr lang="en-US"/>
               <a:t>Third level</a:t>
             </a:r>
           </a:p>
           <a:p>
             <a:pPr lvl="3"/>
             <a:r>
-              <a:rPr lang="en-US" smtClean="0"/>
+              <a:rPr lang="en-US"/>
               <a:t>Fourth level</a:t>
             </a:r>
           </a:p>
           <a:p>
             <a:pPr lvl="4"/>
             <a:r>
-              <a:rPr lang="en-US" smtClean="0"/>
+              <a:rPr lang="en-US"/>
               <a:t>Fifth level</a:t>
             </a:r>
-            <a:endParaRPr lang="en-US"/>
           </a:p>
         </p:txBody>
       </p:sp>
@@ -14172,7 +14082,7 @@
           <a:p>
             <a:fld id="{80333226-38AF-4D55-9F51-5A04A4858D36}" type="datetime1">
               <a:rPr lang="en-US" smtClean="0"/>
-              <a:t>2019-08-23</a:t>
+              <a:t>2026-05-06</a:t>
             </a:fld>
             <a:endParaRPr lang="en-US"/>
           </a:p>
@@ -14753,10 +14663,9 @@
           <a:lstStyle/>
           <a:p>
             <a:r>
-              <a:rPr lang="en-US" dirty="0" smtClean="0"/>
+              <a:rPr lang="en-US" dirty="0"/>
               <a:t>Click to edit Master title style</a:t>
             </a:r>
-            <a:endParaRPr lang="en-US" dirty="0"/>
           </a:p>
         </p:txBody>
       </p:sp>
@@ -14787,38 +14696,37 @@
           <a:p>
             <a:pPr lvl="0"/>
             <a:r>
-              <a:rPr lang="en-US" smtClean="0"/>
+              <a:rPr lang="en-US"/>
               <a:t>Edit Master text styles</a:t>
             </a:r>
           </a:p>
           <a:p>
             <a:pPr lvl="1"/>
             <a:r>
-              <a:rPr lang="en-US" smtClean="0"/>
+              <a:rPr lang="en-US"/>
               <a:t>Second level</a:t>
             </a:r>
           </a:p>
           <a:p>
             <a:pPr lvl="2"/>
             <a:r>
-              <a:rPr lang="en-US" smtClean="0"/>
+              <a:rPr lang="en-US"/>
               <a:t>Third level</a:t>
             </a:r>
           </a:p>
           <a:p>
             <a:pPr lvl="3"/>
             <a:r>
-              <a:rPr lang="en-US" smtClean="0"/>
+              <a:rPr lang="en-US"/>
               <a:t>Fourth level</a:t>
             </a:r>
           </a:p>
           <a:p>
             <a:pPr lvl="4"/>
             <a:r>
-              <a:rPr lang="en-US" smtClean="0"/>
+              <a:rPr lang="en-US"/>
               <a:t>Fifth level</a:t>
             </a:r>
-            <a:endParaRPr lang="en-US"/>
           </a:p>
         </p:txBody>
       </p:sp>
@@ -14921,13 +14829,6 @@
     <p:sldLayoutId id="2147483678" r:id="rId18"/>
     <p:sldLayoutId id="2147483679" r:id="rId19"/>
   </p:sldLayoutIdLst>
-  <p:timing>
-    <p:tnLst>
-      <p:par>
-        <p:cTn id="1" dur="indefinite" restart="never" nodeType="tmRoot"/>
-      </p:par>
-    </p:tnLst>
-  </p:timing>
   <p:hf hdr="0" ftr="0" dt="0"/>
   <p:txStyles>
     <p:titleStyle>
@@ -15248,11 +15149,7 @@
           <a:p>
             <a:r>
               <a:rPr lang="en-BE" dirty="0"/>
-              <a:t>Shared memory programming in C++ with Threading Building </a:t>
-            </a:r>
-            <a:r>
-              <a:rPr lang="en-BE" dirty="0" smtClean="0"/>
-              <a:t>Blocks</a:t>
+              <a:t>Shared memory programming in C++ with Threading Building Blocks</a:t>
             </a:r>
             <a:endParaRPr lang="en-US" dirty="0"/>
           </a:p>
@@ -15282,21 +15179,16 @@
           <a:p>
             <a:pPr algn="l"/>
             <a:r>
-              <a:rPr lang="en-BE" sz="2800" dirty="0" smtClean="0"/>
+              <a:rPr lang="en-BE" sz="2800" dirty="0"/>
               <a:t>Geert Jan Bex</a:t>
             </a:r>
-            <a:r>
-              <a:rPr lang="en-US" sz="2800" dirty="0" smtClean="0"/>
-              <a:t/>
-            </a:r>
             <a:br>
-              <a:rPr lang="en-US" sz="2800" dirty="0" smtClean="0"/>
+              <a:rPr lang="en-US" sz="2800" dirty="0"/>
             </a:br>
             <a:r>
-              <a:rPr lang="en-US" sz="2800" dirty="0" smtClean="0"/>
+              <a:rPr lang="en-US" sz="2800" dirty="0"/>
               <a:t>email: geertjan.bex@uhasselt.be</a:t>
             </a:r>
-            <a:endParaRPr lang="en-US" sz="2800" dirty="0"/>
           </a:p>
         </p:txBody>
       </p:sp>
@@ -15560,10 +15452,9 @@
           <a:lstStyle/>
           <a:p>
             <a:r>
-              <a:rPr lang="en-US" dirty="0" smtClean="0"/>
+              <a:rPr lang="en-US" dirty="0"/>
               <a:t>Iterators</a:t>
             </a:r>
-            <a:endParaRPr lang="en-US" dirty="0"/>
           </a:p>
         </p:txBody>
       </p:sp>
@@ -15583,107 +15474,103 @@
           <a:lstStyle/>
           <a:p>
             <a:r>
-              <a:rPr lang="en-US" dirty="0" smtClean="0"/>
+              <a:rPr lang="en-US" dirty="0"/>
               <a:t>Iterators over C++ STL</a:t>
             </a:r>
             <a:br>
-              <a:rPr lang="en-US" dirty="0" smtClean="0"/>
+              <a:rPr lang="en-US" dirty="0"/>
             </a:br>
             <a:r>
-              <a:rPr lang="en-US" dirty="0" smtClean="0"/>
+              <a:rPr lang="en-US" dirty="0"/>
               <a:t>containers, e.g.,</a:t>
             </a:r>
           </a:p>
           <a:p>
             <a:pPr lvl="1"/>
             <a:r>
-              <a:rPr lang="en-US" dirty="0" err="1" smtClean="0">
+              <a:rPr lang="en-US" dirty="0" err="1">
                 <a:latin typeface="Consolas" panose="020B0609020204030204" pitchFamily="49" charset="0"/>
               </a:rPr>
               <a:t>cbegin</a:t>
             </a:r>
             <a:r>
-              <a:rPr lang="en-US" dirty="0" smtClean="0"/>
+              <a:rPr lang="en-US" dirty="0"/>
               <a:t>: iterator to first element</a:t>
             </a:r>
-            <a:endParaRPr lang="en-US" dirty="0"/>
           </a:p>
           <a:p>
             <a:pPr lvl="1"/>
             <a:r>
-              <a:rPr lang="en-US" dirty="0" err="1" smtClean="0">
+              <a:rPr lang="en-US" dirty="0" err="1">
                 <a:latin typeface="Consolas" panose="020B0609020204030204" pitchFamily="49" charset="0"/>
               </a:rPr>
               <a:t>cend</a:t>
             </a:r>
             <a:r>
-              <a:rPr lang="en-US" dirty="0" smtClean="0"/>
+              <a:rPr lang="en-US" dirty="0"/>
               <a:t>: iterator to last element</a:t>
             </a:r>
           </a:p>
           <a:p>
             <a:pPr lvl="1"/>
             <a:r>
-              <a:rPr lang="en-US" dirty="0" smtClean="0">
+              <a:rPr lang="en-US" dirty="0">
                 <a:latin typeface="Consolas" panose="020B0609020204030204" pitchFamily="49" charset="0"/>
               </a:rPr>
               <a:t>it</a:t>
             </a:r>
             <a:r>
-              <a:rPr lang="en-US" dirty="0" smtClean="0"/>
+              <a:rPr lang="en-US" dirty="0"/>
               <a:t>: iterator pointing to current</a:t>
             </a:r>
             <a:br>
-              <a:rPr lang="en-US" dirty="0" smtClean="0"/>
+              <a:rPr lang="en-US" dirty="0"/>
             </a:br>
             <a:r>
-              <a:rPr lang="en-US" dirty="0" smtClean="0"/>
+              <a:rPr lang="en-US" dirty="0"/>
               <a:t>value (</a:t>
             </a:r>
             <a:r>
-              <a:rPr lang="en-US" dirty="0" err="1" smtClean="0">
+              <a:rPr lang="en-US" dirty="0" err="1">
                 <a:latin typeface="Consolas" panose="020B0609020204030204" pitchFamily="49" charset="0"/>
               </a:rPr>
               <a:t>const</a:t>
             </a:r>
             <a:r>
-              <a:rPr lang="en-US" dirty="0" smtClean="0"/>
+              <a:rPr lang="en-US" dirty="0"/>
               <a:t>)</a:t>
             </a:r>
           </a:p>
           <a:p>
             <a:pPr lvl="1"/>
             <a:r>
-              <a:rPr lang="en-US" dirty="0" smtClean="0"/>
+              <a:rPr lang="en-US" dirty="0"/>
               <a:t>non-</a:t>
             </a:r>
             <a:r>
-              <a:rPr lang="en-US" dirty="0" err="1" smtClean="0"/>
+              <a:rPr lang="en-US" dirty="0" err="1"/>
               <a:t>const</a:t>
             </a:r>
             <a:r>
-              <a:rPr lang="en-US" dirty="0" smtClean="0"/>
+              <a:rPr lang="en-US" dirty="0"/>
               <a:t> iterators: </a:t>
             </a:r>
             <a:r>
-              <a:rPr lang="en-US" dirty="0" smtClean="0">
+              <a:rPr lang="en-US" dirty="0">
                 <a:latin typeface="Consolas" panose="020B0609020204030204" pitchFamily="49" charset="0"/>
               </a:rPr>
               <a:t>begin</a:t>
             </a:r>
             <a:r>
-              <a:rPr lang="en-US" dirty="0" smtClean="0"/>
+              <a:rPr lang="en-US" dirty="0"/>
               <a:t>/</a:t>
             </a:r>
             <a:r>
-              <a:rPr lang="en-US" dirty="0" smtClean="0">
+              <a:rPr lang="en-US" dirty="0">
                 <a:latin typeface="Consolas" panose="020B0609020204030204" pitchFamily="49" charset="0"/>
               </a:rPr>
               <a:t>end</a:t>
             </a:r>
-            <a:endParaRPr lang="en-US" dirty="0">
-              <a:latin typeface="Consolas" panose="020B0609020204030204" pitchFamily="49" charset="0"/>
-            </a:endParaRPr>
           </a:p>
         </p:txBody>
       </p:sp>
@@ -15886,7 +15773,7 @@
               <a:t>i</a:t>
             </a:r>
             <a:r>
-              <a:rPr lang="en-US" sz="1600" dirty="0" smtClean="0">
+              <a:rPr lang="en-US" sz="1600" dirty="0">
                 <a:latin typeface="Consolas" panose="020B0609020204030204" pitchFamily="49" charset="0"/>
               </a:rPr>
               <a:t>);</a:t>
@@ -16053,7 +15940,7 @@
               <a:t>endl</a:t>
             </a:r>
             <a:r>
-              <a:rPr lang="en-US" sz="1600" dirty="0" smtClean="0">
+              <a:rPr lang="en-US" sz="1600" dirty="0">
                 <a:latin typeface="Consolas" panose="020B0609020204030204" pitchFamily="49" charset="0"/>
               </a:rPr>
               <a:t>;</a:t>
@@ -16142,14 +16029,11 @@
           </a:p>
           <a:p>
             <a:r>
-              <a:rPr lang="en-US" sz="1600" dirty="0" smtClean="0">
+              <a:rPr lang="en-US" sz="1600" dirty="0">
                 <a:latin typeface="Consolas" panose="020B0609020204030204" pitchFamily="49" charset="0"/>
               </a:rPr>
               <a:t>    …</a:t>
             </a:r>
-            <a:endParaRPr lang="en-US" sz="1600" dirty="0">
-              <a:latin typeface="Consolas" panose="020B0609020204030204" pitchFamily="49" charset="0"/>
-            </a:endParaRPr>
           </a:p>
           <a:p>
             <a:r>
@@ -16243,10 +16127,9 @@
             <a:p>
               <a:pPr algn="ctr"/>
               <a:r>
-                <a:rPr lang="en-US" dirty="0" smtClean="0"/>
+                <a:rPr lang="en-US" dirty="0"/>
                 <a:t>0</a:t>
               </a:r>
-              <a:endParaRPr lang="en-US" dirty="0"/>
             </a:p>
           </p:txBody>
         </p:sp>
@@ -16287,10 +16170,9 @@
             <a:p>
               <a:pPr algn="ctr"/>
               <a:r>
-                <a:rPr lang="en-US" dirty="0" smtClean="0"/>
+                <a:rPr lang="en-US" dirty="0"/>
                 <a:t>1</a:t>
               </a:r>
-              <a:endParaRPr lang="en-US" dirty="0"/>
             </a:p>
           </p:txBody>
         </p:sp>
@@ -16331,10 +16213,9 @@
             <a:p>
               <a:pPr algn="ctr"/>
               <a:r>
-                <a:rPr lang="en-US" dirty="0" smtClean="0"/>
+                <a:rPr lang="en-US" dirty="0"/>
                 <a:t>2</a:t>
               </a:r>
-              <a:endParaRPr lang="en-US" dirty="0"/>
             </a:p>
           </p:txBody>
         </p:sp>
@@ -16375,10 +16256,9 @@
             <a:p>
               <a:pPr algn="ctr"/>
               <a:r>
-                <a:rPr lang="en-US" dirty="0" smtClean="0"/>
+                <a:rPr lang="en-US" dirty="0"/>
                 <a:t>3</a:t>
               </a:r>
-              <a:endParaRPr lang="en-US" dirty="0"/>
             </a:p>
           </p:txBody>
         </p:sp>
@@ -16419,10 +16299,9 @@
             <a:p>
               <a:pPr algn="ctr"/>
               <a:r>
-                <a:rPr lang="en-US" dirty="0" smtClean="0"/>
+                <a:rPr lang="en-US" dirty="0"/>
                 <a:t>8</a:t>
               </a:r>
-              <a:endParaRPr lang="en-US" dirty="0"/>
             </a:p>
           </p:txBody>
         </p:sp>
@@ -16463,10 +16342,9 @@
             <a:p>
               <a:pPr algn="ctr"/>
               <a:r>
-                <a:rPr lang="en-US" dirty="0" smtClean="0"/>
+                <a:rPr lang="en-US" dirty="0"/>
                 <a:t>9</a:t>
               </a:r>
-              <a:endParaRPr lang="en-US" dirty="0"/>
             </a:p>
           </p:txBody>
         </p:sp>
@@ -16510,10 +16388,9 @@
             <a:p>
               <a:pPr algn="ctr"/>
               <a:r>
-                <a:rPr lang="en-US" dirty="0" smtClean="0"/>
+                <a:rPr lang="en-US" dirty="0"/>
                 <a:t>…</a:t>
               </a:r>
-              <a:endParaRPr lang="en-US" dirty="0"/>
             </a:p>
           </p:txBody>
         </p:sp>
@@ -16615,20 +16492,17 @@
             <a:lstStyle/>
             <a:p>
               <a:r>
-                <a:rPr lang="en-US" dirty="0" err="1" smtClean="0">
+                <a:rPr lang="en-US" dirty="0" err="1">
                   <a:latin typeface="Consolas" panose="020B0609020204030204" pitchFamily="49" charset="0"/>
                 </a:rPr>
                 <a:t>v.cbegin</a:t>
               </a:r>
               <a:r>
-                <a:rPr lang="en-US" dirty="0" smtClean="0">
+                <a:rPr lang="en-US" dirty="0">
                   <a:latin typeface="Consolas" panose="020B0609020204030204" pitchFamily="49" charset="0"/>
                 </a:rPr>
                 <a:t>()</a:t>
               </a:r>
-              <a:endParaRPr lang="en-US" dirty="0">
-                <a:latin typeface="Consolas" panose="020B0609020204030204" pitchFamily="49" charset="0"/>
-              </a:endParaRPr>
             </a:p>
           </p:txBody>
         </p:sp>
@@ -16708,20 +16582,17 @@
             <a:lstStyle/>
             <a:p>
               <a:r>
-                <a:rPr lang="en-US" dirty="0" err="1" smtClean="0">
+                <a:rPr lang="en-US" dirty="0" err="1">
                   <a:latin typeface="Consolas" panose="020B0609020204030204" pitchFamily="49" charset="0"/>
                 </a:rPr>
                 <a:t>v.cend</a:t>
               </a:r>
               <a:r>
-                <a:rPr lang="en-US" dirty="0" smtClean="0">
+                <a:rPr lang="en-US" dirty="0">
                   <a:latin typeface="Consolas" panose="020B0609020204030204" pitchFamily="49" charset="0"/>
                 </a:rPr>
                 <a:t>()</a:t>
               </a:r>
-              <a:endParaRPr lang="en-US" dirty="0">
-                <a:latin typeface="Consolas" panose="020B0609020204030204" pitchFamily="49" charset="0"/>
-              </a:endParaRPr>
             </a:p>
           </p:txBody>
         </p:sp>
@@ -16802,14 +16673,11 @@
             <a:lstStyle/>
             <a:p>
               <a:r>
-                <a:rPr lang="en-US" dirty="0" smtClean="0">
+                <a:rPr lang="en-US" dirty="0">
                   <a:latin typeface="Consolas" panose="020B0609020204030204" pitchFamily="49" charset="0"/>
                 </a:rPr>
                 <a:t>it</a:t>
               </a:r>
-              <a:endParaRPr lang="en-US" dirty="0">
-                <a:latin typeface="Consolas" panose="020B0609020204030204" pitchFamily="49" charset="0"/>
-              </a:endParaRPr>
             </a:p>
           </p:txBody>
         </p:sp>
@@ -16876,10 +16744,9 @@
           <a:lstStyle/>
           <a:p>
             <a:r>
-              <a:rPr lang="en-US" dirty="0" smtClean="0"/>
+              <a:rPr lang="en-US" dirty="0"/>
               <a:t>…</a:t>
             </a:r>
-            <a:endParaRPr lang="en-US" dirty="0"/>
           </a:p>
         </p:txBody>
       </p:sp>
@@ -16893,13 +16760,6 @@
   <p:clrMapOvr>
     <a:masterClrMapping/>
   </p:clrMapOvr>
-  <p:timing>
-    <p:tnLst>
-      <p:par>
-        <p:cTn id="1" dur="indefinite" restart="never" nodeType="tmRoot"/>
-      </p:par>
-    </p:tnLst>
-  </p:timing>
 </p:sld>
 </file>
 
@@ -16936,26 +16796,23 @@
           <a:lstStyle/>
           <a:p>
             <a:r>
-              <a:rPr lang="en-US" dirty="0" smtClean="0"/>
+              <a:rPr lang="en-US" dirty="0"/>
               <a:t>Classes/</a:t>
             </a:r>
             <a:r>
-              <a:rPr lang="en-US" dirty="0" err="1" smtClean="0"/>
+              <a:rPr lang="en-US" dirty="0" err="1"/>
               <a:t>structs</a:t>
             </a:r>
             <a:r>
-              <a:rPr lang="en-US" dirty="0" smtClean="0"/>
+              <a:rPr lang="en-US" dirty="0"/>
               <a:t> defining </a:t>
             </a:r>
             <a:r>
-              <a:rPr lang="en-US" dirty="0" smtClean="0">
+              <a:rPr lang="en-US" dirty="0">
                 <a:latin typeface="Consolas" panose="020B0609020204030204" pitchFamily="49" charset="0"/>
               </a:rPr>
               <a:t>operator()</a:t>
             </a:r>
-            <a:endParaRPr lang="en-US" dirty="0">
-              <a:latin typeface="Consolas" panose="020B0609020204030204" pitchFamily="49" charset="0"/>
-            </a:endParaRPr>
           </a:p>
         </p:txBody>
       </p:sp>
@@ -17070,30 +16927,15 @@
               <a:rPr lang="en-US" sz="1600" dirty="0">
                 <a:latin typeface="Consolas" panose="020B0609020204030204" pitchFamily="49" charset="0"/>
               </a:rPr>
-              <a:t>        double a</a:t>
-            </a:r>
-            <a:r>
-              <a:rPr lang="en-US" sz="1600" dirty="0" smtClean="0">
-                <a:latin typeface="Consolas" panose="020B0609020204030204" pitchFamily="49" charset="0"/>
-              </a:rPr>
-              <a:t>_, b_, c_;</a:t>
-            </a:r>
-            <a:endParaRPr lang="en-US" sz="1600" dirty="0">
-              <a:latin typeface="Consolas" panose="020B0609020204030204" pitchFamily="49" charset="0"/>
-            </a:endParaRPr>
-          </a:p>
-          <a:p>
-            <a:r>
-              <a:rPr lang="en-US" sz="1600" dirty="0" smtClean="0">
-                <a:latin typeface="Consolas" panose="020B0609020204030204" pitchFamily="49" charset="0"/>
-              </a:rPr>
-              <a:t>    public</a:t>
-            </a:r>
+              <a:t>        double a_, b_, c_;</a:t>
+            </a:r>
+          </a:p>
+          <a:p>
             <a:r>
               <a:rPr lang="en-US" sz="1600" dirty="0">
                 <a:latin typeface="Consolas" panose="020B0609020204030204" pitchFamily="49" charset="0"/>
               </a:rPr>
-              <a:t>:</a:t>
+              <a:t>    public:</a:t>
             </a:r>
           </a:p>
           <a:p>
@@ -17113,13 +16955,7 @@
               <a:rPr lang="en-US" sz="1600" dirty="0">
                 <a:latin typeface="Consolas" panose="020B0609020204030204" pitchFamily="49" charset="0"/>
               </a:rPr>
-              <a:t>(double a, double b, double c) </a:t>
-            </a:r>
-            <a:r>
-              <a:rPr lang="en-US" sz="1600" dirty="0" smtClean="0">
-                <a:latin typeface="Consolas" panose="020B0609020204030204" pitchFamily="49" charset="0"/>
-              </a:rPr>
-              <a:t>:</a:t>
+              <a:t>(double a, double b, double c) :</a:t>
             </a:r>
           </a:p>
           <a:p>
@@ -17127,19 +16963,7 @@
               <a:rPr lang="en-US" sz="1600" dirty="0">
                 <a:latin typeface="Consolas" panose="020B0609020204030204" pitchFamily="49" charset="0"/>
               </a:rPr>
-              <a:t> </a:t>
-            </a:r>
-            <a:r>
-              <a:rPr lang="en-US" sz="1600" dirty="0" smtClean="0">
-                <a:latin typeface="Consolas" panose="020B0609020204030204" pitchFamily="49" charset="0"/>
-              </a:rPr>
-              <a:t>           a</a:t>
-            </a:r>
-            <a:r>
-              <a:rPr lang="en-US" sz="1600" dirty="0">
-                <a:latin typeface="Consolas" panose="020B0609020204030204" pitchFamily="49" charset="0"/>
-              </a:rPr>
-              <a:t>_ {a}, b_ {b}, c_ {c} {}</a:t>
+              <a:t>            a_ {a}, b_ {b}, c_ {c} {}</a:t>
             </a:r>
           </a:p>
           <a:p>
@@ -17174,41 +16998,8 @@
                 </a:solidFill>
                 <a:latin typeface="Consolas" panose="020B0609020204030204" pitchFamily="49" charset="0"/>
               </a:rPr>
-              <a:t> double x) </a:t>
-            </a:r>
-            <a:r>
-              <a:rPr lang="en-US" sz="1600" b="1" dirty="0" smtClean="0">
-                <a:solidFill>
-                  <a:srgbClr val="C00000"/>
-                </a:solidFill>
-                <a:latin typeface="Consolas" panose="020B0609020204030204" pitchFamily="49" charset="0"/>
-              </a:rPr>
-              <a:t>{return </a:t>
-            </a:r>
-            <a:r>
-              <a:rPr lang="en-US" sz="1600" b="1" dirty="0">
-                <a:solidFill>
-                  <a:srgbClr val="C00000"/>
-                </a:solidFill>
-                <a:latin typeface="Consolas" panose="020B0609020204030204" pitchFamily="49" charset="0"/>
-              </a:rPr>
-              <a:t>(a_*x + b_)*x + c</a:t>
-            </a:r>
-            <a:r>
-              <a:rPr lang="en-US" sz="1600" b="1" dirty="0" smtClean="0">
-                <a:solidFill>
-                  <a:srgbClr val="C00000"/>
-                </a:solidFill>
-                <a:latin typeface="Consolas" panose="020B0609020204030204" pitchFamily="49" charset="0"/>
-              </a:rPr>
-              <a:t>_; }</a:t>
-            </a:r>
-            <a:endParaRPr lang="en-US" sz="1600" b="1" dirty="0">
-              <a:solidFill>
-                <a:srgbClr val="C00000"/>
-              </a:solidFill>
-              <a:latin typeface="Consolas" panose="020B0609020204030204" pitchFamily="49" charset="0"/>
-            </a:endParaRPr>
+              <a:t> double x) {return (a_*x + b_)*x + c_; }</a:t>
+            </a:r>
           </a:p>
           <a:p>
             <a:r>
@@ -17433,7 +17224,7 @@
                     </m:oMath>
                   </a14:m>
                   <a:r>
-                    <a:rPr lang="en-US" dirty="0" smtClean="0"/>
+                    <a:rPr lang="en-US" dirty="0"/>
                     <a:t>: x </a:t>
                   </a:r>
                   <a14:m>
@@ -17587,7 +17378,7 @@
                     </m:oMath>
                   </a14:m>
                   <a:r>
-                    <a:rPr lang="en-US" dirty="0" smtClean="0"/>
+                    <a:rPr lang="en-US" dirty="0"/>
                     <a:t>: x </a:t>
                   </a:r>
                   <a14:m>
@@ -17823,10 +17614,9 @@
           <a:lstStyle/>
           <a:p>
             <a:r>
-              <a:rPr lang="en-US" dirty="0" smtClean="0"/>
+              <a:rPr lang="en-US" dirty="0"/>
               <a:t>Lambda functions</a:t>
             </a:r>
-            <a:endParaRPr lang="en-US" dirty="0"/>
           </a:p>
         </p:txBody>
       </p:sp>
@@ -17846,32 +17636,32 @@
           <a:lstStyle/>
           <a:p>
             <a:r>
-              <a:rPr lang="en-US" dirty="0" err="1" smtClean="0">
+              <a:rPr lang="en-US" dirty="0" err="1">
                 <a:latin typeface="Consolas" panose="020B0609020204030204" pitchFamily="49" charset="0"/>
               </a:rPr>
               <a:t>std</a:t>
             </a:r>
             <a:r>
-              <a:rPr lang="en-US" dirty="0" smtClean="0">
+              <a:rPr lang="en-US" dirty="0">
                 <a:latin typeface="Consolas" panose="020B0609020204030204" pitchFamily="49" charset="0"/>
               </a:rPr>
               <a:t>::</a:t>
             </a:r>
             <a:r>
-              <a:rPr lang="en-US" dirty="0" err="1" smtClean="0">
+              <a:rPr lang="en-US" dirty="0" err="1">
                 <a:latin typeface="Consolas" panose="020B0609020204030204" pitchFamily="49" charset="0"/>
               </a:rPr>
               <a:t>for_each</a:t>
             </a:r>
             <a:r>
-              <a:rPr lang="en-US" dirty="0" smtClean="0"/>
+              <a:rPr lang="en-US" dirty="0"/>
               <a:t> modifies</a:t>
             </a:r>
             <a:br>
-              <a:rPr lang="en-US" dirty="0" smtClean="0"/>
+              <a:rPr lang="en-US" dirty="0"/>
             </a:br>
             <a:r>
-              <a:rPr lang="en-US" dirty="0" smtClean="0"/>
+              <a:rPr lang="en-US" dirty="0"/>
               <a:t>container element in-place</a:t>
             </a:r>
           </a:p>
@@ -17895,61 +17685,60 @@
               <a:t> </a:t>
             </a:r>
             <a:r>
-              <a:rPr lang="en-US" i="1" dirty="0" smtClean="0">
+              <a:rPr lang="en-US" i="1" dirty="0">
                 <a:sym typeface="Symbol" panose="05050102010706020507" pitchFamily="18" charset="2"/>
               </a:rPr>
               <a:t>x</a:t>
             </a:r>
             <a:r>
-              <a:rPr lang="en-US" baseline="30000" dirty="0" smtClean="0">
+              <a:rPr lang="en-US" baseline="30000" dirty="0">
                 <a:sym typeface="Symbol" panose="05050102010706020507" pitchFamily="18" charset="2"/>
               </a:rPr>
               <a:t>2</a:t>
             </a:r>
-            <a:endParaRPr lang="en-US" dirty="0" smtClean="0"/>
-          </a:p>
-          <a:p>
-            <a:r>
-              <a:rPr lang="en-US" dirty="0" smtClean="0"/>
+            <a:endParaRPr lang="en-US" dirty="0"/>
+          </a:p>
+          <a:p>
+            <a:r>
+              <a:rPr lang="en-US" dirty="0"/>
               <a:t>Lambda function = unnamed</a:t>
             </a:r>
             <a:br>
-              <a:rPr lang="en-US" dirty="0" smtClean="0"/>
+              <a:rPr lang="en-US" dirty="0"/>
             </a:br>
             <a:r>
-              <a:rPr lang="en-US" dirty="0" smtClean="0"/>
+              <a:rPr lang="en-US" dirty="0"/>
               <a:t>function, used once</a:t>
             </a:r>
           </a:p>
           <a:p>
             <a:r>
-              <a:rPr lang="en-US" dirty="0" smtClean="0"/>
+              <a:rPr lang="en-US" dirty="0"/>
               <a:t>Return type: often deduced</a:t>
             </a:r>
-            <a:endParaRPr lang="en-US" dirty="0"/>
-          </a:p>
-          <a:p>
-            <a:r>
-              <a:rPr lang="en-US" dirty="0" smtClean="0"/>
+          </a:p>
+          <a:p>
+            <a:r>
+              <a:rPr lang="en-US" dirty="0"/>
               <a:t>General form:</a:t>
             </a:r>
             <a:br>
-              <a:rPr lang="en-US" dirty="0" smtClean="0"/>
+              <a:rPr lang="en-US" dirty="0"/>
             </a:br>
             <a:r>
-              <a:rPr lang="en-US" dirty="0" smtClean="0">
+              <a:rPr lang="en-US" dirty="0">
                 <a:latin typeface="Consolas" panose="020B0609020204030204" pitchFamily="49" charset="0"/>
               </a:rPr>
               <a:t>[ … ] ( … ) -&gt; </a:t>
             </a:r>
             <a:r>
-              <a:rPr lang="en-US" dirty="0" err="1" smtClean="0">
+              <a:rPr lang="en-US" dirty="0" err="1">
                 <a:latin typeface="Consolas" panose="020B0609020204030204" pitchFamily="49" charset="0"/>
               </a:rPr>
               <a:t>return_type</a:t>
             </a:r>
             <a:r>
-              <a:rPr lang="en-US" dirty="0" smtClean="0">
+              <a:rPr lang="en-US" dirty="0">
                 <a:latin typeface="Consolas" panose="020B0609020204030204" pitchFamily="49" charset="0"/>
               </a:rPr>
               <a:t> { … }</a:t>
@@ -18018,16 +17807,10 @@
           <a:lstStyle/>
           <a:p>
             <a:r>
-              <a:rPr lang="en-US" sz="1600" dirty="0" smtClean="0">
-                <a:latin typeface="Consolas" panose="020B0609020204030204" pitchFamily="49" charset="0"/>
-              </a:rPr>
-              <a:t>#include </a:t>
-            </a:r>
-            <a:r>
               <a:rPr lang="en-US" sz="1600" dirty="0">
                 <a:latin typeface="Consolas" panose="020B0609020204030204" pitchFamily="49" charset="0"/>
               </a:rPr>
-              <a:t>&lt;algorithm&gt;</a:t>
+              <a:t>#include &lt;algorithm&gt;</a:t>
             </a:r>
           </a:p>
           <a:p>
@@ -18094,83 +17877,62 @@
               <a:rPr lang="en-US" sz="1600" dirty="0">
                 <a:latin typeface="Consolas" panose="020B0609020204030204" pitchFamily="49" charset="0"/>
               </a:rPr>
-              <a:t>::vector&lt;double&gt; v </a:t>
-            </a:r>
-            <a:r>
-              <a:rPr lang="en-US" sz="1600" dirty="0" smtClean="0">
-                <a:latin typeface="Consolas" panose="020B0609020204030204" pitchFamily="49" charset="0"/>
-              </a:rPr>
-              <a:t>{</a:t>
-            </a:r>
+              <a:t>::vector&lt;double&gt; v {0.5, 0.75, 1.0, 1.5, 3.5};</a:t>
+            </a:r>
+          </a:p>
+          <a:p>
             <a:r>
               <a:rPr lang="en-US" sz="1600" dirty="0">
                 <a:latin typeface="Consolas" panose="020B0609020204030204" pitchFamily="49" charset="0"/>
               </a:rPr>
-              <a:t>0.5, 0.75, 1.0, 1.5, 3.5</a:t>
-            </a:r>
-            <a:r>
-              <a:rPr lang="en-US" sz="1600" dirty="0" smtClean="0">
-                <a:latin typeface="Consolas" panose="020B0609020204030204" pitchFamily="49" charset="0"/>
-              </a:rPr>
-              <a:t>};</a:t>
-            </a:r>
-            <a:endParaRPr lang="en-US" sz="1600" dirty="0">
-              <a:latin typeface="Consolas" panose="020B0609020204030204" pitchFamily="49" charset="0"/>
-            </a:endParaRPr>
-          </a:p>
-          <a:p>
+              <a:t>    </a:t>
+            </a:r>
+            <a:r>
+              <a:rPr lang="en-US" sz="1600" dirty="0" err="1">
+                <a:latin typeface="Consolas" panose="020B0609020204030204" pitchFamily="49" charset="0"/>
+              </a:rPr>
+              <a:t>std</a:t>
+            </a:r>
             <a:r>
               <a:rPr lang="en-US" sz="1600" dirty="0">
                 <a:latin typeface="Consolas" panose="020B0609020204030204" pitchFamily="49" charset="0"/>
               </a:rPr>
-              <a:t>    </a:t>
+              <a:t>::</a:t>
             </a:r>
             <a:r>
               <a:rPr lang="en-US" sz="1600" dirty="0" err="1">
                 <a:latin typeface="Consolas" panose="020B0609020204030204" pitchFamily="49" charset="0"/>
               </a:rPr>
-              <a:t>std</a:t>
+              <a:t>for_each</a:t>
             </a:r>
             <a:r>
               <a:rPr lang="en-US" sz="1600" dirty="0">
                 <a:latin typeface="Consolas" panose="020B0609020204030204" pitchFamily="49" charset="0"/>
               </a:rPr>
-              <a:t>::</a:t>
+              <a:t>(</a:t>
             </a:r>
             <a:r>
               <a:rPr lang="en-US" sz="1600" dirty="0" err="1">
                 <a:latin typeface="Consolas" panose="020B0609020204030204" pitchFamily="49" charset="0"/>
               </a:rPr>
-              <a:t>for_each</a:t>
+              <a:t>v.begin</a:t>
             </a:r>
             <a:r>
               <a:rPr lang="en-US" sz="1600" dirty="0">
                 <a:latin typeface="Consolas" panose="020B0609020204030204" pitchFamily="49" charset="0"/>
               </a:rPr>
-              <a:t>(</a:t>
+              <a:t>(), </a:t>
             </a:r>
             <a:r>
               <a:rPr lang="en-US" sz="1600" dirty="0" err="1">
                 <a:latin typeface="Consolas" panose="020B0609020204030204" pitchFamily="49" charset="0"/>
               </a:rPr>
-              <a:t>v.begin</a:t>
+              <a:t>v.end</a:t>
             </a:r>
             <a:r>
               <a:rPr lang="en-US" sz="1600" dirty="0">
                 <a:latin typeface="Consolas" panose="020B0609020204030204" pitchFamily="49" charset="0"/>
               </a:rPr>
-              <a:t>(), </a:t>
-            </a:r>
-            <a:r>
-              <a:rPr lang="en-US" sz="1600" dirty="0" err="1">
-                <a:latin typeface="Consolas" panose="020B0609020204030204" pitchFamily="49" charset="0"/>
-              </a:rPr>
-              <a:t>v.end</a:t>
-            </a:r>
-            <a:r>
-              <a:rPr lang="en-US" sz="1600" dirty="0" smtClean="0">
-                <a:latin typeface="Consolas" panose="020B0609020204030204" pitchFamily="49" charset="0"/>
-              </a:rPr>
               <a:t>(),</a:t>
             </a:r>
           </a:p>
@@ -18179,22 +17941,7 @@
               <a:rPr lang="en-US" sz="1600" dirty="0">
                 <a:latin typeface="Consolas" panose="020B0609020204030204" pitchFamily="49" charset="0"/>
               </a:rPr>
-              <a:t> </a:t>
-            </a:r>
-            <a:r>
-              <a:rPr lang="en-US" sz="1600" dirty="0" smtClean="0">
-                <a:latin typeface="Consolas" panose="020B0609020204030204" pitchFamily="49" charset="0"/>
-              </a:rPr>
-              <a:t>                 </a:t>
-            </a:r>
-            <a:r>
-              <a:rPr lang="en-US" sz="1600" b="1" dirty="0" smtClean="0">
-                <a:solidFill>
-                  <a:srgbClr val="C00000"/>
-                </a:solidFill>
-                <a:latin typeface="Consolas" panose="020B0609020204030204" pitchFamily="49" charset="0"/>
-              </a:rPr>
-              <a:t>[] </a:t>
+              <a:t>                  </a:t>
             </a:r>
             <a:r>
               <a:rPr lang="en-US" sz="1600" b="1" dirty="0">
@@ -18203,7 +17950,7 @@
                 </a:solidFill>
                 <a:latin typeface="Consolas" panose="020B0609020204030204" pitchFamily="49" charset="0"/>
               </a:rPr>
-              <a:t>(double&amp; x) { x *= x; }</a:t>
+              <a:t>[] (double&amp; x) { x *= x; }</a:t>
             </a:r>
             <a:r>
               <a:rPr lang="en-US" sz="1600" dirty="0">
@@ -18349,18 +18096,13 @@
           <a:lstStyle/>
           <a:p>
             <a:r>
-              <a:rPr lang="en-US" dirty="0" smtClean="0">
+              <a:rPr lang="en-US" dirty="0">
                 <a:solidFill>
                   <a:srgbClr val="C00000"/>
                 </a:solidFill>
               </a:rPr>
               <a:t>context</a:t>
             </a:r>
-            <a:endParaRPr lang="en-US" dirty="0">
-              <a:solidFill>
-                <a:srgbClr val="C00000"/>
-              </a:solidFill>
-            </a:endParaRPr>
           </a:p>
         </p:txBody>
       </p:sp>
@@ -18540,18 +18282,13 @@
             <a:lstStyle/>
             <a:p>
               <a:r>
-                <a:rPr lang="en-US" dirty="0" smtClean="0">
+                <a:rPr lang="en-US" dirty="0">
                   <a:solidFill>
                     <a:srgbClr val="0070C0"/>
                   </a:solidFill>
                 </a:rPr>
                 <a:t>arguments</a:t>
               </a:r>
-              <a:endParaRPr lang="en-US" dirty="0">
-                <a:solidFill>
-                  <a:srgbClr val="0070C0"/>
-                </a:solidFill>
-              </a:endParaRPr>
             </a:p>
           </p:txBody>
         </p:sp>
@@ -18670,18 +18407,13 @@
             <a:lstStyle/>
             <a:p>
               <a:r>
-                <a:rPr lang="en-US" dirty="0" smtClean="0">
+                <a:rPr lang="en-US" dirty="0">
                   <a:solidFill>
                     <a:srgbClr val="00B050"/>
                   </a:solidFill>
                 </a:rPr>
                 <a:t>function body</a:t>
               </a:r>
-              <a:endParaRPr lang="en-US" dirty="0">
-                <a:solidFill>
-                  <a:srgbClr val="00B050"/>
-                </a:solidFill>
-              </a:endParaRPr>
             </a:p>
           </p:txBody>
         </p:sp>
@@ -19182,10 +18914,9 @@
           <a:lstStyle/>
           <a:p>
             <a:r>
-              <a:rPr lang="en-US" dirty="0" smtClean="0"/>
+              <a:rPr lang="en-US" dirty="0"/>
               <a:t>Lambda functions &amp; context</a:t>
             </a:r>
-            <a:endParaRPr lang="en-US" dirty="0"/>
           </a:p>
         </p:txBody>
       </p:sp>
@@ -19207,140 +18938,120 @@
           <a:lstStyle/>
           <a:p>
             <a:r>
-              <a:rPr lang="en-US" dirty="0" smtClean="0">
+              <a:rPr lang="en-US" dirty="0">
                 <a:latin typeface="Consolas" panose="020B0609020204030204" pitchFamily="49" charset="0"/>
               </a:rPr>
               <a:t>[]</a:t>
             </a:r>
             <a:r>
-              <a:rPr lang="en-US" dirty="0" smtClean="0"/>
+              <a:rPr lang="en-US" dirty="0"/>
               <a:t>: nothing</a:t>
             </a:r>
           </a:p>
           <a:p>
             <a:r>
-              <a:rPr lang="en-US" dirty="0" smtClean="0">
+              <a:rPr lang="en-US" dirty="0">
                 <a:latin typeface="Consolas" panose="020B0609020204030204" pitchFamily="49" charset="0"/>
               </a:rPr>
               <a:t>[=]</a:t>
             </a:r>
             <a:r>
-              <a:rPr lang="en-US" dirty="0" smtClean="0"/>
+              <a:rPr lang="en-US" dirty="0"/>
               <a:t>: everything in</a:t>
             </a:r>
             <a:br>
-              <a:rPr lang="en-US" dirty="0" smtClean="0"/>
+              <a:rPr lang="en-US" dirty="0"/>
             </a:br>
             <a:r>
-              <a:rPr lang="en-US" dirty="0" smtClean="0"/>
+              <a:rPr lang="en-US" dirty="0"/>
               <a:t>scope by value</a:t>
             </a:r>
             <a:br>
-              <a:rPr lang="en-US" dirty="0" smtClean="0"/>
+              <a:rPr lang="en-US" dirty="0"/>
             </a:br>
             <a:r>
-              <a:rPr lang="en-US" dirty="0" smtClean="0"/>
+              <a:rPr lang="en-US" dirty="0"/>
               <a:t>(copy)</a:t>
             </a:r>
           </a:p>
           <a:p>
             <a:r>
-              <a:rPr lang="en-US" dirty="0" smtClean="0">
+              <a:rPr lang="en-US" dirty="0">
                 <a:latin typeface="Consolas" panose="020B0609020204030204" pitchFamily="49" charset="0"/>
               </a:rPr>
               <a:t>[&amp;]</a:t>
             </a:r>
             <a:r>
-              <a:rPr lang="en-US" dirty="0" smtClean="0"/>
+              <a:rPr lang="en-US" dirty="0"/>
               <a:t>: everything in</a:t>
             </a:r>
             <a:br>
-              <a:rPr lang="en-US" dirty="0" smtClean="0"/>
+              <a:rPr lang="en-US" dirty="0"/>
             </a:br>
             <a:r>
-              <a:rPr lang="en-US" dirty="0" smtClean="0"/>
+              <a:rPr lang="en-US" dirty="0"/>
               <a:t>scope by reference</a:t>
             </a:r>
           </a:p>
           <a:p>
             <a:r>
-              <a:rPr lang="en-US" dirty="0" smtClean="0">
-                <a:latin typeface="Consolas" panose="020B0609020204030204" pitchFamily="49" charset="0"/>
-              </a:rPr>
-              <a:t>[=</a:t>
-            </a:r>
-            <a:r>
-              <a:rPr lang="en-US" dirty="0" err="1" smtClean="0">
+              <a:rPr lang="en-US" dirty="0">
+                <a:latin typeface="Consolas" panose="020B0609020204030204" pitchFamily="49" charset="0"/>
+              </a:rPr>
+              <a:t>[var]</a:t>
+            </a:r>
+            <a:r>
+              <a:rPr lang="en-US" dirty="0"/>
+              <a:t>: variable </a:t>
+            </a:r>
+            <a:r>
+              <a:rPr lang="en-US" dirty="0">
                 <a:latin typeface="Consolas" panose="020B0609020204030204" pitchFamily="49" charset="0"/>
               </a:rPr>
               <a:t>var</a:t>
             </a:r>
-            <a:r>
-              <a:rPr lang="en-US" dirty="0" smtClean="0">
+            <a:br>
+              <a:rPr lang="en-US" dirty="0"/>
+            </a:br>
+            <a:r>
+              <a:rPr lang="en-US" dirty="0"/>
+              <a:t>by  value (copy)</a:t>
+            </a:r>
+          </a:p>
+          <a:p>
+            <a:r>
+              <a:rPr lang="en-US" dirty="0">
+                <a:latin typeface="Consolas" panose="020B0609020204030204" pitchFamily="49" charset="0"/>
+              </a:rPr>
+              <a:t>[&amp;</a:t>
+            </a:r>
+            <a:r>
+              <a:rPr lang="en-US" dirty="0" err="1">
+                <a:latin typeface="Consolas" panose="020B0609020204030204" pitchFamily="49" charset="0"/>
+              </a:rPr>
+              <a:t>var</a:t>
+            </a:r>
+            <a:r>
+              <a:rPr lang="en-US" dirty="0">
                 <a:latin typeface="Consolas" panose="020B0609020204030204" pitchFamily="49" charset="0"/>
               </a:rPr>
               <a:t>]</a:t>
             </a:r>
             <a:r>
-              <a:rPr lang="en-US" dirty="0" smtClean="0"/>
+              <a:rPr lang="en-US" dirty="0"/>
               <a:t>: variable </a:t>
             </a:r>
             <a:r>
-              <a:rPr lang="en-US" dirty="0" err="1" smtClean="0">
+              <a:rPr lang="en-US" dirty="0" err="1">
                 <a:latin typeface="Consolas" panose="020B0609020204030204" pitchFamily="49" charset="0"/>
               </a:rPr>
               <a:t>var</a:t>
             </a:r>
-            <a:r>
-              <a:rPr lang="en-US" dirty="0" smtClean="0"/>
-              <a:t/>
-            </a:r>
             <a:br>
-              <a:rPr lang="en-US" dirty="0" smtClean="0"/>
+              <a:rPr lang="en-US" dirty="0"/>
             </a:br>
             <a:r>
-              <a:rPr lang="en-US" dirty="0" smtClean="0"/>
-              <a:t>by  value (copy)</a:t>
-            </a:r>
-          </a:p>
-          <a:p>
-            <a:r>
-              <a:rPr lang="en-US" dirty="0" smtClean="0">
-                <a:latin typeface="Consolas" panose="020B0609020204030204" pitchFamily="49" charset="0"/>
-              </a:rPr>
-              <a:t>[&amp;</a:t>
-            </a:r>
-            <a:r>
-              <a:rPr lang="en-US" dirty="0" err="1" smtClean="0">
-                <a:latin typeface="Consolas" panose="020B0609020204030204" pitchFamily="49" charset="0"/>
-              </a:rPr>
-              <a:t>var</a:t>
-            </a:r>
-            <a:r>
-              <a:rPr lang="en-US" dirty="0" smtClean="0">
-                <a:latin typeface="Consolas" panose="020B0609020204030204" pitchFamily="49" charset="0"/>
-              </a:rPr>
-              <a:t>]</a:t>
-            </a:r>
-            <a:r>
-              <a:rPr lang="en-US" dirty="0" smtClean="0"/>
-              <a:t>: variable </a:t>
-            </a:r>
-            <a:r>
-              <a:rPr lang="en-US" dirty="0" err="1" smtClean="0">
-                <a:latin typeface="Consolas" panose="020B0609020204030204" pitchFamily="49" charset="0"/>
-              </a:rPr>
-              <a:t>var</a:t>
-            </a:r>
-            <a:r>
-              <a:rPr lang="en-US" dirty="0" smtClean="0"/>
-              <a:t/>
-            </a:r>
-            <a:br>
-              <a:rPr lang="en-US" dirty="0" smtClean="0"/>
-            </a:br>
-            <a:r>
-              <a:rPr lang="en-US" dirty="0" smtClean="0"/>
+              <a:rPr lang="en-US" dirty="0"/>
               <a:t>by reference</a:t>
             </a:r>
           </a:p>
@@ -19608,7 +19319,7 @@
               <a:t>x_vals.end</a:t>
             </a:r>
             <a:r>
-              <a:rPr lang="en-US" sz="1600" dirty="0" smtClean="0">
+              <a:rPr lang="en-US" sz="1600" dirty="0">
                 <a:latin typeface="Consolas" panose="020B0609020204030204" pitchFamily="49" charset="0"/>
               </a:rPr>
               <a:t>(),</a:t>
@@ -19619,16 +19330,10 @@
               <a:rPr lang="en-US" sz="1600" dirty="0">
                 <a:latin typeface="Consolas" panose="020B0609020204030204" pitchFamily="49" charset="0"/>
               </a:rPr>
-              <a:t> </a:t>
-            </a:r>
-            <a:r>
-              <a:rPr lang="en-US" sz="1600" dirty="0" smtClean="0">
-                <a:latin typeface="Consolas" panose="020B0609020204030204" pitchFamily="49" charset="0"/>
-              </a:rPr>
-              <a:t>                  </a:t>
-            </a:r>
-            <a:r>
-              <a:rPr lang="en-US" sz="1600" dirty="0" err="1" smtClean="0">
+              <a:t>                   </a:t>
+            </a:r>
+            <a:r>
+              <a:rPr lang="en-US" sz="1600" dirty="0" err="1">
                 <a:latin typeface="Consolas" panose="020B0609020204030204" pitchFamily="49" charset="0"/>
               </a:rPr>
               <a:t>std</a:t>
@@ -19670,15 +19375,6 @@
                 <a:latin typeface="Consolas" panose="020B0609020204030204" pitchFamily="49" charset="0"/>
               </a:rPr>
               <a:t>                   </a:t>
-            </a:r>
-            <a:r>
-              <a:rPr lang="en-US" sz="1600" b="1" dirty="0" smtClean="0">
-                <a:solidFill>
-                  <a:srgbClr val="C00000"/>
-                </a:solidFill>
-                <a:latin typeface="Consolas" panose="020B0609020204030204" pitchFamily="49" charset="0"/>
-              </a:rPr>
-              <a:t>[&amp;a</a:t>
             </a:r>
             <a:r>
               <a:rPr lang="en-US" sz="1600" b="1" dirty="0">
@@ -19687,17 +19383,10 @@
                 </a:solidFill>
                 <a:latin typeface="Consolas" panose="020B0609020204030204" pitchFamily="49" charset="0"/>
               </a:rPr>
-              <a:t>, </a:t>
-            </a:r>
-            <a:r>
-              <a:rPr lang="en-US" sz="1600" b="1" dirty="0" smtClean="0">
-                <a:solidFill>
-                  <a:srgbClr val="C00000"/>
-                </a:solidFill>
-                <a:latin typeface="Consolas" panose="020B0609020204030204" pitchFamily="49" charset="0"/>
-              </a:rPr>
-              <a:t>&amp;b</a:t>
-            </a:r>
+              <a:t>[&amp;a, &amp;b, &amp;c] (double&amp; x) {</a:t>
+            </a:r>
+          </a:p>
+          <a:p>
             <a:r>
               <a:rPr lang="en-US" sz="1600" b="1" dirty="0">
                 <a:solidFill>
@@ -19705,79 +19394,8 @@
                 </a:solidFill>
                 <a:latin typeface="Consolas" panose="020B0609020204030204" pitchFamily="49" charset="0"/>
               </a:rPr>
-              <a:t>, </a:t>
-            </a:r>
-            <a:r>
-              <a:rPr lang="en-US" sz="1600" b="1" dirty="0" smtClean="0">
-                <a:solidFill>
-                  <a:srgbClr val="C00000"/>
-                </a:solidFill>
-                <a:latin typeface="Consolas" panose="020B0609020204030204" pitchFamily="49" charset="0"/>
-              </a:rPr>
-              <a:t>&amp;c</a:t>
-            </a:r>
-            <a:r>
-              <a:rPr lang="en-US" sz="1600" b="1" dirty="0">
-                <a:solidFill>
-                  <a:srgbClr val="C00000"/>
-                </a:solidFill>
-                <a:latin typeface="Consolas" panose="020B0609020204030204" pitchFamily="49" charset="0"/>
-              </a:rPr>
-              <a:t>] (double&amp; x</a:t>
-            </a:r>
-            <a:r>
-              <a:rPr lang="en-US" sz="1600" b="1" dirty="0" smtClean="0">
-                <a:solidFill>
-                  <a:srgbClr val="C00000"/>
-                </a:solidFill>
-                <a:latin typeface="Consolas" panose="020B0609020204030204" pitchFamily="49" charset="0"/>
-              </a:rPr>
-              <a:t>) {</a:t>
-            </a:r>
-          </a:p>
-          <a:p>
-            <a:r>
-              <a:rPr lang="en-US" sz="1600" b="1" dirty="0">
-                <a:solidFill>
-                  <a:srgbClr val="C00000"/>
-                </a:solidFill>
-                <a:latin typeface="Consolas" panose="020B0609020204030204" pitchFamily="49" charset="0"/>
-              </a:rPr>
-              <a:t> </a:t>
-            </a:r>
-            <a:r>
-              <a:rPr lang="en-US" sz="1600" b="1" dirty="0" smtClean="0">
-                <a:solidFill>
-                  <a:srgbClr val="C00000"/>
-                </a:solidFill>
-                <a:latin typeface="Consolas" panose="020B0609020204030204" pitchFamily="49" charset="0"/>
-              </a:rPr>
-              <a:t>                      return </a:t>
-            </a:r>
-            <a:r>
-              <a:rPr lang="en-US" sz="1600" b="1" dirty="0">
-                <a:solidFill>
-                  <a:srgbClr val="C00000"/>
-                </a:solidFill>
-                <a:latin typeface="Consolas" panose="020B0609020204030204" pitchFamily="49" charset="0"/>
-              </a:rPr>
-              <a:t>(a*x + b)*x + c</a:t>
-            </a:r>
-            <a:r>
-              <a:rPr lang="en-US" sz="1600" b="1" dirty="0" smtClean="0">
-                <a:solidFill>
-                  <a:srgbClr val="C00000"/>
-                </a:solidFill>
-                <a:latin typeface="Consolas" panose="020B0609020204030204" pitchFamily="49" charset="0"/>
-              </a:rPr>
-              <a:t>;});</a:t>
-            </a:r>
-            <a:endParaRPr lang="en-US" sz="1600" b="1" dirty="0">
-              <a:solidFill>
-                <a:srgbClr val="C00000"/>
-              </a:solidFill>
-              <a:latin typeface="Consolas" panose="020B0609020204030204" pitchFamily="49" charset="0"/>
-            </a:endParaRPr>
+              <a:t>                       return (a*x + b)*x + c;});</a:t>
+            </a:r>
           </a:p>
           <a:p>
             <a:r>
@@ -20282,13 +19900,8 @@
           <a:p>
             <a:r>
               <a:rPr lang="en-US" dirty="0"/>
-              <a:t>P</a:t>
-            </a:r>
-            <a:r>
-              <a:rPr lang="en-US" dirty="0" smtClean="0"/>
-              <a:t>lacement new</a:t>
-            </a:r>
-            <a:endParaRPr lang="en-US" dirty="0"/>
+              <a:t>Placement new</a:t>
+            </a:r>
           </a:p>
         </p:txBody>
       </p:sp>
@@ -20308,37 +19921,36 @@
           <a:lstStyle/>
           <a:p>
             <a:r>
-              <a:rPr lang="en-US" dirty="0" smtClean="0"/>
+              <a:rPr lang="en-US" dirty="0"/>
               <a:t>Create new object</a:t>
             </a:r>
             <a:br>
-              <a:rPr lang="en-US" dirty="0" smtClean="0"/>
+              <a:rPr lang="en-US" dirty="0"/>
             </a:br>
             <a:r>
-              <a:rPr lang="en-US" dirty="0" smtClean="0"/>
+              <a:rPr lang="en-US" dirty="0"/>
               <a:t>in pre-allocated</a:t>
             </a:r>
             <a:br>
-              <a:rPr lang="en-US" dirty="0" smtClean="0"/>
+              <a:rPr lang="en-US" dirty="0"/>
             </a:br>
             <a:r>
-              <a:rPr lang="en-US" dirty="0" smtClean="0"/>
+              <a:rPr lang="en-US" dirty="0"/>
               <a:t>memory location</a:t>
             </a:r>
           </a:p>
           <a:p>
             <a:r>
-              <a:rPr lang="en-US" dirty="0" smtClean="0"/>
+              <a:rPr lang="en-US" dirty="0"/>
               <a:t>E.g., custom memory</a:t>
             </a:r>
             <a:br>
-              <a:rPr lang="en-US" dirty="0" smtClean="0"/>
+              <a:rPr lang="en-US" dirty="0"/>
             </a:br>
             <a:r>
-              <a:rPr lang="en-US" dirty="0" smtClean="0"/>
+              <a:rPr lang="en-US" dirty="0"/>
               <a:t>allocator</a:t>
             </a:r>
-            <a:endParaRPr lang="en-US" dirty="0"/>
           </a:p>
         </p:txBody>
       </p:sp>
@@ -20397,19 +20009,19 @@
           <a:lstStyle/>
           <a:p>
             <a:r>
-              <a:rPr lang="en-US" sz="1600" dirty="0" smtClean="0">
+              <a:rPr lang="en-US" sz="1600" dirty="0">
                 <a:latin typeface="Consolas" panose="020B0609020204030204" pitchFamily="49" charset="0"/>
               </a:rPr>
               <a:t>#include &lt;</a:t>
             </a:r>
             <a:r>
-              <a:rPr lang="en-US" sz="1600" dirty="0" err="1" smtClean="0">
+              <a:rPr lang="en-US" sz="1600" dirty="0" err="1">
                 <a:latin typeface="Consolas" panose="020B0609020204030204" pitchFamily="49" charset="0"/>
               </a:rPr>
               <a:t>cmath</a:t>
             </a:r>
             <a:r>
-              <a:rPr lang="en-US" sz="1600" dirty="0" smtClean="0">
+              <a:rPr lang="en-US" sz="1600" dirty="0">
                 <a:latin typeface="Consolas" panose="020B0609020204030204" pitchFamily="49" charset="0"/>
               </a:rPr>
               <a:t>&gt;</a:t>
@@ -20417,16 +20029,10 @@
           </a:p>
           <a:p>
             <a:r>
-              <a:rPr lang="en-US" sz="1600" dirty="0" smtClean="0">
-                <a:latin typeface="Consolas" panose="020B0609020204030204" pitchFamily="49" charset="0"/>
-              </a:rPr>
-              <a:t>#include </a:t>
-            </a:r>
-            <a:r>
               <a:rPr lang="en-US" sz="1600" dirty="0">
                 <a:latin typeface="Consolas" panose="020B0609020204030204" pitchFamily="49" charset="0"/>
               </a:rPr>
-              <a:t>&lt;</a:t>
+              <a:t>#include &lt;</a:t>
             </a:r>
             <a:r>
               <a:rPr lang="en-US" sz="1600" dirty="0" err="1">
@@ -20439,55 +20045,6 @@
                 <a:latin typeface="Consolas" panose="020B0609020204030204" pitchFamily="49" charset="0"/>
               </a:rPr>
               <a:t>&gt;</a:t>
-            </a:r>
-          </a:p>
-          <a:p>
-            <a:endParaRPr lang="en-US" sz="1600" dirty="0" smtClean="0">
-              <a:latin typeface="Consolas" panose="020B0609020204030204" pitchFamily="49" charset="0"/>
-            </a:endParaRPr>
-          </a:p>
-          <a:p>
-            <a:r>
-              <a:rPr lang="en-US" sz="1600" dirty="0" err="1" smtClean="0">
-                <a:latin typeface="Consolas" panose="020B0609020204030204" pitchFamily="49" charset="0"/>
-              </a:rPr>
-              <a:t>struct</a:t>
-            </a:r>
-            <a:r>
-              <a:rPr lang="en-US" sz="1600" dirty="0" smtClean="0">
-                <a:latin typeface="Consolas" panose="020B0609020204030204" pitchFamily="49" charset="0"/>
-              </a:rPr>
-              <a:t> Point {</a:t>
-            </a:r>
-          </a:p>
-          <a:p>
-            <a:r>
-              <a:rPr lang="en-US" sz="1600" dirty="0" smtClean="0">
-                <a:latin typeface="Consolas" panose="020B0609020204030204" pitchFamily="49" charset="0"/>
-              </a:rPr>
-              <a:t>    double x, y;</a:t>
-            </a:r>
-          </a:p>
-          <a:p>
-            <a:r>
-              <a:rPr lang="en-US" sz="1600" dirty="0">
-                <a:latin typeface="Consolas" panose="020B0609020204030204" pitchFamily="49" charset="0"/>
-              </a:rPr>
-              <a:t> </a:t>
-            </a:r>
-            <a:r>
-              <a:rPr lang="en-US" sz="1600" dirty="0" smtClean="0">
-                <a:latin typeface="Consolas" panose="020B0609020204030204" pitchFamily="49" charset="0"/>
-              </a:rPr>
-              <a:t>   Point() {…}</a:t>
-            </a:r>
-          </a:p>
-          <a:p>
-            <a:r>
-              <a:rPr lang="en-US" sz="1600" dirty="0" smtClean="0">
-                <a:latin typeface="Consolas" panose="020B0609020204030204" pitchFamily="49" charset="0"/>
-              </a:rPr>
-              <a:t>};</a:t>
             </a:r>
           </a:p>
           <a:p>
@@ -20500,63 +20057,13 @@
               <a:rPr lang="en-US" sz="1600" dirty="0" err="1">
                 <a:latin typeface="Consolas" panose="020B0609020204030204" pitchFamily="49" charset="0"/>
               </a:rPr>
-              <a:t>int</a:t>
+              <a:t>struct</a:t>
             </a:r>
             <a:r>
               <a:rPr lang="en-US" sz="1600" dirty="0">
                 <a:latin typeface="Consolas" panose="020B0609020204030204" pitchFamily="49" charset="0"/>
               </a:rPr>
-              <a:t> main() </a:t>
-            </a:r>
-            <a:r>
-              <a:rPr lang="en-US" sz="1600" dirty="0" smtClean="0">
-                <a:latin typeface="Consolas" panose="020B0609020204030204" pitchFamily="49" charset="0"/>
-              </a:rPr>
-              <a:t>{</a:t>
-            </a:r>
-          </a:p>
-          <a:p>
-            <a:r>
-              <a:rPr lang="en-US" sz="1600" dirty="0" smtClean="0">
-                <a:latin typeface="Consolas" panose="020B0609020204030204" pitchFamily="49" charset="0"/>
-              </a:rPr>
-              <a:t>    Point* </a:t>
-            </a:r>
-            <a:r>
-              <a:rPr lang="en-US" sz="1600" dirty="0" err="1" smtClean="0">
-                <a:latin typeface="Consolas" panose="020B0609020204030204" pitchFamily="49" charset="0"/>
-              </a:rPr>
-              <a:t>p_ptr</a:t>
-            </a:r>
-            <a:r>
-              <a:rPr lang="en-US" sz="1600" dirty="0" smtClean="0">
-                <a:latin typeface="Consolas" panose="020B0609020204030204" pitchFamily="49" charset="0"/>
-              </a:rPr>
-              <a:t> = (Point*) </a:t>
-            </a:r>
-            <a:r>
-              <a:rPr lang="en-US" sz="1600" dirty="0" err="1" smtClean="0">
-                <a:latin typeface="Consolas" panose="020B0609020204030204" pitchFamily="49" charset="0"/>
-              </a:rPr>
-              <a:t>malloc</a:t>
-            </a:r>
-            <a:r>
-              <a:rPr lang="en-US" sz="1600" dirty="0" smtClean="0">
-                <a:latin typeface="Consolas" panose="020B0609020204030204" pitchFamily="49" charset="0"/>
-              </a:rPr>
-              <a:t>(</a:t>
-            </a:r>
-            <a:r>
-              <a:rPr lang="en-US" sz="1600" dirty="0" err="1" smtClean="0">
-                <a:latin typeface="Consolas" panose="020B0609020204030204" pitchFamily="49" charset="0"/>
-              </a:rPr>
-              <a:t>sizeof</a:t>
-            </a:r>
-            <a:r>
-              <a:rPr lang="en-US" sz="1600" dirty="0" smtClean="0">
-                <a:latin typeface="Consolas" panose="020B0609020204030204" pitchFamily="49" charset="0"/>
-              </a:rPr>
-              <a:t>(Point));</a:t>
+              <a:t> Point {</a:t>
             </a:r>
           </a:p>
           <a:p>
@@ -20564,25 +20071,7 @@
               <a:rPr lang="en-US" sz="1600" dirty="0">
                 <a:latin typeface="Consolas" panose="020B0609020204030204" pitchFamily="49" charset="0"/>
               </a:rPr>
-              <a:t> </a:t>
-            </a:r>
-            <a:r>
-              <a:rPr lang="en-US" sz="1600" dirty="0" smtClean="0">
-                <a:latin typeface="Consolas" panose="020B0609020204030204" pitchFamily="49" charset="0"/>
-              </a:rPr>
-              <a:t>   double </a:t>
-            </a:r>
-            <a:r>
-              <a:rPr lang="en-US" sz="1600" dirty="0" err="1" smtClean="0">
-                <a:latin typeface="Consolas" panose="020B0609020204030204" pitchFamily="49" charset="0"/>
-              </a:rPr>
-              <a:t>dist</a:t>
-            </a:r>
-            <a:r>
-              <a:rPr lang="en-US" sz="1600" dirty="0" smtClean="0">
-                <a:latin typeface="Consolas" panose="020B0609020204030204" pitchFamily="49" charset="0"/>
-              </a:rPr>
-              <a:t> {0.0};</a:t>
+              <a:t>    double x, y;</a:t>
             </a:r>
           </a:p>
           <a:p>
@@ -20590,61 +20079,7 @@
               <a:rPr lang="en-US" sz="1600" dirty="0">
                 <a:latin typeface="Consolas" panose="020B0609020204030204" pitchFamily="49" charset="0"/>
               </a:rPr>
-              <a:t> </a:t>
-            </a:r>
-            <a:r>
-              <a:rPr lang="en-US" sz="1600" dirty="0" smtClean="0">
-                <a:latin typeface="Consolas" panose="020B0609020204030204" pitchFamily="49" charset="0"/>
-              </a:rPr>
-              <a:t>   for (long </a:t>
-            </a:r>
-            <a:r>
-              <a:rPr lang="en-US" sz="1600" dirty="0" err="1" smtClean="0">
-                <a:latin typeface="Consolas" panose="020B0609020204030204" pitchFamily="49" charset="0"/>
-              </a:rPr>
-              <a:t>i</a:t>
-            </a:r>
-            <a:r>
-              <a:rPr lang="en-US" sz="1600" dirty="0" smtClean="0">
-                <a:latin typeface="Consolas" panose="020B0609020204030204" pitchFamily="49" charset="0"/>
-              </a:rPr>
-              <a:t> = 0; </a:t>
-            </a:r>
-            <a:r>
-              <a:rPr lang="en-US" sz="1600" dirty="0" err="1" smtClean="0">
-                <a:latin typeface="Consolas" panose="020B0609020204030204" pitchFamily="49" charset="0"/>
-              </a:rPr>
-              <a:t>i</a:t>
-            </a:r>
-            <a:r>
-              <a:rPr lang="en-US" sz="1600" dirty="0" smtClean="0">
-                <a:latin typeface="Consolas" panose="020B0609020204030204" pitchFamily="49" charset="0"/>
-              </a:rPr>
-              <a:t> &lt; </a:t>
-            </a:r>
-            <a:r>
-              <a:rPr lang="en-US" sz="1600" dirty="0" err="1" smtClean="0">
-                <a:latin typeface="Consolas" panose="020B0609020204030204" pitchFamily="49" charset="0"/>
-              </a:rPr>
-              <a:t>i_max</a:t>
-            </a:r>
-            <a:r>
-              <a:rPr lang="en-US" sz="1600" dirty="0" smtClean="0">
-                <a:latin typeface="Consolas" panose="020B0609020204030204" pitchFamily="49" charset="0"/>
-              </a:rPr>
-              <a:t>; ++</a:t>
-            </a:r>
-            <a:r>
-              <a:rPr lang="en-US" sz="1600" dirty="0" err="1" smtClean="0">
-                <a:latin typeface="Consolas" panose="020B0609020204030204" pitchFamily="49" charset="0"/>
-              </a:rPr>
-              <a:t>i</a:t>
-            </a:r>
-            <a:r>
-              <a:rPr lang="en-US" sz="1600" dirty="0" smtClean="0">
-                <a:latin typeface="Consolas" panose="020B0609020204030204" pitchFamily="49" charset="0"/>
-              </a:rPr>
-              <a:t>) {</a:t>
+              <a:t>    Point() {…}</a:t>
             </a:r>
           </a:p>
           <a:p>
@@ -20652,132 +20087,246 @@
               <a:rPr lang="en-US" sz="1600" dirty="0">
                 <a:latin typeface="Consolas" panose="020B0609020204030204" pitchFamily="49" charset="0"/>
               </a:rPr>
-              <a:t> </a:t>
-            </a:r>
-            <a:r>
-              <a:rPr lang="en-US" sz="1600" dirty="0" smtClean="0">
-                <a:latin typeface="Consolas" panose="020B0609020204030204" pitchFamily="49" charset="0"/>
-              </a:rPr>
-              <a:t>       Point* p = new(</a:t>
-            </a:r>
-            <a:r>
-              <a:rPr lang="en-US" sz="1600" dirty="0" err="1" smtClean="0">
-                <a:latin typeface="Consolas" panose="020B0609020204030204" pitchFamily="49" charset="0"/>
-              </a:rPr>
-              <a:t>p_ptr</a:t>
-            </a:r>
-            <a:r>
-              <a:rPr lang="en-US" sz="1600" dirty="0" smtClean="0">
-                <a:latin typeface="Consolas" panose="020B0609020204030204" pitchFamily="49" charset="0"/>
-              </a:rPr>
-              <a:t>) Point();</a:t>
-            </a:r>
-          </a:p>
-          <a:p>
-            <a:r>
-              <a:rPr lang="en-US" sz="1600" dirty="0">
-                <a:latin typeface="Consolas" panose="020B0609020204030204" pitchFamily="49" charset="0"/>
-              </a:rPr>
-              <a:t> </a:t>
-            </a:r>
-            <a:r>
-              <a:rPr lang="en-US" sz="1600" dirty="0" smtClean="0">
-                <a:latin typeface="Consolas" panose="020B0609020204030204" pitchFamily="49" charset="0"/>
-              </a:rPr>
-              <a:t>       </a:t>
-            </a:r>
-            <a:r>
-              <a:rPr lang="en-US" sz="1600" dirty="0" err="1" smtClean="0">
-                <a:latin typeface="Consolas" panose="020B0609020204030204" pitchFamily="49" charset="0"/>
-              </a:rPr>
-              <a:t>dist</a:t>
-            </a:r>
-            <a:r>
-              <a:rPr lang="en-US" sz="1600" dirty="0" smtClean="0">
-                <a:latin typeface="Consolas" panose="020B0609020204030204" pitchFamily="49" charset="0"/>
-              </a:rPr>
-              <a:t> += </a:t>
-            </a:r>
-            <a:r>
-              <a:rPr lang="en-US" sz="1600" dirty="0" err="1" smtClean="0">
-                <a:latin typeface="Consolas" panose="020B0609020204030204" pitchFamily="49" charset="0"/>
-              </a:rPr>
-              <a:t>std</a:t>
-            </a:r>
-            <a:r>
-              <a:rPr lang="en-US" sz="1600" dirty="0" smtClean="0">
-                <a:latin typeface="Consolas" panose="020B0609020204030204" pitchFamily="49" charset="0"/>
-              </a:rPr>
-              <a:t>::</a:t>
-            </a:r>
-            <a:r>
-              <a:rPr lang="en-US" sz="1600" dirty="0" err="1" smtClean="0">
-                <a:latin typeface="Consolas" panose="020B0609020204030204" pitchFamily="49" charset="0"/>
-              </a:rPr>
-              <a:t>sqrt</a:t>
-            </a:r>
-            <a:r>
-              <a:rPr lang="en-US" sz="1600" dirty="0" smtClean="0">
-                <a:latin typeface="Consolas" panose="020B0609020204030204" pitchFamily="49" charset="0"/>
-              </a:rPr>
-              <a:t>(p-&gt;x*p-&gt;x + p-&gt;y*p-&gt;y);</a:t>
-            </a:r>
-          </a:p>
-          <a:p>
-            <a:r>
-              <a:rPr lang="en-US" sz="1600" dirty="0">
-                <a:latin typeface="Consolas" panose="020B0609020204030204" pitchFamily="49" charset="0"/>
-              </a:rPr>
-              <a:t> </a:t>
-            </a:r>
-            <a:r>
-              <a:rPr lang="en-US" sz="1600" dirty="0" smtClean="0">
-                <a:latin typeface="Consolas" panose="020B0609020204030204" pitchFamily="49" charset="0"/>
-              </a:rPr>
-              <a:t>   }</a:t>
-            </a:r>
-          </a:p>
-          <a:p>
-            <a:r>
-              <a:rPr lang="en-US" sz="1600" dirty="0">
-                <a:latin typeface="Consolas" panose="020B0609020204030204" pitchFamily="49" charset="0"/>
-              </a:rPr>
-              <a:t> </a:t>
-            </a:r>
-            <a:r>
-              <a:rPr lang="en-US" sz="1600" dirty="0" smtClean="0">
-                <a:latin typeface="Consolas" panose="020B0609020204030204" pitchFamily="49" charset="0"/>
-              </a:rPr>
-              <a:t>   free(</a:t>
-            </a:r>
-            <a:r>
-              <a:rPr lang="en-US" sz="1600" dirty="0" err="1" smtClean="0">
-                <a:latin typeface="Consolas" panose="020B0609020204030204" pitchFamily="49" charset="0"/>
-              </a:rPr>
-              <a:t>p_ptr</a:t>
-            </a:r>
-            <a:r>
-              <a:rPr lang="en-US" sz="1600" dirty="0" smtClean="0">
-                <a:latin typeface="Consolas" panose="020B0609020204030204" pitchFamily="49" charset="0"/>
-              </a:rPr>
-              <a:t>);</a:t>
-            </a:r>
+              <a:t>};</a:t>
+            </a:r>
+          </a:p>
+          <a:p>
             <a:endParaRPr lang="en-US" sz="1600" dirty="0">
               <a:latin typeface="Consolas" panose="020B0609020204030204" pitchFamily="49" charset="0"/>
             </a:endParaRPr>
           </a:p>
           <a:p>
             <a:r>
-              <a:rPr lang="en-US" sz="1600" dirty="0" smtClean="0">
-                <a:latin typeface="Consolas" panose="020B0609020204030204" pitchFamily="49" charset="0"/>
-              </a:rPr>
-              <a:t>    return </a:t>
+              <a:rPr lang="en-US" sz="1600" dirty="0" err="1">
+                <a:latin typeface="Consolas" panose="020B0609020204030204" pitchFamily="49" charset="0"/>
+              </a:rPr>
+              <a:t>int</a:t>
             </a:r>
             <a:r>
               <a:rPr lang="en-US" sz="1600" dirty="0">
                 <a:latin typeface="Consolas" panose="020B0609020204030204" pitchFamily="49" charset="0"/>
               </a:rPr>
-              <a:t>0;</a:t>
+              <a:t> main() {</a:t>
+            </a:r>
+          </a:p>
+          <a:p>
+            <a:r>
+              <a:rPr lang="en-US" sz="1600" dirty="0">
+                <a:latin typeface="Consolas" panose="020B0609020204030204" pitchFamily="49" charset="0"/>
+              </a:rPr>
+              <a:t>    Point* </a:t>
+            </a:r>
+            <a:r>
+              <a:rPr lang="en-US" sz="1600" dirty="0" err="1">
+                <a:latin typeface="Consolas" panose="020B0609020204030204" pitchFamily="49" charset="0"/>
+              </a:rPr>
+              <a:t>p_ptr</a:t>
+            </a:r>
+            <a:r>
+              <a:rPr lang="en-US" sz="1600" dirty="0">
+                <a:latin typeface="Consolas" panose="020B0609020204030204" pitchFamily="49" charset="0"/>
+              </a:rPr>
+              <a:t> = (Point*) </a:t>
+            </a:r>
+            <a:r>
+              <a:rPr lang="en-US" sz="1600" dirty="0" err="1">
+                <a:latin typeface="Consolas" panose="020B0609020204030204" pitchFamily="49" charset="0"/>
+              </a:rPr>
+              <a:t>malloc</a:t>
+            </a:r>
+            <a:r>
+              <a:rPr lang="en-US" sz="1600" dirty="0">
+                <a:latin typeface="Consolas" panose="020B0609020204030204" pitchFamily="49" charset="0"/>
+              </a:rPr>
+              <a:t>(</a:t>
+            </a:r>
+            <a:r>
+              <a:rPr lang="en-US" sz="1600" dirty="0" err="1">
+                <a:latin typeface="Consolas" panose="020B0609020204030204" pitchFamily="49" charset="0"/>
+              </a:rPr>
+              <a:t>sizeof</a:t>
+            </a:r>
+            <a:r>
+              <a:rPr lang="en-US" sz="1600" dirty="0">
+                <a:latin typeface="Consolas" panose="020B0609020204030204" pitchFamily="49" charset="0"/>
+              </a:rPr>
+              <a:t>(Point));</a:t>
+            </a:r>
+          </a:p>
+          <a:p>
+            <a:r>
+              <a:rPr lang="en-US" sz="1600" dirty="0">
+                <a:latin typeface="Consolas" panose="020B0609020204030204" pitchFamily="49" charset="0"/>
+              </a:rPr>
+              <a:t>    double </a:t>
+            </a:r>
+            <a:r>
+              <a:rPr lang="en-US" sz="1600" dirty="0" err="1">
+                <a:latin typeface="Consolas" panose="020B0609020204030204" pitchFamily="49" charset="0"/>
+              </a:rPr>
+              <a:t>dist</a:t>
+            </a:r>
+            <a:r>
+              <a:rPr lang="en-US" sz="1600" dirty="0">
+                <a:latin typeface="Consolas" panose="020B0609020204030204" pitchFamily="49" charset="0"/>
+              </a:rPr>
+              <a:t> {0.0};</a:t>
+            </a:r>
+          </a:p>
+          <a:p>
+            <a:r>
+              <a:rPr lang="en-US" sz="1600" dirty="0">
+                <a:latin typeface="Consolas" panose="020B0609020204030204" pitchFamily="49" charset="0"/>
+              </a:rPr>
+              <a:t>    for (long </a:t>
+            </a:r>
+            <a:r>
+              <a:rPr lang="en-US" sz="1600" dirty="0" err="1">
+                <a:latin typeface="Consolas" panose="020B0609020204030204" pitchFamily="49" charset="0"/>
+              </a:rPr>
+              <a:t>i</a:t>
+            </a:r>
+            <a:r>
+              <a:rPr lang="en-US" sz="1600" dirty="0">
+                <a:latin typeface="Consolas" panose="020B0609020204030204" pitchFamily="49" charset="0"/>
+              </a:rPr>
+              <a:t> = 0; </a:t>
+            </a:r>
+            <a:r>
+              <a:rPr lang="en-US" sz="1600" dirty="0" err="1">
+                <a:latin typeface="Consolas" panose="020B0609020204030204" pitchFamily="49" charset="0"/>
+              </a:rPr>
+              <a:t>i</a:t>
+            </a:r>
+            <a:r>
+              <a:rPr lang="en-US" sz="1600" dirty="0">
+                <a:latin typeface="Consolas" panose="020B0609020204030204" pitchFamily="49" charset="0"/>
+              </a:rPr>
+              <a:t> &lt; </a:t>
+            </a:r>
+            <a:r>
+              <a:rPr lang="en-US" sz="1600" dirty="0" err="1">
+                <a:latin typeface="Consolas" panose="020B0609020204030204" pitchFamily="49" charset="0"/>
+              </a:rPr>
+              <a:t>i_max</a:t>
+            </a:r>
+            <a:r>
+              <a:rPr lang="en-US" sz="1600" dirty="0">
+                <a:latin typeface="Consolas" panose="020B0609020204030204" pitchFamily="49" charset="0"/>
+              </a:rPr>
+              <a:t>; ++</a:t>
+            </a:r>
+            <a:r>
+              <a:rPr lang="en-US" sz="1600" dirty="0" err="1">
+                <a:latin typeface="Consolas" panose="020B0609020204030204" pitchFamily="49" charset="0"/>
+              </a:rPr>
+              <a:t>i</a:t>
+            </a:r>
+            <a:r>
+              <a:rPr lang="en-US" sz="1600" dirty="0">
+                <a:latin typeface="Consolas" panose="020B0609020204030204" pitchFamily="49" charset="0"/>
+              </a:rPr>
+              <a:t>) {</a:t>
+            </a:r>
+          </a:p>
+          <a:p>
+            <a:r>
+              <a:rPr lang="en-US" sz="1600" dirty="0">
+                <a:latin typeface="Consolas" panose="020B0609020204030204" pitchFamily="49" charset="0"/>
+              </a:rPr>
+              <a:t>        Point* p = new(</a:t>
+            </a:r>
+            <a:r>
+              <a:rPr lang="en-US" sz="1600" dirty="0" err="1">
+                <a:latin typeface="Consolas" panose="020B0609020204030204" pitchFamily="49" charset="0"/>
+              </a:rPr>
+              <a:t>p_ptr</a:t>
+            </a:r>
+            <a:r>
+              <a:rPr lang="en-US" sz="1600" dirty="0">
+                <a:latin typeface="Consolas" panose="020B0609020204030204" pitchFamily="49" charset="0"/>
+              </a:rPr>
+              <a:t>) Point();</a:t>
+            </a:r>
+          </a:p>
+          <a:p>
+            <a:r>
+              <a:rPr lang="en-US" sz="1600" dirty="0">
+                <a:latin typeface="Consolas" panose="020B0609020204030204" pitchFamily="49" charset="0"/>
+              </a:rPr>
+              <a:t>        </a:t>
+            </a:r>
+            <a:r>
+              <a:rPr lang="en-US" sz="1600" dirty="0" err="1">
+                <a:latin typeface="Consolas" panose="020B0609020204030204" pitchFamily="49" charset="0"/>
+              </a:rPr>
+              <a:t>dist</a:t>
+            </a:r>
+            <a:r>
+              <a:rPr lang="en-US" sz="1600" dirty="0">
+                <a:latin typeface="Consolas" panose="020B0609020204030204" pitchFamily="49" charset="0"/>
+              </a:rPr>
+              <a:t> += </a:t>
+            </a:r>
+            <a:r>
+              <a:rPr lang="en-US" sz="1600" dirty="0" err="1">
+                <a:latin typeface="Consolas" panose="020B0609020204030204" pitchFamily="49" charset="0"/>
+              </a:rPr>
+              <a:t>std</a:t>
+            </a:r>
+            <a:r>
+              <a:rPr lang="en-US" sz="1600" dirty="0">
+                <a:latin typeface="Consolas" panose="020B0609020204030204" pitchFamily="49" charset="0"/>
+              </a:rPr>
+              <a:t>::</a:t>
+            </a:r>
+            <a:r>
+              <a:rPr lang="en-US" sz="1600" dirty="0" err="1">
+                <a:latin typeface="Consolas" panose="020B0609020204030204" pitchFamily="49" charset="0"/>
+              </a:rPr>
+              <a:t>sqrt</a:t>
+            </a:r>
+            <a:r>
+              <a:rPr lang="en-US" sz="1600" dirty="0">
+                <a:latin typeface="Consolas" panose="020B0609020204030204" pitchFamily="49" charset="0"/>
+              </a:rPr>
+              <a:t>(p-&gt;x*p-&gt;x + p-&gt;y*p-&gt;y);</a:t>
+            </a:r>
+          </a:p>
+          <a:p>
+            <a:r>
+              <a:rPr lang="en-US" sz="1600" dirty="0">
+                <a:latin typeface="Consolas" panose="020B0609020204030204" pitchFamily="49" charset="0"/>
+              </a:rPr>
+              <a:t>    }</a:t>
+            </a:r>
+          </a:p>
+          <a:p>
+            <a:r>
+              <a:rPr lang="en-US" sz="1600" dirty="0">
+                <a:latin typeface="Consolas" panose="020B0609020204030204" pitchFamily="49" charset="0"/>
+              </a:rPr>
+              <a:t>    free(</a:t>
+            </a:r>
+            <a:r>
+              <a:rPr lang="en-US" sz="1600" dirty="0" err="1">
+                <a:latin typeface="Consolas" panose="020B0609020204030204" pitchFamily="49" charset="0"/>
+              </a:rPr>
+              <a:t>p_ptr</a:t>
+            </a:r>
+            <a:r>
+              <a:rPr lang="en-US" sz="1600" dirty="0">
+                <a:latin typeface="Consolas" panose="020B0609020204030204" pitchFamily="49" charset="0"/>
+              </a:rPr>
+              <a:t>);</a:t>
+            </a:r>
+          </a:p>
+          <a:p>
+            <a:r>
+              <a:rPr lang="en-US" sz="1600" dirty="0">
+                <a:latin typeface="Consolas" panose="020B0609020204030204" pitchFamily="49" charset="0"/>
+              </a:rPr>
+              <a:t>    return 0;</a:t>
             </a:r>
           </a:p>
           <a:p>
@@ -20967,10 +20516,9 @@
           <a:lstStyle/>
           <a:p>
             <a:r>
-              <a:rPr lang="en-US" dirty="0" smtClean="0"/>
+              <a:rPr lang="en-US" dirty="0"/>
               <a:t>TBB algorithms</a:t>
             </a:r>
-            <a:endParaRPr lang="en-US" dirty="0"/>
           </a:p>
         </p:txBody>
       </p:sp>
@@ -21026,13 +20574,6 @@
   <p:clrMapOvr>
     <a:masterClrMapping/>
   </p:clrMapOvr>
-  <p:timing>
-    <p:tnLst>
-      <p:par>
-        <p:cTn id="1" dur="indefinite" restart="never" nodeType="tmRoot"/>
-      </p:par>
-    </p:tnLst>
-  </p:timing>
 </p:sld>
 </file>
 
@@ -21069,14 +20610,13 @@
           <a:lstStyle/>
           <a:p>
             <a:r>
-              <a:rPr lang="en-US" dirty="0" err="1" smtClean="0"/>
+              <a:rPr lang="en-US" dirty="0" err="1"/>
               <a:t>parallel_for</a:t>
             </a:r>
             <a:r>
-              <a:rPr lang="en-US" dirty="0" smtClean="0"/>
+              <a:rPr lang="en-US" dirty="0"/>
               <a:t>: simplest form</a:t>
             </a:r>
-            <a:endParaRPr lang="en-US" dirty="0"/>
           </a:p>
         </p:txBody>
       </p:sp>
@@ -21281,14 +20821,54 @@
               <a:rPr lang="en-US" sz="1600" dirty="0">
                 <a:latin typeface="Consolas" panose="020B0609020204030204" pitchFamily="49" charset="0"/>
               </a:rPr>
-              <a:t>&gt; </a:t>
-            </a:r>
-            <a:r>
-              <a:rPr lang="en-US" sz="1600" dirty="0" smtClean="0">
-                <a:latin typeface="Consolas" panose="020B0609020204030204" pitchFamily="49" charset="0"/>
-              </a:rPr>
-              <a:t>data(10000);</a:t>
-            </a:r>
+              <a:t>&gt; data(10000);</a:t>
+            </a:r>
+          </a:p>
+          <a:p>
+            <a:r>
+              <a:rPr lang="en-US" sz="1600" dirty="0">
+                <a:latin typeface="Consolas" panose="020B0609020204030204" pitchFamily="49" charset="0"/>
+              </a:rPr>
+              <a:t>    </a:t>
+            </a:r>
+            <a:r>
+              <a:rPr lang="en-US" sz="1600" dirty="0" err="1">
+                <a:latin typeface="Consolas" panose="020B0609020204030204" pitchFamily="49" charset="0"/>
+              </a:rPr>
+              <a:t>std</a:t>
+            </a:r>
+            <a:r>
+              <a:rPr lang="en-US" sz="1600" dirty="0">
+                <a:latin typeface="Consolas" panose="020B0609020204030204" pitchFamily="49" charset="0"/>
+              </a:rPr>
+              <a:t>::iota(</a:t>
+            </a:r>
+            <a:r>
+              <a:rPr lang="en-US" sz="1600" dirty="0" err="1">
+                <a:latin typeface="Consolas" panose="020B0609020204030204" pitchFamily="49" charset="0"/>
+              </a:rPr>
+              <a:t>std</a:t>
+            </a:r>
+            <a:r>
+              <a:rPr lang="en-US" sz="1600" dirty="0">
+                <a:latin typeface="Consolas" panose="020B0609020204030204" pitchFamily="49" charset="0"/>
+              </a:rPr>
+              <a:t>::begin(data), </a:t>
+            </a:r>
+            <a:r>
+              <a:rPr lang="en-US" sz="1600" dirty="0" err="1">
+                <a:latin typeface="Consolas" panose="020B0609020204030204" pitchFamily="49" charset="0"/>
+              </a:rPr>
+              <a:t>std</a:t>
+            </a:r>
+            <a:r>
+              <a:rPr lang="en-US" sz="1600" dirty="0">
+                <a:latin typeface="Consolas" panose="020B0609020204030204" pitchFamily="49" charset="0"/>
+              </a:rPr>
+              <a:t>::end(data), 0);</a:t>
+            </a:r>
+          </a:p>
+          <a:p>
             <a:endParaRPr lang="en-US" sz="1600" dirty="0">
               <a:latin typeface="Consolas" panose="020B0609020204030204" pitchFamily="49" charset="0"/>
             </a:endParaRPr>
@@ -21310,12 +20890,24 @@
               <a:rPr lang="en-US" sz="1600" dirty="0">
                 <a:latin typeface="Consolas" panose="020B0609020204030204" pitchFamily="49" charset="0"/>
               </a:rPr>
-              <a:t>::iota(</a:t>
+              <a:t>::</a:t>
             </a:r>
             <a:r>
               <a:rPr lang="en-US" sz="1600" dirty="0" err="1">
                 <a:latin typeface="Consolas" panose="020B0609020204030204" pitchFamily="49" charset="0"/>
               </a:rPr>
+              <a:t>for_each</a:t>
+            </a:r>
+            <a:r>
+              <a:rPr lang="en-US" sz="1600" dirty="0">
+                <a:latin typeface="Consolas" panose="020B0609020204030204" pitchFamily="49" charset="0"/>
+              </a:rPr>
+              <a:t>(</a:t>
+            </a:r>
+            <a:r>
+              <a:rPr lang="en-US" sz="1600" dirty="0" err="1">
+                <a:latin typeface="Consolas" panose="020B0609020204030204" pitchFamily="49" charset="0"/>
+              </a:rPr>
               <a:t>std</a:t>
             </a:r>
             <a:r>
@@ -21334,162 +20926,83 @@
               <a:rPr lang="en-US" sz="1600" dirty="0">
                 <a:latin typeface="Consolas" panose="020B0609020204030204" pitchFamily="49" charset="0"/>
               </a:rPr>
-              <a:t>::end(data), 0);</a:t>
-            </a:r>
-          </a:p>
-          <a:p>
-            <a:endParaRPr lang="en-US" sz="1600" dirty="0" smtClean="0">
+              <a:t>::end(data),</a:t>
+            </a:r>
+          </a:p>
+          <a:p>
+            <a:r>
+              <a:rPr lang="en-US" sz="1600" dirty="0">
+                <a:latin typeface="Consolas" panose="020B0609020204030204" pitchFamily="49" charset="0"/>
+              </a:rPr>
+              <a:t>                  [] (</a:t>
+            </a:r>
+            <a:r>
+              <a:rPr lang="en-US" sz="1600" dirty="0" err="1">
+                <a:latin typeface="Consolas" panose="020B0609020204030204" pitchFamily="49" charset="0"/>
+              </a:rPr>
+              <a:t>int</a:t>
+            </a:r>
+            <a:r>
+              <a:rPr lang="en-US" sz="1600" dirty="0">
+                <a:latin typeface="Consolas" panose="020B0609020204030204" pitchFamily="49" charset="0"/>
+              </a:rPr>
+              <a:t>&amp; </a:t>
+            </a:r>
+            <a:r>
+              <a:rPr lang="en-US" sz="1600" dirty="0" err="1">
+                <a:latin typeface="Consolas" panose="020B0609020204030204" pitchFamily="49" charset="0"/>
+              </a:rPr>
+              <a:t>i</a:t>
+            </a:r>
+            <a:r>
+              <a:rPr lang="en-US" sz="1600" dirty="0">
+                <a:latin typeface="Consolas" panose="020B0609020204030204" pitchFamily="49" charset="0"/>
+              </a:rPr>
+              <a:t>) { </a:t>
+            </a:r>
+            <a:r>
+              <a:rPr lang="en-US" sz="1600" dirty="0" err="1">
+                <a:latin typeface="Consolas" panose="020B0609020204030204" pitchFamily="49" charset="0"/>
+              </a:rPr>
+              <a:t>i</a:t>
+            </a:r>
+            <a:r>
+              <a:rPr lang="en-US" sz="1600" dirty="0">
+                <a:latin typeface="Consolas" panose="020B0609020204030204" pitchFamily="49" charset="0"/>
+              </a:rPr>
+              <a:t> = </a:t>
+            </a:r>
+            <a:r>
+              <a:rPr lang="en-US" sz="1600" dirty="0" err="1">
+                <a:latin typeface="Consolas" panose="020B0609020204030204" pitchFamily="49" charset="0"/>
+              </a:rPr>
+              <a:t>i</a:t>
+            </a:r>
+            <a:r>
+              <a:rPr lang="en-US" sz="1600" dirty="0">
+                <a:latin typeface="Consolas" panose="020B0609020204030204" pitchFamily="49" charset="0"/>
+              </a:rPr>
+              <a:t>*</a:t>
+            </a:r>
+            <a:r>
+              <a:rPr lang="en-US" sz="1600" dirty="0" err="1">
+                <a:latin typeface="Consolas" panose="020B0609020204030204" pitchFamily="49" charset="0"/>
+              </a:rPr>
+              <a:t>i</a:t>
+            </a:r>
+            <a:r>
+              <a:rPr lang="en-US" sz="1600" dirty="0">
+                <a:latin typeface="Consolas" panose="020B0609020204030204" pitchFamily="49" charset="0"/>
+              </a:rPr>
+              <a:t>; });</a:t>
+            </a:r>
+          </a:p>
+          <a:p>
+            <a:endParaRPr lang="en-US" sz="1600" dirty="0">
               <a:latin typeface="Consolas" panose="020B0609020204030204" pitchFamily="49" charset="0"/>
             </a:endParaRPr>
           </a:p>
           <a:p>
-            <a:r>
-              <a:rPr lang="en-US" sz="1600" dirty="0" smtClean="0">
-                <a:latin typeface="Consolas" panose="020B0609020204030204" pitchFamily="49" charset="0"/>
-              </a:rPr>
-              <a:t>    </a:t>
-            </a:r>
-            <a:r>
-              <a:rPr lang="en-US" sz="1600" dirty="0" err="1" smtClean="0">
-                <a:latin typeface="Consolas" panose="020B0609020204030204" pitchFamily="49" charset="0"/>
-              </a:rPr>
-              <a:t>std</a:t>
-            </a:r>
-            <a:r>
-              <a:rPr lang="en-US" sz="1600" dirty="0">
-                <a:latin typeface="Consolas" panose="020B0609020204030204" pitchFamily="49" charset="0"/>
-              </a:rPr>
-              <a:t>::</a:t>
-            </a:r>
-            <a:r>
-              <a:rPr lang="en-US" sz="1600" dirty="0" err="1">
-                <a:latin typeface="Consolas" panose="020B0609020204030204" pitchFamily="49" charset="0"/>
-              </a:rPr>
-              <a:t>for_each</a:t>
-            </a:r>
-            <a:r>
-              <a:rPr lang="en-US" sz="1600" dirty="0">
-                <a:latin typeface="Consolas" panose="020B0609020204030204" pitchFamily="49" charset="0"/>
-              </a:rPr>
-              <a:t>(</a:t>
-            </a:r>
-            <a:r>
-              <a:rPr lang="en-US" sz="1600" dirty="0" err="1">
-                <a:latin typeface="Consolas" panose="020B0609020204030204" pitchFamily="49" charset="0"/>
-              </a:rPr>
-              <a:t>std</a:t>
-            </a:r>
-            <a:r>
-              <a:rPr lang="en-US" sz="1600" dirty="0">
-                <a:latin typeface="Consolas" panose="020B0609020204030204" pitchFamily="49" charset="0"/>
-              </a:rPr>
-              <a:t>::begin(data), </a:t>
-            </a:r>
-            <a:r>
-              <a:rPr lang="en-US" sz="1600" dirty="0" err="1">
-                <a:latin typeface="Consolas" panose="020B0609020204030204" pitchFamily="49" charset="0"/>
-              </a:rPr>
-              <a:t>std</a:t>
-            </a:r>
-            <a:r>
-              <a:rPr lang="en-US" sz="1600" dirty="0">
-                <a:latin typeface="Consolas" panose="020B0609020204030204" pitchFamily="49" charset="0"/>
-              </a:rPr>
-              <a:t>::end(data),</a:t>
-            </a:r>
-          </a:p>
-          <a:p>
-            <a:r>
-              <a:rPr lang="en-US" sz="1600" dirty="0">
-                <a:latin typeface="Consolas" panose="020B0609020204030204" pitchFamily="49" charset="0"/>
-              </a:rPr>
-              <a:t>                  [] (</a:t>
-            </a:r>
-            <a:r>
-              <a:rPr lang="en-US" sz="1600" dirty="0" err="1">
-                <a:latin typeface="Consolas" panose="020B0609020204030204" pitchFamily="49" charset="0"/>
-              </a:rPr>
-              <a:t>int</a:t>
-            </a:r>
-            <a:r>
-              <a:rPr lang="en-US" sz="1600" dirty="0">
-                <a:latin typeface="Consolas" panose="020B0609020204030204" pitchFamily="49" charset="0"/>
-              </a:rPr>
-              <a:t>&amp; </a:t>
-            </a:r>
-            <a:r>
-              <a:rPr lang="en-US" sz="1600" dirty="0" err="1">
-                <a:latin typeface="Consolas" panose="020B0609020204030204" pitchFamily="49" charset="0"/>
-              </a:rPr>
-              <a:t>i</a:t>
-            </a:r>
-            <a:r>
-              <a:rPr lang="en-US" sz="1600" dirty="0">
-                <a:latin typeface="Consolas" panose="020B0609020204030204" pitchFamily="49" charset="0"/>
-              </a:rPr>
-              <a:t>) { </a:t>
-            </a:r>
-            <a:r>
-              <a:rPr lang="en-US" sz="1600" dirty="0" err="1">
-                <a:latin typeface="Consolas" panose="020B0609020204030204" pitchFamily="49" charset="0"/>
-              </a:rPr>
-              <a:t>i</a:t>
-            </a:r>
-            <a:r>
-              <a:rPr lang="en-US" sz="1600" dirty="0">
-                <a:latin typeface="Consolas" panose="020B0609020204030204" pitchFamily="49" charset="0"/>
-              </a:rPr>
-              <a:t> = </a:t>
-            </a:r>
-            <a:r>
-              <a:rPr lang="en-US" sz="1600" dirty="0" err="1">
-                <a:latin typeface="Consolas" panose="020B0609020204030204" pitchFamily="49" charset="0"/>
-              </a:rPr>
-              <a:t>i</a:t>
-            </a:r>
-            <a:r>
-              <a:rPr lang="en-US" sz="1600" dirty="0">
-                <a:latin typeface="Consolas" panose="020B0609020204030204" pitchFamily="49" charset="0"/>
-              </a:rPr>
-              <a:t>*</a:t>
-            </a:r>
-            <a:r>
-              <a:rPr lang="en-US" sz="1600" dirty="0" err="1">
-                <a:latin typeface="Consolas" panose="020B0609020204030204" pitchFamily="49" charset="0"/>
-              </a:rPr>
-              <a:t>i</a:t>
-            </a:r>
-            <a:r>
-              <a:rPr lang="en-US" sz="1600" dirty="0">
-                <a:latin typeface="Consolas" panose="020B0609020204030204" pitchFamily="49" charset="0"/>
-              </a:rPr>
-              <a:t>; });</a:t>
-            </a:r>
-          </a:p>
-          <a:p>
-            <a:endParaRPr lang="en-US" sz="1600" dirty="0" smtClean="0">
-              <a:latin typeface="Consolas" panose="020B0609020204030204" pitchFamily="49" charset="0"/>
-            </a:endParaRPr>
-          </a:p>
-          <a:p>
-            <a:r>
-              <a:rPr lang="en-US" sz="1600" b="1" dirty="0" smtClean="0">
-                <a:solidFill>
-                  <a:srgbClr val="C00000"/>
-                </a:solidFill>
-                <a:latin typeface="Consolas" panose="020B0609020204030204" pitchFamily="49" charset="0"/>
-              </a:rPr>
-              <a:t>    </a:t>
-            </a:r>
-            <a:r>
-              <a:rPr lang="en-US" sz="1600" b="1" dirty="0" err="1" smtClean="0">
-                <a:solidFill>
-                  <a:srgbClr val="C00000"/>
-                </a:solidFill>
-                <a:latin typeface="Consolas" panose="020B0609020204030204" pitchFamily="49" charset="0"/>
-              </a:rPr>
-              <a:t>tbb</a:t>
-            </a:r>
             <a:r>
               <a:rPr lang="en-US" sz="1600" b="1" dirty="0">
                 <a:solidFill>
@@ -21497,25 +21010,7 @@
                 </a:solidFill>
                 <a:latin typeface="Consolas" panose="020B0609020204030204" pitchFamily="49" charset="0"/>
               </a:rPr>
-              <a:t>::</a:t>
-            </a:r>
-            <a:r>
-              <a:rPr lang="en-US" sz="1600" b="1" dirty="0" err="1" smtClean="0">
-                <a:solidFill>
-                  <a:srgbClr val="C00000"/>
-                </a:solidFill>
-                <a:latin typeface="Consolas" panose="020B0609020204030204" pitchFamily="49" charset="0"/>
-              </a:rPr>
-              <a:t>parallel_for</a:t>
-            </a:r>
-            <a:r>
-              <a:rPr lang="en-US" sz="1600" b="1" dirty="0" smtClean="0">
-                <a:solidFill>
-                  <a:srgbClr val="C00000"/>
-                </a:solidFill>
-                <a:latin typeface="Consolas" panose="020B0609020204030204" pitchFamily="49" charset="0"/>
-              </a:rPr>
-              <a:t>(0ul, </a:t>
+              <a:t>    </a:t>
             </a:r>
             <a:r>
               <a:rPr lang="en-US" sz="1600" b="1" dirty="0" err="1">
@@ -21524,7 +21019,7 @@
                 </a:solidFill>
                 <a:latin typeface="Consolas" panose="020B0609020204030204" pitchFamily="49" charset="0"/>
               </a:rPr>
-              <a:t>data.size</a:t>
+              <a:t>tbb</a:t>
             </a:r>
             <a:r>
               <a:rPr lang="en-US" sz="1600" b="1" dirty="0">
@@ -21533,10 +21028,17 @@
                 </a:solidFill>
                 <a:latin typeface="Consolas" panose="020B0609020204030204" pitchFamily="49" charset="0"/>
               </a:rPr>
-              <a:t>(),</a:t>
-            </a:r>
-          </a:p>
-          <a:p>
+              <a:t>::</a:t>
+            </a:r>
+            <a:r>
+              <a:rPr lang="en-US" sz="1600" b="1" dirty="0" err="1">
+                <a:solidFill>
+                  <a:srgbClr val="C00000"/>
+                </a:solidFill>
+                <a:latin typeface="Consolas" panose="020B0609020204030204" pitchFamily="49" charset="0"/>
+              </a:rPr>
+              <a:t>parallel_for</a:t>
+            </a:r>
             <a:r>
               <a:rPr lang="en-US" sz="1600" b="1" dirty="0">
                 <a:solidFill>
@@ -21544,7 +21046,7 @@
                 </a:solidFill>
                 <a:latin typeface="Consolas" panose="020B0609020204030204" pitchFamily="49" charset="0"/>
               </a:rPr>
-              <a:t>                      [&amp;data] (</a:t>
+              <a:t>(0ul, </a:t>
             </a:r>
             <a:r>
               <a:rPr lang="en-US" sz="1600" b="1" dirty="0" err="1">
@@ -21553,7 +21055,7 @@
                 </a:solidFill>
                 <a:latin typeface="Consolas" panose="020B0609020204030204" pitchFamily="49" charset="0"/>
               </a:rPr>
-              <a:t>std</a:t>
+              <a:t>data.size</a:t>
             </a:r>
             <a:r>
               <a:rPr lang="en-US" sz="1600" b="1" dirty="0">
@@ -21562,7 +21064,18 @@
                 </a:solidFill>
                 <a:latin typeface="Consolas" panose="020B0609020204030204" pitchFamily="49" charset="0"/>
               </a:rPr>
-              <a:t>::</a:t>
+              <a:t>(),</a:t>
+            </a:r>
+          </a:p>
+          <a:p>
+            <a:r>
+              <a:rPr lang="en-US" sz="1600" b="1" dirty="0">
+                <a:solidFill>
+                  <a:srgbClr val="C00000"/>
+                </a:solidFill>
+                <a:latin typeface="Consolas" panose="020B0609020204030204" pitchFamily="49" charset="0"/>
+              </a:rPr>
+              <a:t>                      [&amp;data] (</a:t>
             </a:r>
             <a:r>
               <a:rPr lang="en-US" sz="1600" b="1" dirty="0" err="1">
@@ -21571,7 +21084,7 @@
                 </a:solidFill>
                 <a:latin typeface="Consolas" panose="020B0609020204030204" pitchFamily="49" charset="0"/>
               </a:rPr>
-              <a:t>size_t</a:t>
+              <a:t>std</a:t>
             </a:r>
             <a:r>
               <a:rPr lang="en-US" sz="1600" b="1" dirty="0">
@@ -21580,7 +21093,7 @@
                 </a:solidFill>
                 <a:latin typeface="Consolas" panose="020B0609020204030204" pitchFamily="49" charset="0"/>
               </a:rPr>
-              <a:t> </a:t>
+              <a:t>::</a:t>
             </a:r>
             <a:r>
               <a:rPr lang="en-US" sz="1600" b="1" dirty="0" err="1">
@@ -21589,7 +21102,7 @@
                 </a:solidFill>
                 <a:latin typeface="Consolas" panose="020B0609020204030204" pitchFamily="49" charset="0"/>
               </a:rPr>
-              <a:t>i</a:t>
+              <a:t>size_t</a:t>
             </a:r>
             <a:r>
               <a:rPr lang="en-US" sz="1600" b="1" dirty="0">
@@ -21598,7 +21111,7 @@
                 </a:solidFill>
                 <a:latin typeface="Consolas" panose="020B0609020204030204" pitchFamily="49" charset="0"/>
               </a:rPr>
-              <a:t>) { data[</a:t>
+              <a:t> </a:t>
             </a:r>
             <a:r>
               <a:rPr lang="en-US" sz="1600" b="1" dirty="0" err="1">
@@ -21616,7 +21129,7 @@
                 </a:solidFill>
                 <a:latin typeface="Consolas" panose="020B0609020204030204" pitchFamily="49" charset="0"/>
               </a:rPr>
-              <a:t>] = data[</a:t>
+              <a:t>) { data[</a:t>
             </a:r>
             <a:r>
               <a:rPr lang="en-US" sz="1600" b="1" dirty="0" err="1">
@@ -21634,7 +21147,7 @@
                 </a:solidFill>
                 <a:latin typeface="Consolas" panose="020B0609020204030204" pitchFamily="49" charset="0"/>
               </a:rPr>
-              <a:t>]*data[</a:t>
+              <a:t>] = data[</a:t>
             </a:r>
             <a:r>
               <a:rPr lang="en-US" sz="1600" b="1" dirty="0" err="1">
@@ -21652,23 +21165,41 @@
                 </a:solidFill>
                 <a:latin typeface="Consolas" panose="020B0609020204030204" pitchFamily="49" charset="0"/>
               </a:rPr>
+              <a:t>]*data[</a:t>
+            </a:r>
+            <a:r>
+              <a:rPr lang="en-US" sz="1600" b="1" dirty="0" err="1">
+                <a:solidFill>
+                  <a:srgbClr val="C00000"/>
+                </a:solidFill>
+                <a:latin typeface="Consolas" panose="020B0609020204030204" pitchFamily="49" charset="0"/>
+              </a:rPr>
+              <a:t>i</a:t>
+            </a:r>
+            <a:r>
+              <a:rPr lang="en-US" sz="1600" b="1" dirty="0">
+                <a:solidFill>
+                  <a:srgbClr val="C00000"/>
+                </a:solidFill>
+                <a:latin typeface="Consolas" panose="020B0609020204030204" pitchFamily="49" charset="0"/>
+              </a:rPr>
               <a:t>]; });</a:t>
             </a:r>
           </a:p>
           <a:p>
-            <a:endParaRPr lang="en-US" sz="1600" dirty="0" smtClean="0">
+            <a:endParaRPr lang="en-US" sz="1600" dirty="0">
               <a:latin typeface="Consolas" panose="020B0609020204030204" pitchFamily="49" charset="0"/>
             </a:endParaRPr>
           </a:p>
           <a:p>
             <a:r>
-              <a:rPr lang="en-US" sz="1600" dirty="0" smtClean="0">
+              <a:rPr lang="en-US" sz="1600" dirty="0">
                 <a:latin typeface="Consolas" panose="020B0609020204030204" pitchFamily="49" charset="0"/>
               </a:rPr>
               <a:t>    </a:t>
             </a:r>
             <a:r>
-              <a:rPr lang="en-US" sz="1600" dirty="0" err="1" smtClean="0">
+              <a:rPr lang="en-US" sz="1600" dirty="0" err="1">
                 <a:latin typeface="Consolas" panose="020B0609020204030204" pitchFamily="49" charset="0"/>
               </a:rPr>
               <a:t>std</a:t>
@@ -21692,19 +21223,19 @@
               <a:t> &lt;&lt; </a:t>
             </a:r>
             <a:r>
-              <a:rPr lang="en-US" sz="1600" dirty="0" err="1" smtClean="0">
+              <a:rPr lang="en-US" sz="1600" dirty="0" err="1">
                 <a:latin typeface="Consolas" panose="020B0609020204030204" pitchFamily="49" charset="0"/>
               </a:rPr>
               <a:t>data.sum</a:t>
             </a:r>
             <a:r>
-              <a:rPr lang="en-US" sz="1600" dirty="0" smtClean="0">
+              <a:rPr lang="en-US" sz="1600" dirty="0">
                 <a:latin typeface="Consolas" panose="020B0609020204030204" pitchFamily="49" charset="0"/>
               </a:rPr>
               <a:t>() &lt;&lt; </a:t>
             </a:r>
             <a:r>
-              <a:rPr lang="en-US" sz="1600" dirty="0" err="1" smtClean="0">
+              <a:rPr lang="en-US" sz="1600" dirty="0" err="1">
                 <a:latin typeface="Consolas" panose="020B0609020204030204" pitchFamily="49" charset="0"/>
               </a:rPr>
               <a:t>std</a:t>
@@ -21782,24 +21313,23 @@
           <a:lstStyle/>
           <a:p>
             <a:r>
-              <a:rPr lang="en-US" dirty="0" smtClean="0"/>
+              <a:rPr lang="en-US" dirty="0"/>
               <a:t>work automatically</a:t>
             </a:r>
             <a:br>
-              <a:rPr lang="en-US" dirty="0" smtClean="0"/>
+              <a:rPr lang="en-US" dirty="0"/>
             </a:br>
             <a:r>
-              <a:rPr lang="en-US" dirty="0" smtClean="0"/>
+              <a:rPr lang="en-US" dirty="0"/>
               <a:t>divided over thread</a:t>
             </a:r>
             <a:br>
-              <a:rPr lang="en-US" dirty="0" smtClean="0"/>
+              <a:rPr lang="en-US" dirty="0"/>
             </a:br>
             <a:r>
-              <a:rPr lang="en-US" dirty="0" smtClean="0"/>
+              <a:rPr lang="en-US" dirty="0"/>
               <a:t>pool</a:t>
             </a:r>
-            <a:endParaRPr lang="en-US" dirty="0"/>
           </a:p>
         </p:txBody>
       </p:sp>
@@ -21927,14 +21457,13 @@
           <a:lstStyle/>
           <a:p>
             <a:r>
-              <a:rPr lang="en-US" dirty="0" err="1" smtClean="0"/>
+              <a:rPr lang="en-US" dirty="0" err="1"/>
               <a:t>parallel_for</a:t>
             </a:r>
             <a:r>
-              <a:rPr lang="en-US" dirty="0" smtClean="0"/>
+              <a:rPr lang="en-US" dirty="0"/>
               <a:t>: more control</a:t>
             </a:r>
-            <a:endParaRPr lang="en-US" dirty="0"/>
           </a:p>
         </p:txBody>
       </p:sp>
@@ -21993,119 +21522,89 @@
           <a:lstStyle/>
           <a:p>
             <a:r>
-              <a:rPr lang="en-US" sz="1600" dirty="0" smtClean="0">
+              <a:rPr lang="en-US" sz="1600" dirty="0">
                 <a:latin typeface="Consolas" panose="020B0609020204030204" pitchFamily="49" charset="0"/>
               </a:rPr>
               <a:t>…</a:t>
             </a:r>
+          </a:p>
+          <a:p>
             <a:endParaRPr lang="en-US" sz="1600" dirty="0">
               <a:latin typeface="Consolas" panose="020B0609020204030204" pitchFamily="49" charset="0"/>
             </a:endParaRPr>
           </a:p>
           <a:p>
+            <a:r>
+              <a:rPr lang="en-US" sz="1600" dirty="0" err="1">
+                <a:latin typeface="Consolas" panose="020B0609020204030204" pitchFamily="49" charset="0"/>
+              </a:rPr>
+              <a:t>int</a:t>
+            </a:r>
+            <a:r>
+              <a:rPr lang="en-US" sz="1600" dirty="0">
+                <a:latin typeface="Consolas" panose="020B0609020204030204" pitchFamily="49" charset="0"/>
+              </a:rPr>
+              <a:t> main() {</a:t>
+            </a:r>
+          </a:p>
+          <a:p>
+            <a:r>
+              <a:rPr lang="en-US" sz="1600" dirty="0">
+                <a:latin typeface="Consolas" panose="020B0609020204030204" pitchFamily="49" charset="0"/>
+              </a:rPr>
+              <a:t>    …</a:t>
+            </a:r>
+          </a:p>
+          <a:p>
+            <a:r>
+              <a:rPr lang="en-US" sz="1600" dirty="0">
+                <a:latin typeface="Consolas" panose="020B0609020204030204" pitchFamily="49" charset="0"/>
+              </a:rPr>
+              <a:t>    </a:t>
+            </a:r>
+            <a:r>
+              <a:rPr lang="en-US" sz="1600" dirty="0" err="1">
+                <a:latin typeface="Consolas" panose="020B0609020204030204" pitchFamily="49" charset="0"/>
+              </a:rPr>
+              <a:t>std</a:t>
+            </a:r>
+            <a:r>
+              <a:rPr lang="en-US" sz="1600" dirty="0">
+                <a:latin typeface="Consolas" panose="020B0609020204030204" pitchFamily="49" charset="0"/>
+              </a:rPr>
+              <a:t>::</a:t>
+            </a:r>
+            <a:r>
+              <a:rPr lang="en-US" sz="1600" dirty="0" err="1">
+                <a:latin typeface="Consolas" panose="020B0609020204030204" pitchFamily="49" charset="0"/>
+              </a:rPr>
+              <a:t>size_t</a:t>
+            </a:r>
+            <a:r>
+              <a:rPr lang="en-US" sz="1600" dirty="0">
+                <a:latin typeface="Consolas" panose="020B0609020204030204" pitchFamily="49" charset="0"/>
+              </a:rPr>
+              <a:t> </a:t>
+            </a:r>
+            <a:r>
+              <a:rPr lang="en-US" sz="1600" dirty="0" err="1">
+                <a:latin typeface="Consolas" panose="020B0609020204030204" pitchFamily="49" charset="0"/>
+              </a:rPr>
+              <a:t>grain_size</a:t>
+            </a:r>
+            <a:r>
+              <a:rPr lang="en-US" sz="1600" dirty="0">
+                <a:latin typeface="Consolas" panose="020B0609020204030204" pitchFamily="49" charset="0"/>
+              </a:rPr>
+              <a:t> {1000};</a:t>
+            </a:r>
+          </a:p>
+          <a:p>
             <a:endParaRPr lang="en-US" sz="1600" dirty="0">
               <a:latin typeface="Consolas" panose="020B0609020204030204" pitchFamily="49" charset="0"/>
             </a:endParaRPr>
           </a:p>
           <a:p>
-            <a:r>
-              <a:rPr lang="en-US" sz="1600" dirty="0" err="1">
-                <a:latin typeface="Consolas" panose="020B0609020204030204" pitchFamily="49" charset="0"/>
-              </a:rPr>
-              <a:t>int</a:t>
-            </a:r>
-            <a:r>
-              <a:rPr lang="en-US" sz="1600" dirty="0">
-                <a:latin typeface="Consolas" panose="020B0609020204030204" pitchFamily="49" charset="0"/>
-              </a:rPr>
-              <a:t> main() {</a:t>
-            </a:r>
-          </a:p>
-          <a:p>
-            <a:r>
-              <a:rPr lang="en-US" sz="1600" dirty="0" smtClean="0">
-                <a:latin typeface="Consolas" panose="020B0609020204030204" pitchFamily="49" charset="0"/>
-              </a:rPr>
-              <a:t>    …</a:t>
-            </a:r>
-          </a:p>
-          <a:p>
-            <a:r>
-              <a:rPr lang="en-US" sz="1600" dirty="0">
-                <a:latin typeface="Consolas" panose="020B0609020204030204" pitchFamily="49" charset="0"/>
-              </a:rPr>
-              <a:t> </a:t>
-            </a:r>
-            <a:r>
-              <a:rPr lang="en-US" sz="1600" dirty="0" smtClean="0">
-                <a:latin typeface="Consolas" panose="020B0609020204030204" pitchFamily="49" charset="0"/>
-              </a:rPr>
-              <a:t>   </a:t>
-            </a:r>
-            <a:r>
-              <a:rPr lang="en-US" sz="1600" dirty="0" err="1" smtClean="0">
-                <a:latin typeface="Consolas" panose="020B0609020204030204" pitchFamily="49" charset="0"/>
-              </a:rPr>
-              <a:t>std</a:t>
-            </a:r>
-            <a:r>
-              <a:rPr lang="en-US" sz="1600" dirty="0" smtClean="0">
-                <a:latin typeface="Consolas" panose="020B0609020204030204" pitchFamily="49" charset="0"/>
-              </a:rPr>
-              <a:t>::</a:t>
-            </a:r>
-            <a:r>
-              <a:rPr lang="en-US" sz="1600" dirty="0" err="1" smtClean="0">
-                <a:latin typeface="Consolas" panose="020B0609020204030204" pitchFamily="49" charset="0"/>
-              </a:rPr>
-              <a:t>size_t</a:t>
-            </a:r>
-            <a:r>
-              <a:rPr lang="en-US" sz="1600" dirty="0" smtClean="0">
-                <a:latin typeface="Consolas" panose="020B0609020204030204" pitchFamily="49" charset="0"/>
-              </a:rPr>
-              <a:t> </a:t>
-            </a:r>
-            <a:r>
-              <a:rPr lang="en-US" sz="1600" dirty="0" err="1" smtClean="0">
-                <a:latin typeface="Consolas" panose="020B0609020204030204" pitchFamily="49" charset="0"/>
-              </a:rPr>
-              <a:t>grain_size</a:t>
-            </a:r>
-            <a:r>
-              <a:rPr lang="en-US" sz="1600" dirty="0" smtClean="0">
-                <a:latin typeface="Consolas" panose="020B0609020204030204" pitchFamily="49" charset="0"/>
-              </a:rPr>
-              <a:t> {1000};</a:t>
-            </a:r>
-            <a:endParaRPr lang="en-US" sz="1600" dirty="0">
-              <a:latin typeface="Consolas" panose="020B0609020204030204" pitchFamily="49" charset="0"/>
-            </a:endParaRPr>
-          </a:p>
-          <a:p>
-            <a:endParaRPr lang="en-US" sz="1600" dirty="0" smtClean="0">
-              <a:latin typeface="Consolas" panose="020B0609020204030204" pitchFamily="49" charset="0"/>
-            </a:endParaRPr>
-          </a:p>
-          <a:p>
-            <a:r>
-              <a:rPr lang="en-US" sz="1600" b="1" dirty="0" smtClean="0">
-                <a:solidFill>
-                  <a:srgbClr val="C00000"/>
-                </a:solidFill>
-                <a:latin typeface="Consolas" panose="020B0609020204030204" pitchFamily="49" charset="0"/>
-              </a:rPr>
-              <a:t>    </a:t>
-            </a:r>
-            <a:r>
-              <a:rPr lang="en-US" sz="1600" b="1" dirty="0" err="1" smtClean="0">
-                <a:solidFill>
-                  <a:srgbClr val="C00000"/>
-                </a:solidFill>
-                <a:latin typeface="Consolas" panose="020B0609020204030204" pitchFamily="49" charset="0"/>
-              </a:rPr>
-              <a:t>tbb</a:t>
-            </a:r>
             <a:r>
               <a:rPr lang="en-US" sz="1600" b="1" dirty="0">
                 <a:solidFill>
@@ -22113,88 +21612,7 @@
                 </a:solidFill>
                 <a:latin typeface="Consolas" panose="020B0609020204030204" pitchFamily="49" charset="0"/>
               </a:rPr>
-              <a:t>::</a:t>
-            </a:r>
-            <a:r>
-              <a:rPr lang="en-US" sz="1600" b="1" dirty="0" err="1" smtClean="0">
-                <a:solidFill>
-                  <a:srgbClr val="C00000"/>
-                </a:solidFill>
-                <a:latin typeface="Consolas" panose="020B0609020204030204" pitchFamily="49" charset="0"/>
-              </a:rPr>
-              <a:t>parallel_for</a:t>
-            </a:r>
-            <a:r>
-              <a:rPr lang="en-US" sz="1600" b="1" smtClean="0">
-                <a:solidFill>
-                  <a:srgbClr val="C00000"/>
-                </a:solidFill>
-                <a:latin typeface="Consolas" panose="020B0609020204030204" pitchFamily="49" charset="0"/>
-              </a:rPr>
-              <a:t>(tbb</a:t>
-            </a:r>
-            <a:r>
-              <a:rPr lang="en-US" sz="1600" b="1" dirty="0" smtClean="0">
-                <a:solidFill>
-                  <a:srgbClr val="C00000"/>
-                </a:solidFill>
-                <a:latin typeface="Consolas" panose="020B0609020204030204" pitchFamily="49" charset="0"/>
-              </a:rPr>
-              <a:t>::</a:t>
-            </a:r>
-            <a:r>
-              <a:rPr lang="en-US" sz="1600" b="1" dirty="0" err="1" smtClean="0">
-                <a:solidFill>
-                  <a:srgbClr val="C00000"/>
-                </a:solidFill>
-                <a:latin typeface="Consolas" panose="020B0609020204030204" pitchFamily="49" charset="0"/>
-              </a:rPr>
-              <a:t>blocked_range</a:t>
-            </a:r>
-            <a:r>
-              <a:rPr lang="en-US" sz="1600" b="1" dirty="0" smtClean="0">
-                <a:solidFill>
-                  <a:srgbClr val="C00000"/>
-                </a:solidFill>
-                <a:latin typeface="Consolas" panose="020B0609020204030204" pitchFamily="49" charset="0"/>
-              </a:rPr>
-              <a:t>&lt;</a:t>
-            </a:r>
-            <a:r>
-              <a:rPr lang="en-US" sz="1600" b="1" dirty="0" err="1" smtClean="0">
-                <a:solidFill>
-                  <a:srgbClr val="C00000"/>
-                </a:solidFill>
-                <a:latin typeface="Consolas" panose="020B0609020204030204" pitchFamily="49" charset="0"/>
-              </a:rPr>
-              <a:t>std</a:t>
-            </a:r>
-            <a:r>
-              <a:rPr lang="en-US" sz="1600" b="1" dirty="0" smtClean="0">
-                <a:solidFill>
-                  <a:srgbClr val="C00000"/>
-                </a:solidFill>
-                <a:latin typeface="Consolas" panose="020B0609020204030204" pitchFamily="49" charset="0"/>
-              </a:rPr>
-              <a:t>::</a:t>
-            </a:r>
-            <a:r>
-              <a:rPr lang="en-US" sz="1600" b="1" dirty="0" err="1" smtClean="0">
-                <a:solidFill>
-                  <a:srgbClr val="C00000"/>
-                </a:solidFill>
-                <a:latin typeface="Consolas" panose="020B0609020204030204" pitchFamily="49" charset="0"/>
-              </a:rPr>
-              <a:t>size_t</a:t>
-            </a:r>
-            <a:r>
-              <a:rPr lang="en-US" sz="1600" b="1" dirty="0" smtClean="0">
-                <a:solidFill>
-                  <a:srgbClr val="C00000"/>
-                </a:solidFill>
-                <a:latin typeface="Consolas" panose="020B0609020204030204" pitchFamily="49" charset="0"/>
-              </a:rPr>
-              <a:t>&gt;(0ul, </a:t>
+              <a:t>    </a:t>
             </a:r>
             <a:r>
               <a:rPr lang="en-US" sz="1600" b="1" dirty="0" err="1">
@@ -22203,35 +21621,421 @@
                 </a:solidFill>
                 <a:latin typeface="Consolas" panose="020B0609020204030204" pitchFamily="49" charset="0"/>
               </a:rPr>
-              <a:t>data.size</a:t>
-            </a:r>
-            <a:r>
-              <a:rPr lang="en-US" sz="1600" b="1" dirty="0" smtClean="0">
+              <a:t>tbb</a:t>
+            </a:r>
+            <a:r>
+              <a:rPr lang="en-US" sz="1600" b="1" dirty="0">
                 <a:solidFill>
                   <a:srgbClr val="C00000"/>
                 </a:solidFill>
                 <a:latin typeface="Consolas" panose="020B0609020204030204" pitchFamily="49" charset="0"/>
               </a:rPr>
-              <a:t>(), </a:t>
-            </a:r>
-            <a:r>
-              <a:rPr lang="en-US" sz="1600" b="1" dirty="0" err="1" smtClean="0">
+              <a:t>::</a:t>
+            </a:r>
+            <a:r>
+              <a:rPr lang="en-US" sz="1600" b="1" dirty="0" err="1">
                 <a:solidFill>
                   <a:srgbClr val="C00000"/>
                 </a:solidFill>
                 <a:latin typeface="Consolas" panose="020B0609020204030204" pitchFamily="49" charset="0"/>
               </a:rPr>
-              <a:t>grain_size</a:t>
-            </a:r>
-            <a:r>
-              <a:rPr lang="en-US" sz="1600" b="1" dirty="0" smtClean="0">
+              <a:t>parallel_for</a:t>
+            </a:r>
+            <a:r>
+              <a:rPr lang="en-US" sz="1600" b="1">
                 <a:solidFill>
                   <a:srgbClr val="C00000"/>
                 </a:solidFill>
                 <a:latin typeface="Consolas" panose="020B0609020204030204" pitchFamily="49" charset="0"/>
               </a:rPr>
+              <a:t>(tbb</a:t>
+            </a:r>
+            <a:r>
+              <a:rPr lang="en-US" sz="1600" b="1" dirty="0">
+                <a:solidFill>
+                  <a:srgbClr val="C00000"/>
+                </a:solidFill>
+                <a:latin typeface="Consolas" panose="020B0609020204030204" pitchFamily="49" charset="0"/>
+              </a:rPr>
+              <a:t>::</a:t>
+            </a:r>
+            <a:r>
+              <a:rPr lang="en-US" sz="1600" b="1" dirty="0" err="1">
+                <a:solidFill>
+                  <a:srgbClr val="C00000"/>
+                </a:solidFill>
+                <a:latin typeface="Consolas" panose="020B0609020204030204" pitchFamily="49" charset="0"/>
+              </a:rPr>
+              <a:t>blocked_range</a:t>
+            </a:r>
+            <a:r>
+              <a:rPr lang="en-US" sz="1600" b="1" dirty="0">
+                <a:solidFill>
+                  <a:srgbClr val="C00000"/>
+                </a:solidFill>
+                <a:latin typeface="Consolas" panose="020B0609020204030204" pitchFamily="49" charset="0"/>
+              </a:rPr>
+              <a:t>&lt;</a:t>
+            </a:r>
+            <a:r>
+              <a:rPr lang="en-US" sz="1600" b="1" dirty="0" err="1">
+                <a:solidFill>
+                  <a:srgbClr val="C00000"/>
+                </a:solidFill>
+                <a:latin typeface="Consolas" panose="020B0609020204030204" pitchFamily="49" charset="0"/>
+              </a:rPr>
+              <a:t>std</a:t>
+            </a:r>
+            <a:r>
+              <a:rPr lang="en-US" sz="1600" b="1" dirty="0">
+                <a:solidFill>
+                  <a:srgbClr val="C00000"/>
+                </a:solidFill>
+                <a:latin typeface="Consolas" panose="020B0609020204030204" pitchFamily="49" charset="0"/>
+              </a:rPr>
+              <a:t>::</a:t>
+            </a:r>
+            <a:r>
+              <a:rPr lang="en-US" sz="1600" b="1" dirty="0" err="1">
+                <a:solidFill>
+                  <a:srgbClr val="C00000"/>
+                </a:solidFill>
+                <a:latin typeface="Consolas" panose="020B0609020204030204" pitchFamily="49" charset="0"/>
+              </a:rPr>
+              <a:t>size_t</a:t>
+            </a:r>
+            <a:r>
+              <a:rPr lang="en-US" sz="1600" b="1" dirty="0">
+                <a:solidFill>
+                  <a:srgbClr val="C00000"/>
+                </a:solidFill>
+                <a:latin typeface="Consolas" panose="020B0609020204030204" pitchFamily="49" charset="0"/>
+              </a:rPr>
+              <a:t>&gt;(0ul, </a:t>
+            </a:r>
+            <a:r>
+              <a:rPr lang="en-US" sz="1600" b="1" dirty="0" err="1">
+                <a:solidFill>
+                  <a:srgbClr val="C00000"/>
+                </a:solidFill>
+                <a:latin typeface="Consolas" panose="020B0609020204030204" pitchFamily="49" charset="0"/>
+              </a:rPr>
+              <a:t>data.size</a:t>
+            </a:r>
+            <a:r>
+              <a:rPr lang="en-US" sz="1600" b="1" dirty="0">
+                <a:solidFill>
+                  <a:srgbClr val="C00000"/>
+                </a:solidFill>
+                <a:latin typeface="Consolas" panose="020B0609020204030204" pitchFamily="49" charset="0"/>
+              </a:rPr>
+              <a:t>(), </a:t>
+            </a:r>
+            <a:r>
+              <a:rPr lang="en-US" sz="1600" b="1" dirty="0" err="1">
+                <a:solidFill>
+                  <a:srgbClr val="C00000"/>
+                </a:solidFill>
+                <a:latin typeface="Consolas" panose="020B0609020204030204" pitchFamily="49" charset="0"/>
+              </a:rPr>
+              <a:t>grain_size</a:t>
+            </a:r>
+            <a:r>
+              <a:rPr lang="en-US" sz="1600" b="1" dirty="0">
+                <a:solidFill>
+                  <a:srgbClr val="C00000"/>
+                </a:solidFill>
+                <a:latin typeface="Consolas" panose="020B0609020204030204" pitchFamily="49" charset="0"/>
+              </a:rPr>
               <a:t>),</a:t>
             </a:r>
+          </a:p>
+          <a:p>
+            <a:r>
+              <a:rPr lang="en-US" sz="1600" b="1" dirty="0">
+                <a:solidFill>
+                  <a:srgbClr val="C00000"/>
+                </a:solidFill>
+                <a:latin typeface="Consolas" panose="020B0609020204030204" pitchFamily="49" charset="0"/>
+              </a:rPr>
+              <a:t>                      [&amp;data] (</a:t>
+            </a:r>
+            <a:r>
+              <a:rPr lang="en-US" sz="1600" b="1" dirty="0" err="1">
+                <a:solidFill>
+                  <a:srgbClr val="C00000"/>
+                </a:solidFill>
+                <a:latin typeface="Consolas" panose="020B0609020204030204" pitchFamily="49" charset="0"/>
+              </a:rPr>
+              <a:t>const</a:t>
+            </a:r>
+            <a:r>
+              <a:rPr lang="en-US" sz="1600" b="1" dirty="0">
+                <a:solidFill>
+                  <a:srgbClr val="C00000"/>
+                </a:solidFill>
+                <a:latin typeface="Consolas" panose="020B0609020204030204" pitchFamily="49" charset="0"/>
+              </a:rPr>
+              <a:t> </a:t>
+            </a:r>
+            <a:r>
+              <a:rPr lang="en-US" sz="1600" b="1" dirty="0" err="1">
+                <a:solidFill>
+                  <a:srgbClr val="C00000"/>
+                </a:solidFill>
+                <a:latin typeface="Consolas" panose="020B0609020204030204" pitchFamily="49" charset="0"/>
+              </a:rPr>
+              <a:t>tbb:blocked_range</a:t>
+            </a:r>
+            <a:r>
+              <a:rPr lang="en-US" sz="1600" b="1" dirty="0">
+                <a:solidFill>
+                  <a:srgbClr val="C00000"/>
+                </a:solidFill>
+                <a:latin typeface="Consolas" panose="020B0609020204030204" pitchFamily="49" charset="0"/>
+              </a:rPr>
+              <a:t>&lt;</a:t>
+            </a:r>
+            <a:r>
+              <a:rPr lang="en-US" sz="1600" b="1" dirty="0" err="1">
+                <a:solidFill>
+                  <a:srgbClr val="C00000"/>
+                </a:solidFill>
+                <a:latin typeface="Consolas" panose="020B0609020204030204" pitchFamily="49" charset="0"/>
+              </a:rPr>
+              <a:t>std</a:t>
+            </a:r>
+            <a:r>
+              <a:rPr lang="en-US" sz="1600" b="1" dirty="0">
+                <a:solidFill>
+                  <a:srgbClr val="C00000"/>
+                </a:solidFill>
+                <a:latin typeface="Consolas" panose="020B0609020204030204" pitchFamily="49" charset="0"/>
+              </a:rPr>
+              <a:t>::</a:t>
+            </a:r>
+            <a:r>
+              <a:rPr lang="en-US" sz="1600" b="1" dirty="0" err="1">
+                <a:solidFill>
+                  <a:srgbClr val="C00000"/>
+                </a:solidFill>
+                <a:latin typeface="Consolas" panose="020B0609020204030204" pitchFamily="49" charset="0"/>
+              </a:rPr>
+              <a:t>size_t</a:t>
+            </a:r>
+            <a:r>
+              <a:rPr lang="en-US" sz="1600" b="1" dirty="0">
+                <a:solidFill>
+                  <a:srgbClr val="C00000"/>
+                </a:solidFill>
+                <a:latin typeface="Consolas" panose="020B0609020204030204" pitchFamily="49" charset="0"/>
+              </a:rPr>
+              <a:t>&gt;&amp; range) {</a:t>
+            </a:r>
+          </a:p>
+          <a:p>
+            <a:r>
+              <a:rPr lang="en-US" sz="1600" b="1" dirty="0">
+                <a:solidFill>
+                  <a:srgbClr val="C00000"/>
+                </a:solidFill>
+                <a:latin typeface="Consolas" panose="020B0609020204030204" pitchFamily="49" charset="0"/>
+              </a:rPr>
+              <a:t>                          for (</a:t>
+            </a:r>
+            <a:r>
+              <a:rPr lang="en-US" sz="1600" b="1" dirty="0" err="1">
+                <a:solidFill>
+                  <a:srgbClr val="C00000"/>
+                </a:solidFill>
+                <a:latin typeface="Consolas" panose="020B0609020204030204" pitchFamily="49" charset="0"/>
+              </a:rPr>
+              <a:t>std</a:t>
+            </a:r>
+            <a:r>
+              <a:rPr lang="en-US" sz="1600" b="1" dirty="0">
+                <a:solidFill>
+                  <a:srgbClr val="C00000"/>
+                </a:solidFill>
+                <a:latin typeface="Consolas" panose="020B0609020204030204" pitchFamily="49" charset="0"/>
+              </a:rPr>
+              <a:t>::</a:t>
+            </a:r>
+            <a:r>
+              <a:rPr lang="en-US" sz="1600" b="1" dirty="0" err="1">
+                <a:solidFill>
+                  <a:srgbClr val="C00000"/>
+                </a:solidFill>
+                <a:latin typeface="Consolas" panose="020B0609020204030204" pitchFamily="49" charset="0"/>
+              </a:rPr>
+              <a:t>size_t</a:t>
+            </a:r>
+            <a:r>
+              <a:rPr lang="en-US" sz="1600" b="1" dirty="0">
+                <a:solidFill>
+                  <a:srgbClr val="C00000"/>
+                </a:solidFill>
+                <a:latin typeface="Consolas" panose="020B0609020204030204" pitchFamily="49" charset="0"/>
+              </a:rPr>
+              <a:t> </a:t>
+            </a:r>
+            <a:r>
+              <a:rPr lang="en-US" sz="1600" b="1" dirty="0" err="1">
+                <a:solidFill>
+                  <a:srgbClr val="C00000"/>
+                </a:solidFill>
+                <a:latin typeface="Consolas" panose="020B0609020204030204" pitchFamily="49" charset="0"/>
+              </a:rPr>
+              <a:t>i</a:t>
+            </a:r>
+            <a:r>
+              <a:rPr lang="en-US" sz="1600" b="1" dirty="0">
+                <a:solidFill>
+                  <a:srgbClr val="C00000"/>
+                </a:solidFill>
+                <a:latin typeface="Consolas" panose="020B0609020204030204" pitchFamily="49" charset="0"/>
+              </a:rPr>
+              <a:t> = </a:t>
+            </a:r>
+            <a:r>
+              <a:rPr lang="en-US" sz="1600" b="1" dirty="0" err="1">
+                <a:solidFill>
+                  <a:srgbClr val="C00000"/>
+                </a:solidFill>
+                <a:latin typeface="Consolas" panose="020B0609020204030204" pitchFamily="49" charset="0"/>
+              </a:rPr>
+              <a:t>range.begin</a:t>
+            </a:r>
+            <a:r>
+              <a:rPr lang="en-US" sz="1600" b="1" dirty="0">
+                <a:solidFill>
+                  <a:srgbClr val="C00000"/>
+                </a:solidFill>
+                <a:latin typeface="Consolas" panose="020B0609020204030204" pitchFamily="49" charset="0"/>
+              </a:rPr>
+              <a:t>(); </a:t>
+            </a:r>
+            <a:r>
+              <a:rPr lang="en-US" sz="1600" b="1" dirty="0" err="1">
+                <a:solidFill>
+                  <a:srgbClr val="C00000"/>
+                </a:solidFill>
+                <a:latin typeface="Consolas" panose="020B0609020204030204" pitchFamily="49" charset="0"/>
+              </a:rPr>
+              <a:t>i</a:t>
+            </a:r>
+            <a:r>
+              <a:rPr lang="en-US" sz="1600" b="1" dirty="0">
+                <a:solidFill>
+                  <a:srgbClr val="C00000"/>
+                </a:solidFill>
+                <a:latin typeface="Consolas" panose="020B0609020204030204" pitchFamily="49" charset="0"/>
+              </a:rPr>
+              <a:t> &lt; </a:t>
+            </a:r>
+            <a:r>
+              <a:rPr lang="en-US" sz="1600" b="1" dirty="0" err="1">
+                <a:solidFill>
+                  <a:srgbClr val="C00000"/>
+                </a:solidFill>
+                <a:latin typeface="Consolas" panose="020B0609020204030204" pitchFamily="49" charset="0"/>
+              </a:rPr>
+              <a:t>range.end</a:t>
+            </a:r>
+            <a:r>
+              <a:rPr lang="en-US" sz="1600" b="1" dirty="0">
+                <a:solidFill>
+                  <a:srgbClr val="C00000"/>
+                </a:solidFill>
+                <a:latin typeface="Consolas" panose="020B0609020204030204" pitchFamily="49" charset="0"/>
+              </a:rPr>
+              <a:t>(); ++</a:t>
+            </a:r>
+            <a:r>
+              <a:rPr lang="en-US" sz="1600" b="1" dirty="0" err="1">
+                <a:solidFill>
+                  <a:srgbClr val="C00000"/>
+                </a:solidFill>
+                <a:latin typeface="Consolas" panose="020B0609020204030204" pitchFamily="49" charset="0"/>
+              </a:rPr>
+              <a:t>i</a:t>
+            </a:r>
+            <a:r>
+              <a:rPr lang="en-US" sz="1600" b="1" dirty="0">
+                <a:solidFill>
+                  <a:srgbClr val="C00000"/>
+                </a:solidFill>
+                <a:latin typeface="Consolas" panose="020B0609020204030204" pitchFamily="49" charset="0"/>
+              </a:rPr>
+              <a:t>)</a:t>
+            </a:r>
+          </a:p>
+          <a:p>
+            <a:r>
+              <a:rPr lang="en-US" sz="1600" b="1" dirty="0">
+                <a:solidFill>
+                  <a:srgbClr val="C00000"/>
+                </a:solidFill>
+                <a:latin typeface="Consolas" panose="020B0609020204030204" pitchFamily="49" charset="0"/>
+              </a:rPr>
+              <a:t>                              data[</a:t>
+            </a:r>
+            <a:r>
+              <a:rPr lang="en-US" sz="1600" b="1" dirty="0" err="1">
+                <a:solidFill>
+                  <a:srgbClr val="C00000"/>
+                </a:solidFill>
+                <a:latin typeface="Consolas" panose="020B0609020204030204" pitchFamily="49" charset="0"/>
+              </a:rPr>
+              <a:t>i</a:t>
+            </a:r>
+            <a:r>
+              <a:rPr lang="en-US" sz="1600" b="1" dirty="0">
+                <a:solidFill>
+                  <a:srgbClr val="C00000"/>
+                </a:solidFill>
+                <a:latin typeface="Consolas" panose="020B0609020204030204" pitchFamily="49" charset="0"/>
+              </a:rPr>
+              <a:t>] = data[</a:t>
+            </a:r>
+            <a:r>
+              <a:rPr lang="en-US" sz="1600" b="1" dirty="0" err="1">
+                <a:solidFill>
+                  <a:srgbClr val="C00000"/>
+                </a:solidFill>
+                <a:latin typeface="Consolas" panose="020B0609020204030204" pitchFamily="49" charset="0"/>
+              </a:rPr>
+              <a:t>i</a:t>
+            </a:r>
+            <a:r>
+              <a:rPr lang="en-US" sz="1600" b="1" dirty="0">
+                <a:solidFill>
+                  <a:srgbClr val="C00000"/>
+                </a:solidFill>
+                <a:latin typeface="Consolas" panose="020B0609020204030204" pitchFamily="49" charset="0"/>
+              </a:rPr>
+              <a:t>]*data[</a:t>
+            </a:r>
+            <a:r>
+              <a:rPr lang="en-US" sz="1600" b="1" dirty="0" err="1">
+                <a:solidFill>
+                  <a:srgbClr val="C00000"/>
+                </a:solidFill>
+                <a:latin typeface="Consolas" panose="020B0609020204030204" pitchFamily="49" charset="0"/>
+              </a:rPr>
+              <a:t>i</a:t>
+            </a:r>
+            <a:r>
+              <a:rPr lang="en-US" sz="1600" b="1" dirty="0">
+                <a:solidFill>
+                  <a:srgbClr val="C00000"/>
+                </a:solidFill>
+                <a:latin typeface="Consolas" panose="020B0609020204030204" pitchFamily="49" charset="0"/>
+              </a:rPr>
+              <a:t>]; });</a:t>
+            </a:r>
+          </a:p>
+          <a:p>
             <a:endParaRPr lang="en-US" sz="1600" b="1" dirty="0">
               <a:solidFill>
                 <a:srgbClr val="C00000"/>
@@ -22241,334 +22045,11 @@
           </a:p>
           <a:p>
             <a:r>
-              <a:rPr lang="en-US" sz="1600" b="1" dirty="0">
-                <a:solidFill>
-                  <a:srgbClr val="C00000"/>
-                </a:solidFill>
-                <a:latin typeface="Consolas" panose="020B0609020204030204" pitchFamily="49" charset="0"/>
-              </a:rPr>
-              <a:t>                      [&amp;data] </a:t>
-            </a:r>
-            <a:r>
-              <a:rPr lang="en-US" sz="1600" b="1" dirty="0" smtClean="0">
-                <a:solidFill>
-                  <a:srgbClr val="C00000"/>
-                </a:solidFill>
-                <a:latin typeface="Consolas" panose="020B0609020204030204" pitchFamily="49" charset="0"/>
-              </a:rPr>
-              <a:t>(</a:t>
-            </a:r>
-            <a:r>
-              <a:rPr lang="en-US" sz="1600" b="1" dirty="0" err="1" smtClean="0">
-                <a:solidFill>
-                  <a:srgbClr val="C00000"/>
-                </a:solidFill>
-                <a:latin typeface="Consolas" panose="020B0609020204030204" pitchFamily="49" charset="0"/>
-              </a:rPr>
-              <a:t>const</a:t>
-            </a:r>
-            <a:r>
-              <a:rPr lang="en-US" sz="1600" b="1" dirty="0" smtClean="0">
-                <a:solidFill>
-                  <a:srgbClr val="C00000"/>
-                </a:solidFill>
-                <a:latin typeface="Consolas" panose="020B0609020204030204" pitchFamily="49" charset="0"/>
-              </a:rPr>
-              <a:t> </a:t>
-            </a:r>
-            <a:r>
-              <a:rPr lang="en-US" sz="1600" b="1" dirty="0" err="1" smtClean="0">
-                <a:solidFill>
-                  <a:srgbClr val="C00000"/>
-                </a:solidFill>
-                <a:latin typeface="Consolas" panose="020B0609020204030204" pitchFamily="49" charset="0"/>
-              </a:rPr>
-              <a:t>tbb:blocked_range</a:t>
-            </a:r>
-            <a:r>
-              <a:rPr lang="en-US" sz="1600" b="1" dirty="0" smtClean="0">
-                <a:solidFill>
-                  <a:srgbClr val="C00000"/>
-                </a:solidFill>
-                <a:latin typeface="Consolas" panose="020B0609020204030204" pitchFamily="49" charset="0"/>
-              </a:rPr>
-              <a:t>&lt;</a:t>
-            </a:r>
-            <a:r>
-              <a:rPr lang="en-US" sz="1600" b="1" dirty="0" err="1" smtClean="0">
-                <a:solidFill>
-                  <a:srgbClr val="C00000"/>
-                </a:solidFill>
-                <a:latin typeface="Consolas" panose="020B0609020204030204" pitchFamily="49" charset="0"/>
-              </a:rPr>
-              <a:t>std</a:t>
-            </a:r>
-            <a:r>
-              <a:rPr lang="en-US" sz="1600" b="1" dirty="0" smtClean="0">
-                <a:solidFill>
-                  <a:srgbClr val="C00000"/>
-                </a:solidFill>
-                <a:latin typeface="Consolas" panose="020B0609020204030204" pitchFamily="49" charset="0"/>
-              </a:rPr>
-              <a:t>::</a:t>
-            </a:r>
-            <a:r>
-              <a:rPr lang="en-US" sz="1600" b="1" dirty="0" err="1" smtClean="0">
-                <a:solidFill>
-                  <a:srgbClr val="C00000"/>
-                </a:solidFill>
-                <a:latin typeface="Consolas" panose="020B0609020204030204" pitchFamily="49" charset="0"/>
-              </a:rPr>
-              <a:t>size_t</a:t>
-            </a:r>
-            <a:r>
-              <a:rPr lang="en-US" sz="1600" b="1" dirty="0" smtClean="0">
-                <a:solidFill>
-                  <a:srgbClr val="C00000"/>
-                </a:solidFill>
-                <a:latin typeface="Consolas" panose="020B0609020204030204" pitchFamily="49" charset="0"/>
-              </a:rPr>
-              <a:t>&gt;&amp; range) {</a:t>
-            </a:r>
-          </a:p>
-          <a:p>
-            <a:r>
-              <a:rPr lang="en-US" sz="1600" b="1" dirty="0">
-                <a:solidFill>
-                  <a:srgbClr val="C00000"/>
-                </a:solidFill>
-                <a:latin typeface="Consolas" panose="020B0609020204030204" pitchFamily="49" charset="0"/>
-              </a:rPr>
-              <a:t> </a:t>
-            </a:r>
-            <a:r>
-              <a:rPr lang="en-US" sz="1600" b="1" dirty="0" smtClean="0">
-                <a:solidFill>
-                  <a:srgbClr val="C00000"/>
-                </a:solidFill>
-                <a:latin typeface="Consolas" panose="020B0609020204030204" pitchFamily="49" charset="0"/>
-              </a:rPr>
-              <a:t>                         for (</a:t>
-            </a:r>
-            <a:r>
-              <a:rPr lang="en-US" sz="1600" b="1" dirty="0" err="1" smtClean="0">
-                <a:solidFill>
-                  <a:srgbClr val="C00000"/>
-                </a:solidFill>
-                <a:latin typeface="Consolas" panose="020B0609020204030204" pitchFamily="49" charset="0"/>
-              </a:rPr>
-              <a:t>std</a:t>
-            </a:r>
-            <a:r>
-              <a:rPr lang="en-US" sz="1600" b="1" dirty="0" smtClean="0">
-                <a:solidFill>
-                  <a:srgbClr val="C00000"/>
-                </a:solidFill>
-                <a:latin typeface="Consolas" panose="020B0609020204030204" pitchFamily="49" charset="0"/>
-              </a:rPr>
-              <a:t>::</a:t>
-            </a:r>
-            <a:r>
-              <a:rPr lang="en-US" sz="1600" b="1" dirty="0" err="1" smtClean="0">
-                <a:solidFill>
-                  <a:srgbClr val="C00000"/>
-                </a:solidFill>
-                <a:latin typeface="Consolas" panose="020B0609020204030204" pitchFamily="49" charset="0"/>
-              </a:rPr>
-              <a:t>size_t</a:t>
-            </a:r>
-            <a:r>
-              <a:rPr lang="en-US" sz="1600" b="1" dirty="0" smtClean="0">
-                <a:solidFill>
-                  <a:srgbClr val="C00000"/>
-                </a:solidFill>
-                <a:latin typeface="Consolas" panose="020B0609020204030204" pitchFamily="49" charset="0"/>
-              </a:rPr>
-              <a:t> </a:t>
-            </a:r>
-            <a:r>
-              <a:rPr lang="en-US" sz="1600" b="1" dirty="0" err="1" smtClean="0">
-                <a:solidFill>
-                  <a:srgbClr val="C00000"/>
-                </a:solidFill>
-                <a:latin typeface="Consolas" panose="020B0609020204030204" pitchFamily="49" charset="0"/>
-              </a:rPr>
-              <a:t>i</a:t>
-            </a:r>
-            <a:r>
-              <a:rPr lang="en-US" sz="1600" b="1" dirty="0" smtClean="0">
-                <a:solidFill>
-                  <a:srgbClr val="C00000"/>
-                </a:solidFill>
-                <a:latin typeface="Consolas" panose="020B0609020204030204" pitchFamily="49" charset="0"/>
-              </a:rPr>
-              <a:t> = </a:t>
-            </a:r>
-            <a:r>
-              <a:rPr lang="en-US" sz="1600" b="1" dirty="0" err="1" smtClean="0">
-                <a:solidFill>
-                  <a:srgbClr val="C00000"/>
-                </a:solidFill>
-                <a:latin typeface="Consolas" panose="020B0609020204030204" pitchFamily="49" charset="0"/>
-              </a:rPr>
-              <a:t>range.begin</a:t>
-            </a:r>
-            <a:r>
-              <a:rPr lang="en-US" sz="1600" b="1" dirty="0" smtClean="0">
-                <a:solidFill>
-                  <a:srgbClr val="C00000"/>
-                </a:solidFill>
-                <a:latin typeface="Consolas" panose="020B0609020204030204" pitchFamily="49" charset="0"/>
-              </a:rPr>
-              <a:t>(); </a:t>
-            </a:r>
-            <a:r>
-              <a:rPr lang="en-US" sz="1600" b="1" dirty="0" err="1" smtClean="0">
-                <a:solidFill>
-                  <a:srgbClr val="C00000"/>
-                </a:solidFill>
-                <a:latin typeface="Consolas" panose="020B0609020204030204" pitchFamily="49" charset="0"/>
-              </a:rPr>
-              <a:t>i</a:t>
-            </a:r>
-            <a:r>
-              <a:rPr lang="en-US" sz="1600" b="1" dirty="0" smtClean="0">
-                <a:solidFill>
-                  <a:srgbClr val="C00000"/>
-                </a:solidFill>
-                <a:latin typeface="Consolas" panose="020B0609020204030204" pitchFamily="49" charset="0"/>
-              </a:rPr>
-              <a:t> &lt; </a:t>
-            </a:r>
-            <a:r>
-              <a:rPr lang="en-US" sz="1600" b="1" dirty="0" err="1" smtClean="0">
-                <a:solidFill>
-                  <a:srgbClr val="C00000"/>
-                </a:solidFill>
-                <a:latin typeface="Consolas" panose="020B0609020204030204" pitchFamily="49" charset="0"/>
-              </a:rPr>
-              <a:t>range.end</a:t>
-            </a:r>
-            <a:r>
-              <a:rPr lang="en-US" sz="1600" b="1" dirty="0" smtClean="0">
-                <a:solidFill>
-                  <a:srgbClr val="C00000"/>
-                </a:solidFill>
-                <a:latin typeface="Consolas" panose="020B0609020204030204" pitchFamily="49" charset="0"/>
-              </a:rPr>
-              <a:t>(); ++</a:t>
-            </a:r>
-            <a:r>
-              <a:rPr lang="en-US" sz="1600" b="1" dirty="0" err="1" smtClean="0">
-                <a:solidFill>
-                  <a:srgbClr val="C00000"/>
-                </a:solidFill>
-                <a:latin typeface="Consolas" panose="020B0609020204030204" pitchFamily="49" charset="0"/>
-              </a:rPr>
-              <a:t>i</a:t>
-            </a:r>
-            <a:r>
-              <a:rPr lang="en-US" sz="1600" b="1" dirty="0" smtClean="0">
-                <a:solidFill>
-                  <a:srgbClr val="C00000"/>
-                </a:solidFill>
-                <a:latin typeface="Consolas" panose="020B0609020204030204" pitchFamily="49" charset="0"/>
-              </a:rPr>
-              <a:t>)</a:t>
-            </a:r>
-          </a:p>
-          <a:p>
-            <a:r>
-              <a:rPr lang="en-US" sz="1600" b="1" dirty="0">
-                <a:solidFill>
-                  <a:srgbClr val="C00000"/>
-                </a:solidFill>
-                <a:latin typeface="Consolas" panose="020B0609020204030204" pitchFamily="49" charset="0"/>
-              </a:rPr>
-              <a:t> </a:t>
-            </a:r>
-            <a:r>
-              <a:rPr lang="en-US" sz="1600" b="1" dirty="0" smtClean="0">
-                <a:solidFill>
-                  <a:srgbClr val="C00000"/>
-                </a:solidFill>
-                <a:latin typeface="Consolas" panose="020B0609020204030204" pitchFamily="49" charset="0"/>
-              </a:rPr>
-              <a:t>                             data[</a:t>
-            </a:r>
-            <a:r>
-              <a:rPr lang="en-US" sz="1600" b="1" dirty="0" err="1" smtClean="0">
-                <a:solidFill>
-                  <a:srgbClr val="C00000"/>
-                </a:solidFill>
-                <a:latin typeface="Consolas" panose="020B0609020204030204" pitchFamily="49" charset="0"/>
-              </a:rPr>
-              <a:t>i</a:t>
-            </a:r>
-            <a:r>
-              <a:rPr lang="en-US" sz="1600" b="1" dirty="0">
-                <a:solidFill>
-                  <a:srgbClr val="C00000"/>
-                </a:solidFill>
-                <a:latin typeface="Consolas" panose="020B0609020204030204" pitchFamily="49" charset="0"/>
-              </a:rPr>
-              <a:t>] = data[</a:t>
-            </a:r>
-            <a:r>
-              <a:rPr lang="en-US" sz="1600" b="1" dirty="0" err="1">
-                <a:solidFill>
-                  <a:srgbClr val="C00000"/>
-                </a:solidFill>
-                <a:latin typeface="Consolas" panose="020B0609020204030204" pitchFamily="49" charset="0"/>
-              </a:rPr>
-              <a:t>i</a:t>
-            </a:r>
-            <a:r>
-              <a:rPr lang="en-US" sz="1600" b="1" dirty="0">
-                <a:solidFill>
-                  <a:srgbClr val="C00000"/>
-                </a:solidFill>
-                <a:latin typeface="Consolas" panose="020B0609020204030204" pitchFamily="49" charset="0"/>
-              </a:rPr>
-              <a:t>]*data[</a:t>
-            </a:r>
-            <a:r>
-              <a:rPr lang="en-US" sz="1600" b="1" dirty="0" err="1">
-                <a:solidFill>
-                  <a:srgbClr val="C00000"/>
-                </a:solidFill>
-                <a:latin typeface="Consolas" panose="020B0609020204030204" pitchFamily="49" charset="0"/>
-              </a:rPr>
-              <a:t>i</a:t>
-            </a:r>
-            <a:r>
-              <a:rPr lang="en-US" sz="1600" b="1" dirty="0">
-                <a:solidFill>
-                  <a:srgbClr val="C00000"/>
-                </a:solidFill>
-                <a:latin typeface="Consolas" panose="020B0609020204030204" pitchFamily="49" charset="0"/>
-              </a:rPr>
-              <a:t>]; });</a:t>
-            </a:r>
-          </a:p>
-          <a:p>
-            <a:endParaRPr lang="en-US" sz="1600" b="1" dirty="0" smtClean="0">
-              <a:solidFill>
-                <a:srgbClr val="C00000"/>
-              </a:solidFill>
-              <a:latin typeface="Consolas" panose="020B0609020204030204" pitchFamily="49" charset="0"/>
-            </a:endParaRPr>
-          </a:p>
-          <a:p>
-            <a:r>
-              <a:rPr lang="en-US" sz="1600" dirty="0" smtClean="0">
+              <a:rPr lang="en-US" sz="1600" dirty="0">
                 <a:latin typeface="Consolas" panose="020B0609020204030204" pitchFamily="49" charset="0"/>
               </a:rPr>
               <a:t>    …</a:t>
             </a:r>
-            <a:endParaRPr lang="en-US" sz="1600" dirty="0">
-              <a:latin typeface="Consolas" panose="020B0609020204030204" pitchFamily="49" charset="0"/>
-            </a:endParaRPr>
           </a:p>
           <a:p>
             <a:r>
@@ -22685,10 +22166,9 @@
           <a:p>
             <a:pPr algn="ctr"/>
             <a:r>
-              <a:rPr lang="en-US" dirty="0" smtClean="0"/>
+              <a:rPr lang="en-US" dirty="0"/>
               <a:t>1000</a:t>
             </a:r>
-            <a:endParaRPr lang="en-US" dirty="0"/>
           </a:p>
         </p:txBody>
       </p:sp>
@@ -22729,10 +22209,9 @@
           <a:p>
             <a:pPr algn="ctr"/>
             <a:r>
-              <a:rPr lang="en-US" dirty="0" smtClean="0"/>
+              <a:rPr lang="en-US" dirty="0"/>
               <a:t>9999</a:t>
             </a:r>
-            <a:endParaRPr lang="en-US" dirty="0"/>
           </a:p>
         </p:txBody>
       </p:sp>
@@ -22773,10 +22252,9 @@
           <a:p>
             <a:pPr algn="ctr"/>
             <a:r>
-              <a:rPr lang="en-US" dirty="0" smtClean="0"/>
+              <a:rPr lang="en-US" dirty="0"/>
               <a:t>   0</a:t>
             </a:r>
-            <a:endParaRPr lang="en-US" dirty="0"/>
           </a:p>
         </p:txBody>
       </p:sp>
@@ -22817,10 +22295,9 @@
           <a:p>
             <a:pPr algn="ctr"/>
             <a:r>
-              <a:rPr lang="en-US" dirty="0" smtClean="0"/>
+              <a:rPr lang="en-US" dirty="0"/>
               <a:t> 999</a:t>
             </a:r>
-            <a:endParaRPr lang="en-US" dirty="0"/>
           </a:p>
         </p:txBody>
       </p:sp>
@@ -22861,10 +22338,9 @@
           <a:p>
             <a:pPr algn="ctr"/>
             <a:r>
-              <a:rPr lang="en-US" dirty="0" smtClean="0"/>
+              <a:rPr lang="en-US" dirty="0"/>
               <a:t>1999</a:t>
             </a:r>
-            <a:endParaRPr lang="en-US" dirty="0"/>
           </a:p>
         </p:txBody>
       </p:sp>
@@ -22906,13 +22382,8 @@
             <a:pPr algn="ctr"/>
             <a:r>
               <a:rPr lang="en-US" dirty="0"/>
-              <a:t>2</a:t>
-            </a:r>
-            <a:r>
-              <a:rPr lang="en-US" dirty="0" smtClean="0"/>
-              <a:t>000</a:t>
-            </a:r>
-            <a:endParaRPr lang="en-US" dirty="0"/>
+              <a:t>2000</a:t>
+            </a:r>
           </a:p>
         </p:txBody>
       </p:sp>
@@ -23059,10 +22530,9 @@
           <a:lstStyle/>
           <a:p>
             <a:r>
-              <a:rPr lang="en-US" dirty="0" smtClean="0"/>
+              <a:rPr lang="en-US" dirty="0"/>
               <a:t>…</a:t>
             </a:r>
-            <a:endParaRPr lang="en-US" dirty="0"/>
           </a:p>
         </p:txBody>
       </p:sp>
@@ -23089,10 +22559,9 @@
           <a:lstStyle/>
           <a:p>
             <a:r>
-              <a:rPr lang="en-US" dirty="0" smtClean="0"/>
+              <a:rPr lang="en-US" dirty="0"/>
               <a:t>…</a:t>
             </a:r>
-            <a:endParaRPr lang="en-US" dirty="0"/>
           </a:p>
         </p:txBody>
       </p:sp>
@@ -23119,10 +22588,9 @@
           <a:lstStyle/>
           <a:p>
             <a:r>
-              <a:rPr lang="en-US" dirty="0" smtClean="0"/>
+              <a:rPr lang="en-US" dirty="0"/>
               <a:t>…</a:t>
             </a:r>
-            <a:endParaRPr lang="en-US" dirty="0"/>
           </a:p>
         </p:txBody>
       </p:sp>
@@ -23206,10 +22674,9 @@
             <a:lstStyle/>
             <a:p>
               <a:r>
-                <a:rPr lang="en-US" dirty="0" smtClean="0"/>
+                <a:rPr lang="en-US" dirty="0"/>
                 <a:t>first range</a:t>
               </a:r>
-              <a:endParaRPr lang="en-US" dirty="0"/>
             </a:p>
           </p:txBody>
         </p:sp>
@@ -23294,10 +22761,9 @@
             <a:lstStyle/>
             <a:p>
               <a:r>
-                <a:rPr lang="en-US" dirty="0" smtClean="0"/>
+                <a:rPr lang="en-US" dirty="0"/>
                 <a:t>second range</a:t>
               </a:r>
-              <a:endParaRPr lang="en-US" dirty="0"/>
             </a:p>
           </p:txBody>
         </p:sp>
@@ -23382,10 +22848,9 @@
             <a:lstStyle/>
             <a:p>
               <a:r>
-                <a:rPr lang="en-US" dirty="0" smtClean="0"/>
+                <a:rPr lang="en-US" dirty="0"/>
                 <a:t>last range</a:t>
               </a:r>
-              <a:endParaRPr lang="en-US" dirty="0"/>
             </a:p>
           </p:txBody>
         </p:sp>
@@ -23426,17 +22891,16 @@
           <a:lstStyle/>
           <a:p>
             <a:r>
-              <a:rPr lang="en-US" dirty="0" smtClean="0"/>
+              <a:rPr lang="en-US" dirty="0"/>
               <a:t>blocked ranges divided</a:t>
             </a:r>
             <a:br>
-              <a:rPr lang="en-US" dirty="0" smtClean="0"/>
+              <a:rPr lang="en-US" dirty="0"/>
             </a:br>
             <a:r>
-              <a:rPr lang="en-US" dirty="0" smtClean="0"/>
+              <a:rPr lang="en-US" dirty="0"/>
               <a:t>over thread pool, rule of thumb: 10,000 cycles per blocked range</a:t>
             </a:r>
-            <a:endParaRPr lang="en-US" dirty="0"/>
           </a:p>
         </p:txBody>
       </p:sp>
@@ -23450,13 +22914,6 @@
   <p:clrMapOvr>
     <a:masterClrMapping/>
   </p:clrMapOvr>
-  <p:timing>
-    <p:tnLst>
-      <p:par>
-        <p:cTn id="1" dur="indefinite" restart="never" nodeType="tmRoot"/>
-      </p:par>
-    </p:tnLst>
-  </p:timing>
 </p:sld>
 </file>
 
@@ -23493,14 +22950,13 @@
           <a:lstStyle/>
           <a:p>
             <a:r>
-              <a:rPr lang="en-US" dirty="0" err="1" smtClean="0"/>
+              <a:rPr lang="en-US" dirty="0" err="1"/>
               <a:t>parallel_for</a:t>
             </a:r>
             <a:r>
-              <a:rPr lang="en-US" dirty="0" smtClean="0"/>
+              <a:rPr lang="en-US" dirty="0"/>
               <a:t>: Julia sets</a:t>
             </a:r>
-            <a:endParaRPr lang="en-US" dirty="0"/>
           </a:p>
         </p:txBody>
       </p:sp>
@@ -23581,7 +23037,7 @@
           <a:lstStyle/>
           <a:p>
             <a:r>
-              <a:rPr lang="en-US" sz="1600" dirty="0" smtClean="0">
+              <a:rPr lang="en-US" sz="1600" dirty="0">
                 <a:latin typeface="Consolas" panose="020B0609020204030204" pitchFamily="49" charset="0"/>
                 <a:cs typeface="Courier New" pitchFamily="49" charset="0"/>
               </a:rPr>
@@ -23590,315 +23046,202 @@
           </a:p>
           <a:p>
             <a:r>
-              <a:rPr lang="en-US" sz="1600" dirty="0" smtClean="0">
+              <a:rPr lang="en-US" sz="1600" dirty="0">
                 <a:latin typeface="Consolas" panose="020B0609020204030204" pitchFamily="49" charset="0"/>
                 <a:cs typeface="Courier New" pitchFamily="49" charset="0"/>
               </a:rPr>
               <a:t>…</a:t>
             </a:r>
-            <a:endParaRPr lang="en-US" sz="1600" dirty="0">
-              <a:latin typeface="Consolas" panose="020B0609020204030204" pitchFamily="49" charset="0"/>
-              <a:cs typeface="Courier New" pitchFamily="49" charset="0"/>
-            </a:endParaRPr>
-          </a:p>
-          <a:p>
-            <a:r>
-              <a:rPr lang="en-US" sz="1600" dirty="0" err="1" smtClean="0">
+          </a:p>
+          <a:p>
+            <a:r>
+              <a:rPr lang="en-US" sz="1600" dirty="0" err="1">
                 <a:latin typeface="Consolas" panose="020B0609020204030204" pitchFamily="49" charset="0"/>
                 <a:cs typeface="Courier New" pitchFamily="49" charset="0"/>
               </a:rPr>
               <a:t>const</a:t>
             </a:r>
             <a:r>
-              <a:rPr lang="en-US" sz="1600" dirty="0" smtClean="0">
+              <a:rPr lang="en-US" sz="1600" dirty="0">
                 <a:latin typeface="Consolas" panose="020B0609020204030204" pitchFamily="49" charset="0"/>
                 <a:cs typeface="Courier New" pitchFamily="49" charset="0"/>
               </a:rPr>
               <a:t> </a:t>
             </a:r>
             <a:r>
-              <a:rPr lang="en-US" sz="1600" dirty="0" err="1" smtClean="0">
+              <a:rPr lang="en-US" sz="1600" dirty="0" err="1">
                 <a:latin typeface="Consolas" panose="020B0609020204030204" pitchFamily="49" charset="0"/>
                 <a:cs typeface="Courier New" pitchFamily="49" charset="0"/>
               </a:rPr>
               <a:t>std</a:t>
             </a:r>
             <a:r>
-              <a:rPr lang="en-US" sz="1600" dirty="0" smtClean="0">
+              <a:rPr lang="en-US" sz="1600" dirty="0">
                 <a:latin typeface="Consolas" panose="020B0609020204030204" pitchFamily="49" charset="0"/>
                 <a:cs typeface="Courier New" pitchFamily="49" charset="0"/>
               </a:rPr>
-              <a:t>::complex&lt;double&gt; </a:t>
-            </a:r>
+              <a:t>::complex&lt;double&gt; c(-0.62772, - 0.42193);</a:t>
+            </a:r>
+          </a:p>
+          <a:p>
             <a:r>
               <a:rPr lang="en-US" sz="1600" dirty="0">
                 <a:latin typeface="Consolas" panose="020B0609020204030204" pitchFamily="49" charset="0"/>
                 <a:cs typeface="Courier New" pitchFamily="49" charset="0"/>
               </a:rPr>
-              <a:t>c(-0.62772, - </a:t>
-            </a:r>
-            <a:r>
-              <a:rPr lang="en-US" sz="1600" dirty="0" smtClean="0">
+              <a:t>for (double x = -1.8; x &lt; 1.8; x += 0.001)</a:t>
+            </a:r>
+          </a:p>
+          <a:p>
+            <a:r>
+              <a:rPr lang="en-US" sz="1600" dirty="0">
                 <a:latin typeface="Consolas" panose="020B0609020204030204" pitchFamily="49" charset="0"/>
                 <a:cs typeface="Courier New" pitchFamily="49" charset="0"/>
               </a:rPr>
-              <a:t>0.42193);</a:t>
-            </a:r>
-          </a:p>
-          <a:p>
-            <a:r>
-              <a:rPr lang="en-US" sz="1600" dirty="0" smtClean="0">
+              <a:t>    for (double y = -1.8; y &lt; 1.8; y += 0.001) {</a:t>
+            </a:r>
+          </a:p>
+          <a:p>
+            <a:r>
+              <a:rPr lang="en-US" sz="1600" dirty="0">
                 <a:latin typeface="Consolas" panose="020B0609020204030204" pitchFamily="49" charset="0"/>
                 <a:cs typeface="Courier New" pitchFamily="49" charset="0"/>
               </a:rPr>
-              <a:t>for (double x = -1.8; x &lt; 1.8; x += 0.001)</a:t>
-            </a:r>
-          </a:p>
-          <a:p>
+              <a:t>        </a:t>
+            </a:r>
+            <a:r>
+              <a:rPr lang="en-US" sz="1600" dirty="0" err="1">
+                <a:latin typeface="Consolas" panose="020B0609020204030204" pitchFamily="49" charset="0"/>
+                <a:cs typeface="Courier New" pitchFamily="49" charset="0"/>
+              </a:rPr>
+              <a:t>std</a:t>
+            </a:r>
             <a:r>
               <a:rPr lang="en-US" sz="1600" dirty="0">
                 <a:latin typeface="Consolas" panose="020B0609020204030204" pitchFamily="49" charset="0"/>
                 <a:cs typeface="Courier New" pitchFamily="49" charset="0"/>
               </a:rPr>
-              <a:t> </a:t>
-            </a:r>
-            <a:r>
-              <a:rPr lang="en-US" sz="1600" dirty="0" smtClean="0">
+              <a:t>::complex&lt;double&gt; z(x, y);</a:t>
+            </a:r>
+          </a:p>
+          <a:p>
+            <a:r>
+              <a:rPr lang="en-US" sz="1600" dirty="0">
                 <a:latin typeface="Consolas" panose="020B0609020204030204" pitchFamily="49" charset="0"/>
                 <a:cs typeface="Courier New" pitchFamily="49" charset="0"/>
               </a:rPr>
-              <a:t>   </a:t>
+              <a:t>        while (</a:t>
+            </a:r>
+            <a:r>
+              <a:rPr lang="en-US" sz="1600" dirty="0" err="1">
+                <a:latin typeface="Consolas" panose="020B0609020204030204" pitchFamily="49" charset="0"/>
+                <a:cs typeface="Courier New" pitchFamily="49" charset="0"/>
+              </a:rPr>
+              <a:t>std</a:t>
             </a:r>
             <a:r>
               <a:rPr lang="en-US" sz="1600" dirty="0">
                 <a:latin typeface="Consolas" panose="020B0609020204030204" pitchFamily="49" charset="0"/>
                 <a:cs typeface="Courier New" pitchFamily="49" charset="0"/>
               </a:rPr>
-              <a:t>for (double </a:t>
-            </a:r>
-            <a:r>
-              <a:rPr lang="en-US" sz="1600" dirty="0" smtClean="0">
+              <a:t>::abs(z) &lt; 2.0 &amp;&amp; n++ &lt; </a:t>
+            </a:r>
+            <a:r>
+              <a:rPr lang="en-US" sz="1600" dirty="0" err="1">
                 <a:latin typeface="Consolas" panose="020B0609020204030204" pitchFamily="49" charset="0"/>
                 <a:cs typeface="Courier New" pitchFamily="49" charset="0"/>
               </a:rPr>
-              <a:t>y </a:t>
+              <a:t>max_n</a:t>
             </a:r>
             <a:r>
               <a:rPr lang="en-US" sz="1600" dirty="0">
                 <a:latin typeface="Consolas" panose="020B0609020204030204" pitchFamily="49" charset="0"/>
                 <a:cs typeface="Courier New" pitchFamily="49" charset="0"/>
               </a:rPr>
-              <a:t>= -1.8; </a:t>
-            </a:r>
-            <a:r>
-              <a:rPr lang="en-US" sz="1600" dirty="0" smtClean="0">
+              <a:t>)</a:t>
+            </a:r>
+          </a:p>
+          <a:p>
+            <a:r>
+              <a:rPr lang="en-US" sz="1600" dirty="0">
                 <a:latin typeface="Consolas" panose="020B0609020204030204" pitchFamily="49" charset="0"/>
                 <a:cs typeface="Courier New" pitchFamily="49" charset="0"/>
               </a:rPr>
-              <a:t>y </a:t>
-            </a:r>
+              <a:t>            z = z*z + c;</a:t>
+            </a:r>
+          </a:p>
+          <a:p>
             <a:r>
               <a:rPr lang="en-US" sz="1600" dirty="0">
                 <a:latin typeface="Consolas" panose="020B0609020204030204" pitchFamily="49" charset="0"/>
                 <a:cs typeface="Courier New" pitchFamily="49" charset="0"/>
               </a:rPr>
-              <a:t>&lt; 1.8; </a:t>
-            </a:r>
-            <a:r>
-              <a:rPr lang="en-US" sz="1600" dirty="0" smtClean="0">
+              <a:t>        </a:t>
+            </a:r>
+            <a:r>
+              <a:rPr lang="en-US" sz="1600" dirty="0" err="1">
                 <a:latin typeface="Consolas" panose="020B0609020204030204" pitchFamily="49" charset="0"/>
                 <a:cs typeface="Courier New" pitchFamily="49" charset="0"/>
               </a:rPr>
-              <a:t>y </a:t>
+              <a:t>std</a:t>
             </a:r>
             <a:r>
               <a:rPr lang="en-US" sz="1600" dirty="0">
                 <a:latin typeface="Consolas" panose="020B0609020204030204" pitchFamily="49" charset="0"/>
                 <a:cs typeface="Courier New" pitchFamily="49" charset="0"/>
               </a:rPr>
-              <a:t>+= 0.001</a:t>
-            </a:r>
-            <a:r>
-              <a:rPr lang="en-US" sz="1600" dirty="0" smtClean="0">
+              <a:t>::</a:t>
+            </a:r>
+            <a:r>
+              <a:rPr lang="en-US" sz="1600" dirty="0" err="1">
                 <a:latin typeface="Consolas" panose="020B0609020204030204" pitchFamily="49" charset="0"/>
                 <a:cs typeface="Courier New" pitchFamily="49" charset="0"/>
               </a:rPr>
-              <a:t>) {</a:t>
-            </a:r>
-            <a:endParaRPr lang="en-US" sz="1600" dirty="0">
-              <a:latin typeface="Consolas" panose="020B0609020204030204" pitchFamily="49" charset="0"/>
-              <a:cs typeface="Courier New" pitchFamily="49" charset="0"/>
-            </a:endParaRPr>
-          </a:p>
-          <a:p>
-            <a:r>
-              <a:rPr lang="en-US" sz="1600" dirty="0" smtClean="0">
+              <a:t>cout</a:t>
+            </a:r>
+            <a:r>
+              <a:rPr lang="en-US" sz="1600" dirty="0">
                 <a:latin typeface="Consolas" panose="020B0609020204030204" pitchFamily="49" charset="0"/>
                 <a:cs typeface="Courier New" pitchFamily="49" charset="0"/>
               </a:rPr>
-              <a:t>        </a:t>
-            </a:r>
-            <a:r>
-              <a:rPr lang="en-US" sz="1600" dirty="0" err="1" smtClean="0">
+              <a:t> &lt;&lt; x &lt;&lt; " " &lt;&lt; y &lt;&lt; " " &lt;&lt; n &lt;&lt; </a:t>
+            </a:r>
+            <a:r>
+              <a:rPr lang="en-US" sz="1600" dirty="0" err="1">
                 <a:latin typeface="Consolas" panose="020B0609020204030204" pitchFamily="49" charset="0"/>
                 <a:cs typeface="Courier New" pitchFamily="49" charset="0"/>
               </a:rPr>
               <a:t>std</a:t>
             </a:r>
             <a:r>
-              <a:rPr lang="en-US" sz="1600" dirty="0" smtClean="0">
+              <a:rPr lang="en-US" sz="1600" dirty="0">
                 <a:latin typeface="Consolas" panose="020B0609020204030204" pitchFamily="49" charset="0"/>
                 <a:cs typeface="Courier New" pitchFamily="49" charset="0"/>
               </a:rPr>
-              <a:t>::complex&lt;double&gt; z(x, y);</a:t>
-            </a:r>
-          </a:p>
-          <a:p>
+              <a:t>::</a:t>
+            </a:r>
+            <a:r>
+              <a:rPr lang="en-US" sz="1600" dirty="0" err="1">
+                <a:latin typeface="Consolas" panose="020B0609020204030204" pitchFamily="49" charset="0"/>
+                <a:cs typeface="Courier New" pitchFamily="49" charset="0"/>
+              </a:rPr>
+              <a:t>endl</a:t>
+            </a:r>
             <a:r>
               <a:rPr lang="en-US" sz="1600" dirty="0">
                 <a:latin typeface="Consolas" panose="020B0609020204030204" pitchFamily="49" charset="0"/>
                 <a:cs typeface="Courier New" pitchFamily="49" charset="0"/>
               </a:rPr>
-              <a:t> </a:t>
-            </a:r>
-            <a:r>
-              <a:rPr lang="en-US" sz="1600" dirty="0" smtClean="0">
+              <a:t>;</a:t>
+            </a:r>
+          </a:p>
+          <a:p>
+            <a:r>
+              <a:rPr lang="en-US" sz="1600" dirty="0">
                 <a:latin typeface="Consolas" panose="020B0609020204030204" pitchFamily="49" charset="0"/>
                 <a:cs typeface="Courier New" pitchFamily="49" charset="0"/>
               </a:rPr>
-              <a:t>       while (</a:t>
-            </a:r>
-            <a:r>
-              <a:rPr lang="en-US" sz="1600" dirty="0" err="1" smtClean="0">
-                <a:latin typeface="Consolas" panose="020B0609020204030204" pitchFamily="49" charset="0"/>
-                <a:cs typeface="Courier New" pitchFamily="49" charset="0"/>
-              </a:rPr>
-              <a:t>std</a:t>
-            </a:r>
-            <a:r>
-              <a:rPr lang="en-US" sz="1600" dirty="0" smtClean="0">
-                <a:latin typeface="Consolas" panose="020B0609020204030204" pitchFamily="49" charset="0"/>
-                <a:cs typeface="Courier New" pitchFamily="49" charset="0"/>
-              </a:rPr>
-              <a:t>::abs(z) &lt; 2.0 &amp;&amp; n++ &lt; </a:t>
-            </a:r>
-            <a:r>
-              <a:rPr lang="en-US" sz="1600" dirty="0" err="1" smtClean="0">
-                <a:latin typeface="Consolas" panose="020B0609020204030204" pitchFamily="49" charset="0"/>
-                <a:cs typeface="Courier New" pitchFamily="49" charset="0"/>
-              </a:rPr>
-              <a:t>max_n</a:t>
-            </a:r>
-            <a:r>
-              <a:rPr lang="en-US" sz="1600" dirty="0" smtClean="0">
-                <a:latin typeface="Consolas" panose="020B0609020204030204" pitchFamily="49" charset="0"/>
-                <a:cs typeface="Courier New" pitchFamily="49" charset="0"/>
-              </a:rPr>
-              <a:t>)</a:t>
-            </a:r>
-          </a:p>
-          <a:p>
-            <a:r>
-              <a:rPr lang="en-US" sz="1600" dirty="0">
-                <a:latin typeface="Consolas" panose="020B0609020204030204" pitchFamily="49" charset="0"/>
-                <a:cs typeface="Courier New" pitchFamily="49" charset="0"/>
-              </a:rPr>
-              <a:t> </a:t>
-            </a:r>
-            <a:r>
-              <a:rPr lang="en-US" sz="1600" dirty="0" smtClean="0">
-                <a:latin typeface="Consolas" panose="020B0609020204030204" pitchFamily="49" charset="0"/>
-                <a:cs typeface="Courier New" pitchFamily="49" charset="0"/>
-              </a:rPr>
-              <a:t>           z = z*z + c;</a:t>
-            </a:r>
-          </a:p>
-          <a:p>
-            <a:r>
-              <a:rPr lang="en-US" sz="1600" dirty="0">
-                <a:latin typeface="Consolas" panose="020B0609020204030204" pitchFamily="49" charset="0"/>
-                <a:cs typeface="Courier New" pitchFamily="49" charset="0"/>
-              </a:rPr>
-              <a:t> </a:t>
-            </a:r>
-            <a:r>
-              <a:rPr lang="en-US" sz="1600" dirty="0" smtClean="0">
-                <a:latin typeface="Consolas" panose="020B0609020204030204" pitchFamily="49" charset="0"/>
-                <a:cs typeface="Courier New" pitchFamily="49" charset="0"/>
-              </a:rPr>
-              <a:t>       </a:t>
-            </a:r>
-            <a:r>
-              <a:rPr lang="en-US" sz="1600" dirty="0" err="1" smtClean="0">
-                <a:latin typeface="Consolas" panose="020B0609020204030204" pitchFamily="49" charset="0"/>
-                <a:cs typeface="Courier New" pitchFamily="49" charset="0"/>
-              </a:rPr>
-              <a:t>std</a:t>
-            </a:r>
-            <a:r>
-              <a:rPr lang="en-US" sz="1600" dirty="0" smtClean="0">
-                <a:latin typeface="Consolas" panose="020B0609020204030204" pitchFamily="49" charset="0"/>
-                <a:cs typeface="Courier New" pitchFamily="49" charset="0"/>
-              </a:rPr>
-              <a:t>::</a:t>
-            </a:r>
-            <a:r>
-              <a:rPr lang="en-US" sz="1600" dirty="0" err="1" smtClean="0">
-                <a:latin typeface="Consolas" panose="020B0609020204030204" pitchFamily="49" charset="0"/>
-                <a:cs typeface="Courier New" pitchFamily="49" charset="0"/>
-              </a:rPr>
-              <a:t>cout</a:t>
-            </a:r>
-            <a:r>
-              <a:rPr lang="en-US" sz="1600" dirty="0" smtClean="0">
-                <a:latin typeface="Consolas" panose="020B0609020204030204" pitchFamily="49" charset="0"/>
-                <a:cs typeface="Courier New" pitchFamily="49" charset="0"/>
-              </a:rPr>
-              <a:t> &lt;&lt; x &lt;&lt; " " &lt;&lt; y &lt;&lt; " " &lt;&lt; n &lt;&lt; </a:t>
-            </a:r>
-            <a:r>
-              <a:rPr lang="en-US" sz="1600" dirty="0" err="1" smtClean="0">
-                <a:latin typeface="Consolas" panose="020B0609020204030204" pitchFamily="49" charset="0"/>
-                <a:cs typeface="Courier New" pitchFamily="49" charset="0"/>
-              </a:rPr>
-              <a:t>std</a:t>
-            </a:r>
-            <a:r>
-              <a:rPr lang="en-US" sz="1600" dirty="0" smtClean="0">
-                <a:latin typeface="Consolas" panose="020B0609020204030204" pitchFamily="49" charset="0"/>
-                <a:cs typeface="Courier New" pitchFamily="49" charset="0"/>
-              </a:rPr>
-              <a:t>::</a:t>
-            </a:r>
-            <a:r>
-              <a:rPr lang="en-US" sz="1600" dirty="0" err="1" smtClean="0">
-                <a:latin typeface="Consolas" panose="020B0609020204030204" pitchFamily="49" charset="0"/>
-                <a:cs typeface="Courier New" pitchFamily="49" charset="0"/>
-              </a:rPr>
-              <a:t>endl</a:t>
-            </a:r>
-            <a:r>
-              <a:rPr lang="en-US" sz="1600" dirty="0" smtClean="0">
-                <a:latin typeface="Consolas" panose="020B0609020204030204" pitchFamily="49" charset="0"/>
-                <a:cs typeface="Courier New" pitchFamily="49" charset="0"/>
-              </a:rPr>
-              <a:t>;</a:t>
-            </a:r>
-          </a:p>
-          <a:p>
-            <a:r>
-              <a:rPr lang="en-US" sz="1600" dirty="0">
-                <a:latin typeface="Consolas" panose="020B0609020204030204" pitchFamily="49" charset="0"/>
-                <a:cs typeface="Courier New" pitchFamily="49" charset="0"/>
-              </a:rPr>
-              <a:t> </a:t>
-            </a:r>
-            <a:r>
-              <a:rPr lang="en-US" sz="1600" dirty="0" smtClean="0">
-                <a:latin typeface="Consolas" panose="020B0609020204030204" pitchFamily="49" charset="0"/>
-                <a:cs typeface="Courier New" pitchFamily="49" charset="0"/>
-              </a:rPr>
-              <a:t>   }</a:t>
+              <a:t>    }</a:t>
             </a:r>
           </a:p>
         </p:txBody>
@@ -23978,16 +23321,15 @@
               <a:t>16384 </a:t>
             </a:r>
             <a:r>
-              <a:rPr lang="en-US" dirty="0" smtClean="0">
+              <a:rPr lang="en-US" dirty="0">
                 <a:sym typeface="Symbol" panose="05050102010706020507" pitchFamily="18" charset="2"/>
               </a:rPr>
               <a:t></a:t>
             </a:r>
             <a:r>
-              <a:rPr lang="en-US" dirty="0" smtClean="0"/>
+              <a:rPr lang="en-US" dirty="0"/>
               <a:t> 16384 array</a:t>
             </a:r>
-            <a:endParaRPr lang="en-US" dirty="0"/>
           </a:p>
         </p:txBody>
       </p:sp>
@@ -24238,14 +23580,13 @@
           <a:lstStyle/>
           <a:p>
             <a:r>
-              <a:rPr lang="en-US" dirty="0" err="1" smtClean="0"/>
+              <a:rPr lang="en-US" dirty="0" err="1"/>
               <a:t>parallel_reduce</a:t>
             </a:r>
             <a:r>
-              <a:rPr lang="en-US" dirty="0" smtClean="0"/>
+              <a:rPr lang="en-US" dirty="0"/>
               <a:t>: simplest form</a:t>
             </a:r>
-            <a:endParaRPr lang="en-US" dirty="0"/>
           </a:p>
         </p:txBody>
       </p:sp>
@@ -24398,19 +23739,51 @@
               <a:rPr lang="en-US" sz="1600" dirty="0">
                 <a:latin typeface="Consolas" panose="020B0609020204030204" pitchFamily="49" charset="0"/>
               </a:rPr>
+              <a:t> main() {</a:t>
+            </a:r>
+          </a:p>
+          <a:p>
+            <a:r>
+              <a:rPr lang="en-US" sz="1600" dirty="0">
+                <a:latin typeface="Consolas" panose="020B0609020204030204" pitchFamily="49" charset="0"/>
+              </a:rPr>
+              <a:t>    </a:t>
+            </a:r>
+            <a:r>
+              <a:rPr lang="en-US" sz="1600" dirty="0" err="1">
+                <a:latin typeface="Consolas" panose="020B0609020204030204" pitchFamily="49" charset="0"/>
+              </a:rPr>
+              <a:t>std</a:t>
+            </a:r>
+            <a:r>
+              <a:rPr lang="en-US" sz="1600" dirty="0">
+                <a:latin typeface="Consolas" panose="020B0609020204030204" pitchFamily="49" charset="0"/>
+              </a:rPr>
+              <a:t>::</a:t>
+            </a:r>
+            <a:r>
+              <a:rPr lang="en-US" sz="1600" dirty="0" err="1">
+                <a:latin typeface="Consolas" panose="020B0609020204030204" pitchFamily="49" charset="0"/>
+              </a:rPr>
+              <a:t>size_t</a:t>
+            </a:r>
+            <a:r>
+              <a:rPr lang="en-US" sz="1600" dirty="0">
+                <a:latin typeface="Consolas" panose="020B0609020204030204" pitchFamily="49" charset="0"/>
+              </a:rPr>
               <a:t> </a:t>
             </a:r>
             <a:r>
-              <a:rPr lang="en-US" sz="1600" dirty="0" smtClean="0">
-                <a:latin typeface="Consolas" panose="020B0609020204030204" pitchFamily="49" charset="0"/>
-              </a:rPr>
-              <a:t>main() </a:t>
+              <a:rPr lang="en-US" sz="1600" dirty="0" err="1">
+                <a:latin typeface="Consolas" panose="020B0609020204030204" pitchFamily="49" charset="0"/>
+              </a:rPr>
+              <a:t>grain_size</a:t>
             </a:r>
             <a:r>
               <a:rPr lang="en-US" sz="1600" dirty="0">
                 <a:latin typeface="Consolas" panose="020B0609020204030204" pitchFamily="49" charset="0"/>
               </a:rPr>
-              <a:t>{</a:t>
+              <a:t> {1000};</a:t>
             </a:r>
           </a:p>
           <a:p>
@@ -24436,79 +23809,26 @@
               <a:rPr lang="en-US" sz="1600" dirty="0" err="1">
                 <a:latin typeface="Consolas" panose="020B0609020204030204" pitchFamily="49" charset="0"/>
               </a:rPr>
-              <a:t>size_t</a:t>
+              <a:t>valarray</a:t>
             </a:r>
             <a:r>
               <a:rPr lang="en-US" sz="1600" dirty="0">
                 <a:latin typeface="Consolas" panose="020B0609020204030204" pitchFamily="49" charset="0"/>
               </a:rPr>
-              <a:t> </a:t>
+              <a:t>&lt;</a:t>
             </a:r>
             <a:r>
               <a:rPr lang="en-US" sz="1600" dirty="0" err="1">
                 <a:latin typeface="Consolas" panose="020B0609020204030204" pitchFamily="49" charset="0"/>
               </a:rPr>
-              <a:t>grain_size</a:t>
+              <a:t>int</a:t>
             </a:r>
             <a:r>
               <a:rPr lang="en-US" sz="1600" dirty="0">
                 <a:latin typeface="Consolas" panose="020B0609020204030204" pitchFamily="49" charset="0"/>
               </a:rPr>
-              <a:t> {1000};</a:t>
-            </a:r>
-          </a:p>
-          <a:p>
-            <a:r>
-              <a:rPr lang="en-US" sz="1600" dirty="0" smtClean="0">
-                <a:latin typeface="Consolas" panose="020B0609020204030204" pitchFamily="49" charset="0"/>
-              </a:rPr>
-              <a:t>    </a:t>
-            </a:r>
-            <a:r>
-              <a:rPr lang="en-US" sz="1600" dirty="0" err="1" smtClean="0">
-                <a:latin typeface="Consolas" panose="020B0609020204030204" pitchFamily="49" charset="0"/>
-              </a:rPr>
-              <a:t>std</a:t>
-            </a:r>
-            <a:r>
-              <a:rPr lang="en-US" sz="1600" dirty="0">
-                <a:latin typeface="Consolas" panose="020B0609020204030204" pitchFamily="49" charset="0"/>
-              </a:rPr>
-              <a:t>::</a:t>
-            </a:r>
-            <a:r>
-              <a:rPr lang="en-US" sz="1600" dirty="0" err="1">
-                <a:latin typeface="Consolas" panose="020B0609020204030204" pitchFamily="49" charset="0"/>
-              </a:rPr>
-              <a:t>valarray</a:t>
-            </a:r>
-            <a:r>
-              <a:rPr lang="en-US" sz="1600" dirty="0">
-                <a:latin typeface="Consolas" panose="020B0609020204030204" pitchFamily="49" charset="0"/>
-              </a:rPr>
-              <a:t>&lt;</a:t>
-            </a:r>
-            <a:r>
-              <a:rPr lang="en-US" sz="1600" dirty="0" err="1">
-                <a:latin typeface="Consolas" panose="020B0609020204030204" pitchFamily="49" charset="0"/>
-              </a:rPr>
-              <a:t>int</a:t>
-            </a:r>
-            <a:r>
-              <a:rPr lang="en-US" sz="1600" dirty="0">
-                <a:latin typeface="Consolas" panose="020B0609020204030204" pitchFamily="49" charset="0"/>
-              </a:rPr>
-              <a:t>&gt; </a:t>
-            </a:r>
-            <a:r>
-              <a:rPr lang="en-US" sz="1600" dirty="0" smtClean="0">
-                <a:latin typeface="Consolas" panose="020B0609020204030204" pitchFamily="49" charset="0"/>
-              </a:rPr>
-              <a:t>data(10000);</a:t>
-            </a:r>
-            <a:endParaRPr lang="en-US" sz="1600" dirty="0">
-              <a:latin typeface="Consolas" panose="020B0609020204030204" pitchFamily="49" charset="0"/>
-            </a:endParaRPr>
+              <a:t>&gt; data(10000);</a:t>
+            </a:r>
           </a:p>
           <a:p>
             <a:r>
@@ -25162,17 +24482,8 @@
               <a:rPr lang="en-US" sz="1600" dirty="0">
                 <a:latin typeface="Consolas" panose="020B0609020204030204" pitchFamily="49" charset="0"/>
               </a:rPr>
-              <a:t> </a:t>
-            </a:r>
-            <a:r>
-              <a:rPr lang="en-US" sz="1600" dirty="0" smtClean="0">
-                <a:latin typeface="Consolas" panose="020B0609020204030204" pitchFamily="49" charset="0"/>
-              </a:rPr>
-              <a:t>   …</a:t>
-            </a:r>
-            <a:endParaRPr lang="en-US" sz="1600" dirty="0">
-              <a:latin typeface="Consolas" panose="020B0609020204030204" pitchFamily="49" charset="0"/>
-            </a:endParaRPr>
+              <a:t>    …</a:t>
+            </a:r>
           </a:p>
           <a:p>
             <a:r>
@@ -25242,11 +24553,11 @@
             <a:lstStyle/>
             <a:p>
               <a:r>
-                <a:rPr lang="en-US" dirty="0" smtClean="0"/>
+                <a:rPr lang="en-US" dirty="0"/>
                 <a:t>reduction of </a:t>
               </a:r>
               <a:r>
-                <a:rPr lang="en-US" dirty="0" err="1" smtClean="0"/>
+                <a:rPr lang="en-US" dirty="0" err="1"/>
                 <a:t>blocked_range</a:t>
               </a:r>
               <a:endParaRPr lang="en-US" dirty="0"/>
@@ -25339,15 +24650,15 @@
             <a:lstStyle/>
             <a:p>
               <a:r>
-                <a:rPr lang="en-US" dirty="0" smtClean="0"/>
+                <a:rPr lang="en-US" dirty="0"/>
                 <a:t>reduction of </a:t>
               </a:r>
               <a:r>
-                <a:rPr lang="en-US" dirty="0" err="1" smtClean="0"/>
+                <a:rPr lang="en-US" dirty="0" err="1"/>
                 <a:t>blocked_range</a:t>
               </a:r>
               <a:r>
-                <a:rPr lang="en-US" dirty="0" smtClean="0"/>
+                <a:rPr lang="en-US" dirty="0"/>
                 <a:t> results</a:t>
               </a:r>
             </a:p>
@@ -25555,10 +24866,9 @@
           <a:lstStyle/>
           <a:p>
             <a:r>
-              <a:rPr lang="en-US" dirty="0" smtClean="0"/>
+              <a:rPr lang="en-US" dirty="0"/>
               <a:t>Introduction &amp; motivation</a:t>
             </a:r>
-            <a:endParaRPr lang="en-US" dirty="0"/>
           </a:p>
         </p:txBody>
       </p:sp>
@@ -25614,13 +24924,6 @@
   <p:clrMapOvr>
     <a:masterClrMapping/>
   </p:clrMapOvr>
-  <p:timing>
-    <p:tnLst>
-      <p:par>
-        <p:cTn id="1" dur="indefinite" restart="never" nodeType="tmRoot"/>
-      </p:par>
-    </p:tnLst>
-  </p:timing>
 </p:sld>
 </file>
 
@@ -25657,14 +24960,13 @@
           <a:lstStyle/>
           <a:p>
             <a:r>
-              <a:rPr lang="en-US" dirty="0" err="1" smtClean="0"/>
+              <a:rPr lang="en-US" dirty="0" err="1"/>
               <a:t>parallel_reduce</a:t>
             </a:r>
             <a:r>
-              <a:rPr lang="en-US" dirty="0" smtClean="0"/>
+              <a:rPr lang="en-US" dirty="0"/>
               <a:t>: class</a:t>
             </a:r>
-            <a:endParaRPr lang="en-US" dirty="0"/>
           </a:p>
         </p:txBody>
       </p:sp>
@@ -25806,30 +25108,15 @@
               <a:rPr lang="en-US" sz="1600" dirty="0">
                 <a:latin typeface="Consolas" panose="020B0609020204030204" pitchFamily="49" charset="0"/>
               </a:rPr>
-              <a:t>        double sum</a:t>
-            </a:r>
-            <a:r>
-              <a:rPr lang="en-US" sz="1600" dirty="0" smtClean="0">
-                <a:latin typeface="Consolas" panose="020B0609020204030204" pitchFamily="49" charset="0"/>
-              </a:rPr>
-              <a:t>_, sum2_;</a:t>
-            </a:r>
-            <a:endParaRPr lang="en-US" sz="1600" dirty="0">
-              <a:latin typeface="Consolas" panose="020B0609020204030204" pitchFamily="49" charset="0"/>
-            </a:endParaRPr>
-          </a:p>
-          <a:p>
-            <a:r>
-              <a:rPr lang="en-US" sz="1600" dirty="0" smtClean="0">
-                <a:latin typeface="Consolas" panose="020B0609020204030204" pitchFamily="49" charset="0"/>
-              </a:rPr>
-              <a:t>public</a:t>
-            </a:r>
+              <a:t>        double sum_, sum2_;</a:t>
+            </a:r>
+          </a:p>
+          <a:p>
             <a:r>
               <a:rPr lang="en-US" sz="1600" dirty="0">
                 <a:latin typeface="Consolas" panose="020B0609020204030204" pitchFamily="49" charset="0"/>
               </a:rPr>
-              <a:t>:</a:t>
+              <a:t>public:</a:t>
             </a:r>
           </a:p>
           <a:p>
@@ -25837,17 +25124,8 @@
               <a:rPr lang="en-US" sz="1600" dirty="0">
                 <a:latin typeface="Consolas" panose="020B0609020204030204" pitchFamily="49" charset="0"/>
               </a:rPr>
-              <a:t>        Stats(Vector* data) : data_ {data}, n_ {data-&gt;size()}, sum_ {0.0}, sum2_ {0.0</a:t>
-            </a:r>
-            <a:r>
-              <a:rPr lang="en-US" sz="1600" dirty="0" smtClean="0">
-                <a:latin typeface="Consolas" panose="020B0609020204030204" pitchFamily="49" charset="0"/>
-              </a:rPr>
-              <a:t>} {}</a:t>
-            </a:r>
-            <a:endParaRPr lang="en-US" sz="1600" dirty="0">
-              <a:latin typeface="Consolas" panose="020B0609020204030204" pitchFamily="49" charset="0"/>
-            </a:endParaRPr>
+              <a:t>        Stats(Vector* data) : data_ {data}, n_ {data-&gt;size()}, sum_ {0.0}, sum2_ {0.0} {}</a:t>
+            </a:r>
           </a:p>
           <a:p>
             <a:r>
@@ -25898,22 +25176,13 @@
           </a:p>
           <a:p>
             <a:r>
-              <a:rPr lang="en-US" sz="1600" b="1" dirty="0" smtClean="0">
-                <a:solidFill>
-                  <a:srgbClr val="C00000"/>
-                </a:solidFill>
-                <a:latin typeface="Consolas" panose="020B0609020204030204" pitchFamily="49" charset="0"/>
-              </a:rPr>
-              <a:t>        void operator</a:t>
-            </a:r>
-            <a:r>
               <a:rPr lang="en-US" sz="1600" b="1" dirty="0">
                 <a:solidFill>
                   <a:srgbClr val="C00000"/>
                 </a:solidFill>
                 <a:latin typeface="Consolas" panose="020B0609020204030204" pitchFamily="49" charset="0"/>
               </a:rPr>
-              <a:t>()(</a:t>
+              <a:t>        void operator()(</a:t>
             </a:r>
             <a:r>
               <a:rPr lang="en-US" sz="1600" b="1" dirty="0" err="1">
@@ -26003,34 +25272,10 @@
                 </a:solidFill>
                 <a:latin typeface="Consolas" panose="020B0609020204030204" pitchFamily="49" charset="0"/>
               </a:rPr>
-              <a:t>&gt;&amp; r) </a:t>
-            </a:r>
-            <a:r>
-              <a:rPr lang="en-US" sz="1600" b="1" dirty="0" smtClean="0">
-                <a:solidFill>
-                  <a:srgbClr val="C00000"/>
-                </a:solidFill>
-                <a:latin typeface="Consolas" panose="020B0609020204030204" pitchFamily="49" charset="0"/>
-              </a:rPr>
-              <a:t>{</a:t>
-            </a:r>
-            <a:endParaRPr lang="en-US" sz="1600" b="1" dirty="0">
-              <a:solidFill>
-                <a:srgbClr val="C00000"/>
-              </a:solidFill>
-              <a:latin typeface="Consolas" panose="020B0609020204030204" pitchFamily="49" charset="0"/>
-            </a:endParaRPr>
-          </a:p>
-          <a:p>
-            <a:r>
-              <a:rPr lang="en-US" sz="1600" b="1" dirty="0" smtClean="0">
-                <a:solidFill>
-                  <a:srgbClr val="C00000"/>
-                </a:solidFill>
-                <a:latin typeface="Consolas" panose="020B0609020204030204" pitchFamily="49" charset="0"/>
-              </a:rPr>
-              <a:t>            </a:t>
-            </a:r>
+              <a:t>&gt;&amp; r) {</a:t>
+            </a:r>
+          </a:p>
+          <a:p>
             <a:r>
               <a:rPr lang="en-US" sz="1600" b="1" dirty="0">
                 <a:solidFill>
@@ -26038,7 +25283,7 @@
                 </a:solidFill>
                 <a:latin typeface="Consolas" panose="020B0609020204030204" pitchFamily="49" charset="0"/>
               </a:rPr>
-              <a:t>for (auto </a:t>
+              <a:t>            for (auto </a:t>
             </a:r>
             <a:r>
               <a:rPr lang="en-US" sz="1600" b="1" dirty="0" err="1">
@@ -26139,16 +25384,7 @@
                 </a:solidFill>
                 <a:latin typeface="Consolas" panose="020B0609020204030204" pitchFamily="49" charset="0"/>
               </a:rPr>
-              <a:t>        </a:t>
-            </a:r>
-            <a:r>
-              <a:rPr lang="en-US" sz="1600" b="1" dirty="0" smtClean="0">
-                <a:solidFill>
-                  <a:srgbClr val="C00000"/>
-                </a:solidFill>
-                <a:latin typeface="Consolas" panose="020B0609020204030204" pitchFamily="49" charset="0"/>
-              </a:rPr>
-              <a:t>        double </a:t>
+              <a:t>                double </a:t>
             </a:r>
             <a:r>
               <a:rPr lang="en-US" sz="1600" b="1" dirty="0" err="1">
@@ -26178,39 +25414,24 @@
               <a:t>i</a:t>
             </a:r>
             <a:r>
-              <a:rPr lang="en-US" sz="1600" b="1" dirty="0" smtClean="0">
-                <a:solidFill>
-                  <a:srgbClr val="C00000"/>
-                </a:solidFill>
-                <a:latin typeface="Consolas" panose="020B0609020204030204" pitchFamily="49" charset="0"/>
-              </a:rPr>
-              <a:t>];</a:t>
-            </a:r>
-            <a:endParaRPr lang="en-US" sz="1600" b="1" dirty="0">
-              <a:solidFill>
-                <a:srgbClr val="C00000"/>
-              </a:solidFill>
-              <a:latin typeface="Consolas" panose="020B0609020204030204" pitchFamily="49" charset="0"/>
-            </a:endParaRPr>
-          </a:p>
-          <a:p>
-            <a:r>
-              <a:rPr lang="en-US" sz="1600" b="1" dirty="0" smtClean="0">
-                <a:solidFill>
-                  <a:srgbClr val="C00000"/>
-                </a:solidFill>
-                <a:latin typeface="Consolas" panose="020B0609020204030204" pitchFamily="49" charset="0"/>
-              </a:rPr>
-              <a:t>                </a:t>
-            </a:r>
-            <a:r>
               <a:rPr lang="en-US" sz="1600" b="1" dirty="0">
                 <a:solidFill>
                   <a:srgbClr val="C00000"/>
                 </a:solidFill>
                 <a:latin typeface="Consolas" panose="020B0609020204030204" pitchFamily="49" charset="0"/>
               </a:rPr>
-              <a:t>sum_ += </a:t>
+              <a:t>];</a:t>
+            </a:r>
+          </a:p>
+          <a:p>
+            <a:r>
+              <a:rPr lang="en-US" sz="1600" b="1" dirty="0">
+                <a:solidFill>
+                  <a:srgbClr val="C00000"/>
+                </a:solidFill>
+                <a:latin typeface="Consolas" panose="020B0609020204030204" pitchFamily="49" charset="0"/>
+              </a:rPr>
+              <a:t>                sum_ += </a:t>
             </a:r>
             <a:r>
               <a:rPr lang="en-US" sz="1600" b="1" dirty="0" err="1">
@@ -26222,39 +25443,24 @@
               <a:t>val</a:t>
             </a:r>
             <a:r>
-              <a:rPr lang="en-US" sz="1600" b="1" dirty="0" smtClean="0">
-                <a:solidFill>
-                  <a:srgbClr val="C00000"/>
-                </a:solidFill>
-                <a:latin typeface="Consolas" panose="020B0609020204030204" pitchFamily="49" charset="0"/>
-              </a:rPr>
-              <a:t>;</a:t>
-            </a:r>
-            <a:endParaRPr lang="en-US" sz="1600" b="1" dirty="0">
-              <a:solidFill>
-                <a:srgbClr val="C00000"/>
-              </a:solidFill>
-              <a:latin typeface="Consolas" panose="020B0609020204030204" pitchFamily="49" charset="0"/>
-            </a:endParaRPr>
-          </a:p>
-          <a:p>
-            <a:r>
-              <a:rPr lang="en-US" sz="1600" b="1" dirty="0" smtClean="0">
-                <a:solidFill>
-                  <a:srgbClr val="C00000"/>
-                </a:solidFill>
-                <a:latin typeface="Consolas" panose="020B0609020204030204" pitchFamily="49" charset="0"/>
-              </a:rPr>
-              <a:t>                </a:t>
-            </a:r>
-            <a:r>
               <a:rPr lang="en-US" sz="1600" b="1" dirty="0">
                 <a:solidFill>
                   <a:srgbClr val="C00000"/>
                 </a:solidFill>
                 <a:latin typeface="Consolas" panose="020B0609020204030204" pitchFamily="49" charset="0"/>
               </a:rPr>
-              <a:t>sum2_ += </a:t>
+              <a:t>;</a:t>
+            </a:r>
+          </a:p>
+          <a:p>
+            <a:r>
+              <a:rPr lang="en-US" sz="1600" b="1" dirty="0">
+                <a:solidFill>
+                  <a:srgbClr val="C00000"/>
+                </a:solidFill>
+                <a:latin typeface="Consolas" panose="020B0609020204030204" pitchFamily="49" charset="0"/>
+              </a:rPr>
+              <a:t>                sum2_ += </a:t>
             </a:r>
             <a:r>
               <a:rPr lang="en-US" sz="1600" b="1" dirty="0" err="1">
@@ -26290,69 +25496,10 @@
                 </a:solidFill>
                 <a:latin typeface="Consolas" panose="020B0609020204030204" pitchFamily="49" charset="0"/>
               </a:rPr>
-              <a:t>; </a:t>
-            </a:r>
-            <a:r>
-              <a:rPr lang="en-US" sz="1600" b="1" dirty="0" smtClean="0">
-                <a:solidFill>
-                  <a:srgbClr val="C00000"/>
-                </a:solidFill>
-                <a:latin typeface="Consolas" panose="020B0609020204030204" pitchFamily="49" charset="0"/>
-              </a:rPr>
-              <a:t>}</a:t>
-            </a:r>
-            <a:endParaRPr lang="en-US" sz="1600" b="1" dirty="0">
-              <a:solidFill>
-                <a:srgbClr val="C00000"/>
-              </a:solidFill>
-              <a:latin typeface="Consolas" panose="020B0609020204030204" pitchFamily="49" charset="0"/>
-            </a:endParaRPr>
-          </a:p>
-          <a:p>
-            <a:r>
-              <a:rPr lang="en-US" sz="1600" b="1" dirty="0" smtClean="0">
-                <a:solidFill>
-                  <a:srgbClr val="C00000"/>
-                </a:solidFill>
-                <a:latin typeface="Consolas" panose="020B0609020204030204" pitchFamily="49" charset="0"/>
-              </a:rPr>
-              <a:t>        }</a:t>
-            </a:r>
-            <a:endParaRPr lang="en-US" sz="1600" b="1" dirty="0">
-              <a:solidFill>
-                <a:srgbClr val="C00000"/>
-              </a:solidFill>
-              <a:latin typeface="Consolas" panose="020B0609020204030204" pitchFamily="49" charset="0"/>
-            </a:endParaRPr>
-          </a:p>
-          <a:p>
-            <a:r>
-              <a:rPr lang="en-US" sz="1600" b="1" dirty="0" smtClean="0">
-                <a:solidFill>
-                  <a:srgbClr val="C00000"/>
-                </a:solidFill>
-                <a:latin typeface="Consolas" panose="020B0609020204030204" pitchFamily="49" charset="0"/>
-              </a:rPr>
-              <a:t>        void join(</a:t>
-            </a:r>
-            <a:r>
-              <a:rPr lang="en-US" sz="1600" b="1" dirty="0" err="1" smtClean="0">
-                <a:solidFill>
-                  <a:srgbClr val="C00000"/>
-                </a:solidFill>
-                <a:latin typeface="Consolas" panose="020B0609020204030204" pitchFamily="49" charset="0"/>
-              </a:rPr>
-              <a:t>const</a:t>
-            </a:r>
-            <a:r>
-              <a:rPr lang="en-US" sz="1600" b="1" dirty="0" smtClean="0">
-                <a:solidFill>
-                  <a:srgbClr val="C00000"/>
-                </a:solidFill>
-                <a:latin typeface="Consolas" panose="020B0609020204030204" pitchFamily="49" charset="0"/>
-              </a:rPr>
-              <a:t> </a:t>
-            </a:r>
+              <a:t>; }</a:t>
+            </a:r>
+          </a:p>
+          <a:p>
             <a:r>
               <a:rPr lang="en-US" sz="1600" b="1" dirty="0">
                 <a:solidFill>
@@ -26360,19 +25507,10 @@
                 </a:solidFill>
                 <a:latin typeface="Consolas" panose="020B0609020204030204" pitchFamily="49" charset="0"/>
               </a:rPr>
-              <a:t>Stats&amp; stats) {</a:t>
-            </a:r>
-          </a:p>
-          <a:p>
-            <a:r>
-              <a:rPr lang="en-US" sz="1600" b="1" dirty="0" smtClean="0">
-                <a:solidFill>
-                  <a:srgbClr val="C00000"/>
-                </a:solidFill>
-                <a:latin typeface="Consolas" panose="020B0609020204030204" pitchFamily="49" charset="0"/>
-              </a:rPr>
-              <a:t>             </a:t>
-            </a:r>
+              <a:t>        }</a:t>
+            </a:r>
+          </a:p>
+          <a:p>
             <a:r>
               <a:rPr lang="en-US" sz="1600" b="1" dirty="0">
                 <a:solidFill>
@@ -26380,7 +25518,7 @@
                 </a:solidFill>
                 <a:latin typeface="Consolas" panose="020B0609020204030204" pitchFamily="49" charset="0"/>
               </a:rPr>
-              <a:t>sum_ += </a:t>
+              <a:t>        void join(</a:t>
             </a:r>
             <a:r>
               <a:rPr lang="en-US" sz="1600" b="1" dirty="0" err="1">
@@ -26389,7 +25527,7 @@
                 </a:solidFill>
                 <a:latin typeface="Consolas" panose="020B0609020204030204" pitchFamily="49" charset="0"/>
               </a:rPr>
-              <a:t>stats.sum</a:t>
+              <a:t>const</a:t>
             </a:r>
             <a:r>
               <a:rPr lang="en-US" sz="1600" b="1" dirty="0">
@@ -26398,19 +25536,10 @@
                 </a:solidFill>
                 <a:latin typeface="Consolas" panose="020B0609020204030204" pitchFamily="49" charset="0"/>
               </a:rPr>
-              <a:t>_;</a:t>
-            </a:r>
-          </a:p>
-          <a:p>
-            <a:r>
-              <a:rPr lang="en-US" sz="1600" b="1" dirty="0" smtClean="0">
-                <a:solidFill>
-                  <a:srgbClr val="C00000"/>
-                </a:solidFill>
-                <a:latin typeface="Consolas" panose="020B0609020204030204" pitchFamily="49" charset="0"/>
-              </a:rPr>
-              <a:t>             </a:t>
-            </a:r>
+              <a:t> Stats&amp; stats) {</a:t>
+            </a:r>
+          </a:p>
+          <a:p>
             <a:r>
               <a:rPr lang="en-US" sz="1600" b="1" dirty="0">
                 <a:solidFill>
@@ -26418,38 +25547,87 @@
                 </a:solidFill>
                 <a:latin typeface="Consolas" panose="020B0609020204030204" pitchFamily="49" charset="0"/>
               </a:rPr>
-              <a:t>sum2_ += stats.sum2_;</a:t>
-            </a:r>
-          </a:p>
-          <a:p>
-            <a:r>
-              <a:rPr lang="en-US" sz="1600" b="1" dirty="0" smtClean="0">
+              <a:t>             sum_ += </a:t>
+            </a:r>
+            <a:r>
+              <a:rPr lang="en-US" sz="1600" b="1" dirty="0" err="1">
                 <a:solidFill>
                   <a:srgbClr val="C00000"/>
                 </a:solidFill>
                 <a:latin typeface="Consolas" panose="020B0609020204030204" pitchFamily="49" charset="0"/>
               </a:rPr>
+              <a:t>stats.sum</a:t>
+            </a:r>
+            <a:r>
+              <a:rPr lang="en-US" sz="1600" b="1" dirty="0">
+                <a:solidFill>
+                  <a:srgbClr val="C00000"/>
+                </a:solidFill>
+                <a:latin typeface="Consolas" panose="020B0609020204030204" pitchFamily="49" charset="0"/>
+              </a:rPr>
+              <a:t>_;</a:t>
+            </a:r>
+          </a:p>
+          <a:p>
+            <a:r>
+              <a:rPr lang="en-US" sz="1600" b="1" dirty="0">
+                <a:solidFill>
+                  <a:srgbClr val="C00000"/>
+                </a:solidFill>
+                <a:latin typeface="Consolas" panose="020B0609020204030204" pitchFamily="49" charset="0"/>
+              </a:rPr>
+              <a:t>             sum2_ += stats.sum2_;</a:t>
+            </a:r>
+          </a:p>
+          <a:p>
+            <a:r>
+              <a:rPr lang="en-US" sz="1600" b="1" dirty="0">
+                <a:solidFill>
+                  <a:srgbClr val="C00000"/>
+                </a:solidFill>
+                <a:latin typeface="Consolas" panose="020B0609020204030204" pitchFamily="49" charset="0"/>
+              </a:rPr>
               <a:t>        }</a:t>
             </a:r>
-            <a:endParaRPr lang="en-US" sz="1600" b="1" dirty="0">
-              <a:solidFill>
-                <a:srgbClr val="C00000"/>
-              </a:solidFill>
-              <a:latin typeface="Consolas" panose="020B0609020204030204" pitchFamily="49" charset="0"/>
-            </a:endParaRPr>
-          </a:p>
-          <a:p>
-            <a:r>
-              <a:rPr lang="en-US" sz="1600" dirty="0" smtClean="0">
+          </a:p>
+          <a:p>
+            <a:r>
+              <a:rPr lang="en-US" sz="1600" dirty="0">
+                <a:latin typeface="Consolas" panose="020B0609020204030204" pitchFamily="49" charset="0"/>
+              </a:rPr>
+              <a:t>        double mean() </a:t>
+            </a:r>
+            <a:r>
+              <a:rPr lang="en-US" sz="1600" dirty="0" err="1">
+                <a:latin typeface="Consolas" panose="020B0609020204030204" pitchFamily="49" charset="0"/>
+              </a:rPr>
+              <a:t>const</a:t>
+            </a:r>
+            <a:r>
+              <a:rPr lang="en-US" sz="1600" dirty="0">
+                <a:latin typeface="Consolas" panose="020B0609020204030204" pitchFamily="49" charset="0"/>
+              </a:rPr>
+              <a:t> { return sum_/n_; }</a:t>
+            </a:r>
+          </a:p>
+          <a:p>
+            <a:r>
+              <a:rPr lang="en-US" sz="1600" dirty="0">
                 <a:latin typeface="Consolas" panose="020B0609020204030204" pitchFamily="49" charset="0"/>
               </a:rPr>
               <a:t>        double </a:t>
             </a:r>
             <a:r>
+              <a:rPr lang="en-US" sz="1600" dirty="0" err="1">
+                <a:latin typeface="Consolas" panose="020B0609020204030204" pitchFamily="49" charset="0"/>
+              </a:rPr>
+              <a:t>stddev</a:t>
+            </a:r>
+            <a:r>
               <a:rPr lang="en-US" sz="1600" dirty="0">
                 <a:latin typeface="Consolas" panose="020B0609020204030204" pitchFamily="49" charset="0"/>
               </a:rPr>
-              <a:t>mean() </a:t>
+              <a:t>() </a:t>
             </a:r>
             <a:r>
               <a:rPr lang="en-US" sz="1600" dirty="0" err="1">
@@ -26461,7 +25639,7 @@
               <a:rPr lang="en-US" sz="1600" dirty="0">
                 <a:latin typeface="Consolas" panose="020B0609020204030204" pitchFamily="49" charset="0"/>
               </a:rPr>
-              <a:t> { return sum_/n_; }</a:t>
+              <a:t> {…};</a:t>
             </a:r>
           </a:p>
           <a:p>
@@ -26469,46 +25647,8 @@
               <a:rPr lang="en-US" sz="1600" dirty="0">
                 <a:latin typeface="Consolas" panose="020B0609020204030204" pitchFamily="49" charset="0"/>
               </a:rPr>
-              <a:t>        double </a:t>
-            </a:r>
-            <a:r>
-              <a:rPr lang="en-US" sz="1600" dirty="0" err="1">
-                <a:latin typeface="Consolas" panose="020B0609020204030204" pitchFamily="49" charset="0"/>
-              </a:rPr>
-              <a:t>stddev</a:t>
-            </a:r>
-            <a:r>
-              <a:rPr lang="en-US" sz="1600" dirty="0">
-                <a:latin typeface="Consolas" panose="020B0609020204030204" pitchFamily="49" charset="0"/>
-              </a:rPr>
-              <a:t>() </a:t>
-            </a:r>
-            <a:r>
-              <a:rPr lang="en-US" sz="1600" dirty="0" err="1" smtClean="0">
-                <a:latin typeface="Consolas" panose="020B0609020204030204" pitchFamily="49" charset="0"/>
-              </a:rPr>
-              <a:t>const</a:t>
-            </a:r>
-            <a:r>
-              <a:rPr lang="en-US" sz="1600" dirty="0" smtClean="0">
-                <a:latin typeface="Consolas" panose="020B0609020204030204" pitchFamily="49" charset="0"/>
-              </a:rPr>
-              <a:t> {…};</a:t>
-            </a:r>
-            <a:endParaRPr lang="en-US" sz="1600" dirty="0">
-              <a:latin typeface="Consolas" panose="020B0609020204030204" pitchFamily="49" charset="0"/>
-            </a:endParaRPr>
-          </a:p>
-          <a:p>
-            <a:r>
-              <a:rPr lang="en-US" sz="1600" dirty="0" smtClean="0">
-                <a:latin typeface="Consolas" panose="020B0609020204030204" pitchFamily="49" charset="0"/>
-              </a:rPr>
               <a:t>};</a:t>
             </a:r>
-            <a:endParaRPr lang="en-US" sz="1600" dirty="0">
-              <a:latin typeface="Consolas" panose="020B0609020204030204" pitchFamily="49" charset="0"/>
-            </a:endParaRPr>
           </a:p>
         </p:txBody>
       </p:sp>
@@ -26544,7 +25684,7 @@
           <a:lstStyle/>
           <a:p>
             <a:r>
-              <a:rPr lang="en-US" sz="1600" dirty="0" smtClean="0">
+              <a:rPr lang="en-US" sz="1600" dirty="0">
                 <a:latin typeface="Consolas" panose="020B0609020204030204" pitchFamily="49" charset="0"/>
               </a:rPr>
               <a:t>…</a:t>
@@ -26552,7 +25692,7 @@
           </a:p>
           <a:p>
             <a:r>
-              <a:rPr lang="en-US" sz="1600" dirty="0" smtClean="0">
+              <a:rPr lang="en-US" sz="1600" dirty="0">
                 <a:latin typeface="Consolas" panose="020B0609020204030204" pitchFamily="49" charset="0"/>
               </a:rPr>
               <a:t>Vector data = …; </a:t>
@@ -26560,22 +25700,10 @@
           </a:p>
           <a:p>
             <a:r>
-              <a:rPr lang="en-US" sz="1600" dirty="0" smtClean="0">
-                <a:latin typeface="Consolas" panose="020B0609020204030204" pitchFamily="49" charset="0"/>
-              </a:rPr>
-              <a:t>Stats </a:t>
-            </a:r>
-            <a:r>
               <a:rPr lang="en-US" sz="1600" dirty="0">
                 <a:latin typeface="Consolas" panose="020B0609020204030204" pitchFamily="49" charset="0"/>
               </a:rPr>
-              <a:t>stats(&amp;data</a:t>
-            </a:r>
-            <a:r>
-              <a:rPr lang="en-US" sz="1600" dirty="0" smtClean="0">
-                <a:latin typeface="Consolas" panose="020B0609020204030204" pitchFamily="49" charset="0"/>
-              </a:rPr>
-              <a:t>);</a:t>
+              <a:t>Stats stats(&amp;data);</a:t>
             </a:r>
           </a:p>
           <a:p>
@@ -26622,7 +25750,7 @@
               <a:t>size_t</a:t>
             </a:r>
             <a:r>
-              <a:rPr lang="en-US" sz="1600" dirty="0" smtClean="0">
+              <a:rPr lang="en-US" sz="1600" dirty="0">
                 <a:latin typeface="Consolas" panose="020B0609020204030204" pitchFamily="49" charset="0"/>
               </a:rPr>
               <a:t>&gt; ranges(</a:t>
@@ -26633,13 +25761,7 @@
               <a:rPr lang="en-US" sz="1600" dirty="0">
                 <a:latin typeface="Consolas" panose="020B0609020204030204" pitchFamily="49" charset="0"/>
               </a:rPr>
-              <a:t> </a:t>
-            </a:r>
-            <a:r>
-              <a:rPr lang="en-US" sz="1600" dirty="0" smtClean="0">
-                <a:latin typeface="Consolas" panose="020B0609020204030204" pitchFamily="49" charset="0"/>
-              </a:rPr>
-              <a:t>   0ul, </a:t>
+              <a:t>    0ul, </a:t>
             </a:r>
             <a:r>
               <a:rPr lang="en-US" sz="1600" dirty="0" err="1">
@@ -26654,21 +25776,10 @@
               <a:t>(), </a:t>
             </a:r>
             <a:r>
-              <a:rPr lang="en-US" sz="1600" dirty="0" err="1" smtClean="0">
+              <a:rPr lang="en-US" sz="1600" dirty="0" err="1">
                 <a:latin typeface="Consolas" panose="020B0609020204030204" pitchFamily="49" charset="0"/>
               </a:rPr>
               <a:t>grain_size</a:t>
-            </a:r>
-            <a:endParaRPr lang="en-US" sz="1600" dirty="0" smtClean="0">
-              <a:latin typeface="Consolas" panose="020B0609020204030204" pitchFamily="49" charset="0"/>
-            </a:endParaRPr>
-          </a:p>
-          <a:p>
-            <a:r>
-              <a:rPr lang="en-US" sz="1600" dirty="0" smtClean="0">
-                <a:latin typeface="Consolas" panose="020B0609020204030204" pitchFamily="49" charset="0"/>
-              </a:rPr>
-              <a:t>);</a:t>
             </a:r>
             <a:endParaRPr lang="en-US" sz="1600" dirty="0">
               <a:latin typeface="Consolas" panose="020B0609020204030204" pitchFamily="49" charset="0"/>
@@ -26676,7 +25787,15 @@
           </a:p>
           <a:p>
             <a:r>
-              <a:rPr lang="en-US" sz="1600" dirty="0" err="1" smtClean="0">
+              <a:rPr lang="en-US" sz="1600" dirty="0">
+                <a:latin typeface="Consolas" panose="020B0609020204030204" pitchFamily="49" charset="0"/>
+              </a:rPr>
+              <a:t>);</a:t>
+            </a:r>
+          </a:p>
+          <a:p>
+            <a:r>
+              <a:rPr lang="en-US" sz="1600" dirty="0" err="1">
                 <a:latin typeface="Consolas" panose="020B0609020204030204" pitchFamily="49" charset="0"/>
               </a:rPr>
               <a:t>tbb</a:t>
@@ -26688,63 +25807,51 @@
               <a:t>::</a:t>
             </a:r>
             <a:r>
-              <a:rPr lang="en-US" sz="1600" dirty="0" err="1" smtClean="0">
+              <a:rPr lang="en-US" sz="1600" dirty="0" err="1">
                 <a:latin typeface="Consolas" panose="020B0609020204030204" pitchFamily="49" charset="0"/>
               </a:rPr>
               <a:t>parallel_reduce</a:t>
             </a:r>
             <a:r>
-              <a:rPr lang="en-US" sz="1600" dirty="0" smtClean="0">
-                <a:latin typeface="Consolas" panose="020B0609020204030204" pitchFamily="49" charset="0"/>
-              </a:rPr>
-              <a:t>(ranges, </a:t>
-            </a:r>
-            <a:r>
               <a:rPr lang="en-US" sz="1600" dirty="0">
                 <a:latin typeface="Consolas" panose="020B0609020204030204" pitchFamily="49" charset="0"/>
               </a:rPr>
-              <a:t>stats</a:t>
-            </a:r>
-            <a:r>
-              <a:rPr lang="en-US" sz="1600" dirty="0" smtClean="0">
-                <a:latin typeface="Consolas" panose="020B0609020204030204" pitchFamily="49" charset="0"/>
-              </a:rPr>
-              <a:t>);</a:t>
-            </a:r>
-          </a:p>
-          <a:p>
-            <a:r>
-              <a:rPr lang="en-US" sz="1600" dirty="0" err="1" smtClean="0">
+              <a:t>(ranges, stats);</a:t>
+            </a:r>
+          </a:p>
+          <a:p>
+            <a:r>
+              <a:rPr lang="en-US" sz="1600" dirty="0" err="1">
                 <a:latin typeface="Consolas" panose="020B0609020204030204" pitchFamily="49" charset="0"/>
               </a:rPr>
               <a:t>std</a:t>
             </a:r>
             <a:r>
-              <a:rPr lang="en-US" sz="1600" dirty="0" smtClean="0">
+              <a:rPr lang="en-US" sz="1600" dirty="0">
                 <a:latin typeface="Consolas" panose="020B0609020204030204" pitchFamily="49" charset="0"/>
               </a:rPr>
               <a:t>::</a:t>
             </a:r>
             <a:r>
-              <a:rPr lang="en-US" sz="1600" dirty="0" err="1" smtClean="0">
+              <a:rPr lang="en-US" sz="1600" dirty="0" err="1">
                 <a:latin typeface="Consolas" panose="020B0609020204030204" pitchFamily="49" charset="0"/>
               </a:rPr>
               <a:t>cout</a:t>
             </a:r>
             <a:r>
-              <a:rPr lang="en-US" sz="1600" dirty="0" smtClean="0">
+              <a:rPr lang="en-US" sz="1600" dirty="0">
                 <a:latin typeface="Consolas" panose="020B0609020204030204" pitchFamily="49" charset="0"/>
               </a:rPr>
               <a:t> &lt;&lt; </a:t>
             </a:r>
             <a:r>
-              <a:rPr lang="en-US" sz="1600" dirty="0" err="1" smtClean="0">
+              <a:rPr lang="en-US" sz="1600" dirty="0" err="1">
                 <a:latin typeface="Consolas" panose="020B0609020204030204" pitchFamily="49" charset="0"/>
               </a:rPr>
               <a:t>stats.mean</a:t>
             </a:r>
             <a:r>
-              <a:rPr lang="en-US" sz="1600" dirty="0" smtClean="0">
+              <a:rPr lang="en-US" sz="1600" dirty="0">
                 <a:latin typeface="Consolas" panose="020B0609020204030204" pitchFamily="49" charset="0"/>
               </a:rPr>
               <a:t>();</a:t>
@@ -26752,14 +25859,11 @@
           </a:p>
           <a:p>
             <a:r>
-              <a:rPr lang="en-US" sz="1600" dirty="0" smtClean="0">
+              <a:rPr lang="en-US" sz="1600" dirty="0">
                 <a:latin typeface="Consolas" panose="020B0609020204030204" pitchFamily="49" charset="0"/>
               </a:rPr>
               <a:t>…</a:t>
             </a:r>
-            <a:endParaRPr lang="en-US" sz="1600" dirty="0">
-              <a:latin typeface="Consolas" panose="020B0609020204030204" pitchFamily="49" charset="0"/>
-            </a:endParaRPr>
           </a:p>
         </p:txBody>
       </p:sp>
@@ -26887,7 +25991,7 @@
           <a:lstStyle/>
           <a:p>
             <a:r>
-              <a:rPr lang="en-US" dirty="0" err="1" smtClean="0"/>
+              <a:rPr lang="en-US" dirty="0" err="1"/>
               <a:t>parallel_do</a:t>
             </a:r>
             <a:endParaRPr lang="en-US" dirty="0"/>
@@ -26910,36 +26014,32 @@
           <a:lstStyle/>
           <a:p>
             <a:r>
-              <a:rPr lang="en-US" dirty="0" smtClean="0"/>
+              <a:rPr lang="en-US" dirty="0"/>
               <a:t>Create processing class</a:t>
             </a:r>
           </a:p>
           <a:p>
             <a:pPr lvl="1"/>
             <a:r>
-              <a:rPr lang="en-US" dirty="0" smtClean="0"/>
+              <a:rPr lang="en-US" dirty="0"/>
               <a:t>overloads </a:t>
             </a:r>
             <a:r>
-              <a:rPr lang="en-US" dirty="0" smtClean="0">
+              <a:rPr lang="en-US" dirty="0">
                 <a:latin typeface="Consolas" panose="020B0609020204030204" pitchFamily="49" charset="0"/>
               </a:rPr>
               <a:t>operator()</a:t>
             </a:r>
             <a:r>
-              <a:rPr lang="en-US" dirty="0" smtClean="0"/>
+              <a:rPr lang="en-US" dirty="0"/>
               <a:t> to process single item</a:t>
             </a:r>
           </a:p>
           <a:p>
             <a:pPr lvl="1"/>
             <a:r>
-              <a:rPr lang="en-US" dirty="0" smtClean="0"/>
-              <a:t>optionally add new items to process </a:t>
-            </a:r>
-            <a:r>
               <a:rPr lang="en-US" dirty="0"/>
-              <a:t>(using </a:t>
+              <a:t>optionally add new items to process (using </a:t>
             </a:r>
             <a:r>
               <a:rPr lang="en-US" dirty="0" err="1">
@@ -26954,79 +26054,78 @@
               <a:t>::</a:t>
             </a:r>
             <a:r>
-              <a:rPr lang="en-US" dirty="0" err="1" smtClean="0">
+              <a:rPr lang="en-US" dirty="0" err="1">
                 <a:latin typeface="Consolas" panose="020B0609020204030204" pitchFamily="49" charset="0"/>
               </a:rPr>
               <a:t>parallel_do_feeder</a:t>
             </a:r>
             <a:r>
-              <a:rPr lang="en-US" dirty="0" smtClean="0"/>
+              <a:rPr lang="en-US" dirty="0"/>
               <a:t>)</a:t>
             </a:r>
           </a:p>
           <a:p>
             <a:r>
-              <a:rPr lang="en-US" dirty="0" smtClean="0"/>
+              <a:rPr lang="en-US" dirty="0"/>
               <a:t>Create STL </a:t>
             </a:r>
             <a:r>
-              <a:rPr lang="en-US" dirty="0" err="1" smtClean="0"/>
+              <a:rPr lang="en-US" dirty="0" err="1"/>
               <a:t>std</a:t>
             </a:r>
             <a:r>
-              <a:rPr lang="en-US" dirty="0" smtClean="0"/>
+              <a:rPr lang="en-US" dirty="0"/>
               <a:t>::vector with initial items</a:t>
             </a:r>
           </a:p>
           <a:p>
             <a:r>
-              <a:rPr lang="en-US" dirty="0" smtClean="0"/>
+              <a:rPr lang="en-US" dirty="0"/>
               <a:t>Call </a:t>
             </a:r>
             <a:r>
-              <a:rPr lang="en-US" dirty="0" err="1" smtClean="0">
+              <a:rPr lang="en-US" dirty="0" err="1">
                 <a:latin typeface="Consolas" panose="020B0609020204030204" pitchFamily="49" charset="0"/>
               </a:rPr>
               <a:t>tbb</a:t>
             </a:r>
             <a:r>
-              <a:rPr lang="en-US" dirty="0" smtClean="0">
+              <a:rPr lang="en-US" dirty="0">
                 <a:latin typeface="Consolas" panose="020B0609020204030204" pitchFamily="49" charset="0"/>
               </a:rPr>
               <a:t>::</a:t>
             </a:r>
             <a:r>
-              <a:rPr lang="en-US" dirty="0" err="1" smtClean="0">
+              <a:rPr lang="en-US" dirty="0" err="1">
                 <a:latin typeface="Consolas" panose="020B0609020204030204" pitchFamily="49" charset="0"/>
               </a:rPr>
               <a:t>parallel_do</a:t>
             </a:r>
             <a:r>
-              <a:rPr lang="en-US" dirty="0" smtClean="0"/>
+              <a:rPr lang="en-US" dirty="0"/>
               <a:t> with</a:t>
             </a:r>
           </a:p>
           <a:p>
             <a:pPr lvl="1"/>
             <a:r>
-              <a:rPr lang="en-US" dirty="0" smtClean="0"/>
+              <a:rPr lang="en-US" dirty="0"/>
               <a:t>begin of iterator for initial items to process</a:t>
             </a:r>
           </a:p>
           <a:p>
             <a:pPr lvl="1"/>
             <a:r>
-              <a:rPr lang="en-US" dirty="0" smtClean="0"/>
+              <a:rPr lang="en-US" dirty="0"/>
               <a:t>end of iterator for items to process</a:t>
             </a:r>
           </a:p>
           <a:p>
             <a:pPr lvl="1"/>
             <a:r>
-              <a:rPr lang="en-US" dirty="0" smtClean="0"/>
+              <a:rPr lang="en-US" dirty="0"/>
               <a:t>processing class instance</a:t>
             </a:r>
-            <a:endParaRPr lang="en-US" dirty="0"/>
           </a:p>
         </p:txBody>
       </p:sp>
@@ -27089,33 +26188,32 @@
           <a:lstStyle/>
           <a:p>
             <a:r>
-              <a:rPr lang="en-US" sz="2400" dirty="0" smtClean="0"/>
+              <a:rPr lang="en-US" sz="2400" dirty="0"/>
               <a:t>Note: items in the vector </a:t>
             </a:r>
             <a:r>
-              <a:rPr lang="en-US" sz="2400" i="1" dirty="0" smtClean="0"/>
+              <a:rPr lang="en-US" sz="2400" i="1" dirty="0"/>
               <a:t>can</a:t>
             </a:r>
             <a:r>
-              <a:rPr lang="en-US" sz="2400" dirty="0" smtClean="0"/>
+              <a:rPr lang="en-US" sz="2400" dirty="0"/>
               <a:t> be computed,</a:t>
             </a:r>
             <a:br>
-              <a:rPr lang="en-US" sz="2400" dirty="0" smtClean="0"/>
+              <a:rPr lang="en-US" sz="2400" dirty="0"/>
             </a:br>
             <a:r>
-              <a:rPr lang="en-US" sz="2400" dirty="0" smtClean="0"/>
+              <a:rPr lang="en-US" sz="2400" dirty="0"/>
               <a:t>           </a:t>
             </a:r>
             <a:r>
-              <a:rPr lang="en-US" sz="2400" i="1" dirty="0" smtClean="0"/>
+              <a:rPr lang="en-US" sz="2400" i="1" dirty="0"/>
               <a:t>no</a:t>
             </a:r>
             <a:r>
-              <a:rPr lang="en-US" sz="2400" dirty="0" smtClean="0"/>
+              <a:rPr lang="en-US" sz="2400" dirty="0"/>
               <a:t> dependencies on other items</a:t>
             </a:r>
-            <a:endParaRPr lang="en-US" sz="2400" dirty="0"/>
           </a:p>
         </p:txBody>
       </p:sp>
@@ -27549,10 +26647,9 @@
           <a:lstStyle/>
           <a:p>
             <a:r>
-              <a:rPr lang="en-US" dirty="0" smtClean="0"/>
+              <a:rPr lang="en-US" dirty="0"/>
               <a:t>no pipeline</a:t>
             </a:r>
-            <a:endParaRPr lang="en-US" dirty="0"/>
           </a:p>
         </p:txBody>
       </p:sp>
@@ -27691,14 +26788,13 @@
           <a:lstStyle/>
           <a:p>
             <a:r>
-              <a:rPr lang="en-US" dirty="0" smtClean="0"/>
+              <a:rPr lang="en-US" dirty="0"/>
               <a:t>CPU</a:t>
             </a:r>
             <a:r>
-              <a:rPr lang="en-US" baseline="-25000" dirty="0" smtClean="0"/>
+              <a:rPr lang="en-US" baseline="-25000" dirty="0"/>
               <a:t>0</a:t>
             </a:r>
-            <a:endParaRPr lang="en-US" baseline="-25000" dirty="0"/>
           </a:p>
         </p:txBody>
       </p:sp>
@@ -27733,17 +26829,12 @@
           <a:p>
             <a:r>
               <a:rPr lang="en-US" dirty="0"/>
-              <a:t>G</a:t>
-            </a:r>
-            <a:r>
-              <a:rPr lang="en-US" dirty="0" smtClean="0"/>
-              <a:t>PU</a:t>
-            </a:r>
-            <a:r>
-              <a:rPr lang="en-US" baseline="-25000" dirty="0" smtClean="0"/>
+              <a:t>GPU</a:t>
+            </a:r>
+            <a:r>
+              <a:rPr lang="en-US" baseline="-25000" dirty="0"/>
               <a:t>0</a:t>
             </a:r>
-            <a:endParaRPr lang="en-US" baseline="-25000" dirty="0"/>
           </a:p>
         </p:txBody>
       </p:sp>
@@ -27775,14 +26866,13 @@
           <a:lstStyle/>
           <a:p>
             <a:r>
-              <a:rPr lang="en-US" dirty="0" smtClean="0"/>
+              <a:rPr lang="en-US" dirty="0"/>
               <a:t>CPU</a:t>
             </a:r>
             <a:r>
-              <a:rPr lang="en-US" baseline="-25000" dirty="0" smtClean="0"/>
+              <a:rPr lang="en-US" baseline="-25000" dirty="0"/>
               <a:t>1</a:t>
             </a:r>
-            <a:endParaRPr lang="en-US" baseline="-25000" dirty="0"/>
           </a:p>
         </p:txBody>
       </p:sp>
@@ -27814,14 +26904,13 @@
           <a:lstStyle/>
           <a:p>
             <a:r>
-              <a:rPr lang="en-US" dirty="0" smtClean="0"/>
+              <a:rPr lang="en-US" dirty="0"/>
               <a:t>CPU</a:t>
             </a:r>
             <a:r>
-              <a:rPr lang="en-US" baseline="-25000" dirty="0" smtClean="0"/>
+              <a:rPr lang="en-US" baseline="-25000" dirty="0"/>
               <a:t>2</a:t>
             </a:r>
-            <a:endParaRPr lang="en-US" baseline="-25000" dirty="0"/>
           </a:p>
         </p:txBody>
       </p:sp>
@@ -27853,14 +26942,13 @@
           <a:lstStyle/>
           <a:p>
             <a:r>
-              <a:rPr lang="en-US" dirty="0" smtClean="0"/>
+              <a:rPr lang="en-US" dirty="0"/>
               <a:t>GPU</a:t>
             </a:r>
             <a:r>
-              <a:rPr lang="en-US" baseline="-25000" dirty="0" smtClean="0"/>
+              <a:rPr lang="en-US" baseline="-25000" dirty="0"/>
               <a:t>2</a:t>
             </a:r>
-            <a:endParaRPr lang="en-US" baseline="-25000" dirty="0"/>
           </a:p>
         </p:txBody>
       </p:sp>
@@ -28184,17 +27272,12 @@
           <a:p>
             <a:r>
               <a:rPr lang="en-US" dirty="0"/>
-              <a:t>G</a:t>
-            </a:r>
-            <a:r>
-              <a:rPr lang="en-US" dirty="0" smtClean="0"/>
-              <a:t>PU</a:t>
-            </a:r>
-            <a:r>
-              <a:rPr lang="en-US" baseline="-25000" dirty="0" smtClean="0"/>
+              <a:t>GPU</a:t>
+            </a:r>
+            <a:r>
+              <a:rPr lang="en-US" baseline="-25000" dirty="0"/>
               <a:t>0</a:t>
             </a:r>
-            <a:endParaRPr lang="en-US" baseline="-25000" dirty="0"/>
           </a:p>
         </p:txBody>
       </p:sp>
@@ -28228,14 +27311,13 @@
           <a:lstStyle/>
           <a:p>
             <a:r>
-              <a:rPr lang="en-US" dirty="0" smtClean="0"/>
+              <a:rPr lang="en-US" dirty="0"/>
               <a:t>GPU</a:t>
             </a:r>
             <a:r>
-              <a:rPr lang="en-US" baseline="-25000" dirty="0" smtClean="0"/>
+              <a:rPr lang="en-US" baseline="-25000" dirty="0"/>
               <a:t>1</a:t>
             </a:r>
-            <a:endParaRPr lang="en-US" baseline="-25000" dirty="0"/>
           </a:p>
         </p:txBody>
       </p:sp>
@@ -28269,14 +27351,13 @@
           <a:lstStyle/>
           <a:p>
             <a:r>
-              <a:rPr lang="en-US" dirty="0" smtClean="0"/>
+              <a:rPr lang="en-US" dirty="0"/>
               <a:t>CPU</a:t>
             </a:r>
             <a:r>
-              <a:rPr lang="en-US" baseline="-25000" dirty="0" smtClean="0"/>
+              <a:rPr lang="en-US" baseline="-25000" dirty="0"/>
               <a:t>0</a:t>
             </a:r>
-            <a:endParaRPr lang="en-US" baseline="-25000" dirty="0"/>
           </a:p>
         </p:txBody>
       </p:sp>
@@ -28316,17 +27397,16 @@
           <a:lstStyle/>
           <a:p>
             <a:r>
-              <a:rPr lang="en-US" sz="2400" dirty="0" smtClean="0"/>
+              <a:rPr lang="en-US" sz="2400" dirty="0"/>
               <a:t>Both GPU and CPU are</a:t>
             </a:r>
             <a:br>
-              <a:rPr lang="en-US" sz="2400" dirty="0" smtClean="0"/>
+              <a:rPr lang="en-US" sz="2400" dirty="0"/>
             </a:br>
             <a:r>
-              <a:rPr lang="en-US" sz="2400" dirty="0" smtClean="0"/>
+              <a:rPr lang="en-US" sz="2400" dirty="0"/>
               <a:t>idle half of the time</a:t>
             </a:r>
-            <a:endParaRPr lang="en-US" sz="2400" dirty="0"/>
           </a:p>
         </p:txBody>
       </p:sp>
@@ -28833,10 +27913,9 @@
           <a:lstStyle/>
           <a:p>
             <a:r>
-              <a:rPr lang="en-US" dirty="0" smtClean="0"/>
+              <a:rPr lang="en-US" dirty="0"/>
               <a:t>pipeline</a:t>
             </a:r>
-            <a:endParaRPr lang="en-US" dirty="0"/>
           </a:p>
         </p:txBody>
       </p:sp>
@@ -28975,14 +28054,13 @@
           <a:lstStyle/>
           <a:p>
             <a:r>
-              <a:rPr lang="en-US" dirty="0" smtClean="0"/>
+              <a:rPr lang="en-US" dirty="0"/>
               <a:t>CPU</a:t>
             </a:r>
             <a:r>
-              <a:rPr lang="en-US" baseline="-25000" dirty="0" smtClean="0"/>
+              <a:rPr lang="en-US" baseline="-25000" dirty="0"/>
               <a:t>0</a:t>
             </a:r>
-            <a:endParaRPr lang="en-US" baseline="-25000" dirty="0"/>
           </a:p>
         </p:txBody>
       </p:sp>
@@ -29017,17 +28095,12 @@
           <a:p>
             <a:r>
               <a:rPr lang="en-US" dirty="0"/>
-              <a:t>G</a:t>
-            </a:r>
-            <a:r>
-              <a:rPr lang="en-US" dirty="0" smtClean="0"/>
-              <a:t>PU</a:t>
-            </a:r>
-            <a:r>
-              <a:rPr lang="en-US" baseline="-25000" dirty="0" smtClean="0"/>
+              <a:t>GPU</a:t>
+            </a:r>
+            <a:r>
+              <a:rPr lang="en-US" baseline="-25000" dirty="0"/>
               <a:t>0</a:t>
             </a:r>
-            <a:endParaRPr lang="en-US" baseline="-25000" dirty="0"/>
           </a:p>
         </p:txBody>
       </p:sp>
@@ -29059,14 +28132,13 @@
           <a:lstStyle/>
           <a:p>
             <a:r>
-              <a:rPr lang="en-US" dirty="0" smtClean="0"/>
+              <a:rPr lang="en-US" dirty="0"/>
               <a:t>CPU</a:t>
             </a:r>
             <a:r>
-              <a:rPr lang="en-US" baseline="-25000" dirty="0" smtClean="0"/>
+              <a:rPr lang="en-US" baseline="-25000" dirty="0"/>
               <a:t>1</a:t>
             </a:r>
-            <a:endParaRPr lang="en-US" baseline="-25000" dirty="0"/>
           </a:p>
         </p:txBody>
       </p:sp>
@@ -29098,14 +28170,13 @@
           <a:lstStyle/>
           <a:p>
             <a:r>
-              <a:rPr lang="en-US" dirty="0" smtClean="0"/>
+              <a:rPr lang="en-US" dirty="0"/>
               <a:t>CPU</a:t>
             </a:r>
             <a:r>
-              <a:rPr lang="en-US" baseline="-25000" dirty="0" smtClean="0"/>
+              <a:rPr lang="en-US" baseline="-25000" dirty="0"/>
               <a:t>2</a:t>
             </a:r>
-            <a:endParaRPr lang="en-US" baseline="-25000" dirty="0"/>
           </a:p>
         </p:txBody>
       </p:sp>
@@ -29137,14 +28208,13 @@
           <a:lstStyle/>
           <a:p>
             <a:r>
-              <a:rPr lang="en-US" dirty="0" smtClean="0"/>
+              <a:rPr lang="en-US" dirty="0"/>
               <a:t>GPU</a:t>
             </a:r>
             <a:r>
-              <a:rPr lang="en-US" baseline="-25000" dirty="0" smtClean="0"/>
+              <a:rPr lang="en-US" baseline="-25000" dirty="0"/>
               <a:t>2</a:t>
             </a:r>
-            <a:endParaRPr lang="en-US" baseline="-25000" dirty="0"/>
           </a:p>
         </p:txBody>
       </p:sp>
@@ -29338,17 +28408,12 @@
           <a:p>
             <a:r>
               <a:rPr lang="en-US" dirty="0"/>
-              <a:t>G</a:t>
-            </a:r>
-            <a:r>
-              <a:rPr lang="en-US" dirty="0" smtClean="0"/>
-              <a:t>PU</a:t>
-            </a:r>
-            <a:r>
-              <a:rPr lang="en-US" baseline="-25000" dirty="0" smtClean="0"/>
+              <a:t>GPU</a:t>
+            </a:r>
+            <a:r>
+              <a:rPr lang="en-US" baseline="-25000" dirty="0"/>
               <a:t>0</a:t>
             </a:r>
-            <a:endParaRPr lang="en-US" baseline="-25000" dirty="0"/>
           </a:p>
         </p:txBody>
       </p:sp>
@@ -29382,14 +28447,13 @@
           <a:lstStyle/>
           <a:p>
             <a:r>
-              <a:rPr lang="en-US" dirty="0" smtClean="0"/>
+              <a:rPr lang="en-US" dirty="0"/>
               <a:t>GPU</a:t>
             </a:r>
             <a:r>
-              <a:rPr lang="en-US" baseline="-25000" dirty="0" smtClean="0"/>
+              <a:rPr lang="en-US" baseline="-25000" dirty="0"/>
               <a:t>1</a:t>
             </a:r>
-            <a:endParaRPr lang="en-US" baseline="-25000" dirty="0"/>
           </a:p>
         </p:txBody>
       </p:sp>
@@ -29499,44 +28563,43 @@
           <a:lstStyle/>
           <a:p>
             <a:r>
-              <a:rPr lang="en-US" sz="2400" dirty="0" smtClean="0"/>
+              <a:rPr lang="en-US" sz="2400" dirty="0"/>
               <a:t>Pipeline start-up</a:t>
             </a:r>
             <a:br>
-              <a:rPr lang="en-US" sz="2400" dirty="0" smtClean="0"/>
+              <a:rPr lang="en-US" sz="2400" dirty="0"/>
             </a:br>
             <a:r>
-              <a:rPr lang="en-US" sz="2400" dirty="0" smtClean="0"/>
+              <a:rPr lang="en-US" sz="2400" dirty="0"/>
               <a:t>         </a:t>
             </a:r>
             <a:r>
-              <a:rPr lang="en-US" sz="2400" dirty="0" smtClean="0">
+              <a:rPr lang="en-US" sz="2400" dirty="0">
                 <a:sym typeface="Symbol" panose="05050102010706020507" pitchFamily="18" charset="2"/>
               </a:rPr>
               <a:t></a:t>
             </a:r>
             <a:r>
-              <a:rPr lang="en-US" sz="2400" dirty="0" smtClean="0"/>
+              <a:rPr lang="en-US" sz="2400" dirty="0"/>
               <a:t> pipeline full</a:t>
             </a:r>
             <a:br>
-              <a:rPr lang="en-US" sz="2400" dirty="0" smtClean="0"/>
+              <a:rPr lang="en-US" sz="2400" dirty="0"/>
             </a:br>
             <a:r>
-              <a:rPr lang="en-US" sz="2400" dirty="0" smtClean="0"/>
+              <a:rPr lang="en-US" sz="2400" dirty="0"/>
               <a:t>               </a:t>
             </a:r>
             <a:r>
-              <a:rPr lang="en-US" sz="2400" dirty="0" smtClean="0">
+              <a:rPr lang="en-US" sz="2400" dirty="0">
                 <a:sym typeface="Symbol" panose="05050102010706020507" pitchFamily="18" charset="2"/>
               </a:rPr>
               <a:t></a:t>
             </a:r>
             <a:r>
-              <a:rPr lang="en-US" sz="2400" dirty="0" smtClean="0"/>
+              <a:rPr lang="en-US" sz="2400" dirty="0"/>
               <a:t> pipeline wind-down</a:t>
             </a:r>
-            <a:endParaRPr lang="en-US" sz="2400" dirty="0"/>
           </a:p>
         </p:txBody>
       </p:sp>
@@ -29879,10 +28942,9 @@
           <a:lstStyle/>
           <a:p>
             <a:r>
-              <a:rPr lang="en-US" dirty="0" smtClean="0"/>
+              <a:rPr lang="en-US" dirty="0"/>
               <a:t>TBB tasks</a:t>
             </a:r>
-            <a:endParaRPr lang="en-US" dirty="0"/>
           </a:p>
         </p:txBody>
       </p:sp>
@@ -29938,13 +29000,6 @@
   <p:clrMapOvr>
     <a:masterClrMapping/>
   </p:clrMapOvr>
-  <p:timing>
-    <p:tnLst>
-      <p:par>
-        <p:cTn id="1" dur="indefinite" restart="never" nodeType="tmRoot"/>
-      </p:par>
-    </p:tnLst>
-  </p:timing>
 </p:sld>
 </file>
 
@@ -29981,10 +29036,9 @@
           <a:lstStyle/>
           <a:p>
             <a:r>
-              <a:rPr lang="en-US" dirty="0" smtClean="0"/>
+              <a:rPr lang="en-US" dirty="0"/>
               <a:t>Task spawning</a:t>
             </a:r>
-            <a:endParaRPr lang="en-US" dirty="0"/>
           </a:p>
         </p:txBody>
       </p:sp>
@@ -30120,16 +29174,10 @@
           </a:p>
           <a:p>
             <a:r>
-              <a:rPr lang="en-US" sz="1600" dirty="0" smtClean="0">
-                <a:latin typeface="Consolas" panose="020B0609020204030204" pitchFamily="49" charset="0"/>
-              </a:rPr>
-              <a:t>public</a:t>
-            </a:r>
-            <a:r>
               <a:rPr lang="en-US" sz="1600" dirty="0">
                 <a:latin typeface="Consolas" panose="020B0609020204030204" pitchFamily="49" charset="0"/>
               </a:rPr>
-              <a:t>:</a:t>
+              <a:t>public:</a:t>
             </a:r>
           </a:p>
           <a:p>
@@ -30178,16 +29226,7 @@
                 </a:solidFill>
                 <a:latin typeface="Consolas" panose="020B0609020204030204" pitchFamily="49" charset="0"/>
               </a:rPr>
-              <a:t>::task* execute() </a:t>
-            </a:r>
-            <a:r>
-              <a:rPr lang="en-US" sz="1600" b="1" dirty="0" smtClean="0">
-                <a:solidFill>
-                  <a:srgbClr val="C00000"/>
-                </a:solidFill>
-                <a:latin typeface="Consolas" panose="020B0609020204030204" pitchFamily="49" charset="0"/>
-              </a:rPr>
-              <a:t>{</a:t>
+              <a:t>::task* execute() {</a:t>
             </a:r>
           </a:p>
           <a:p>
@@ -30195,13 +29234,7 @@
               <a:rPr lang="en-US" sz="1600" dirty="0">
                 <a:latin typeface="Consolas" panose="020B0609020204030204" pitchFamily="49" charset="0"/>
               </a:rPr>
-              <a:t> </a:t>
-            </a:r>
-            <a:r>
-              <a:rPr lang="en-US" sz="1600" dirty="0" smtClean="0">
-                <a:latin typeface="Consolas" panose="020B0609020204030204" pitchFamily="49" charset="0"/>
-              </a:rPr>
-              <a:t>           if (n_ &lt; 2) {</a:t>
+              <a:t>            if (n_ &lt; 2) {</a:t>
             </a:r>
           </a:p>
           <a:p>
@@ -30209,13 +29242,7 @@
               <a:rPr lang="en-US" sz="1600" dirty="0">
                 <a:latin typeface="Consolas" panose="020B0609020204030204" pitchFamily="49" charset="0"/>
               </a:rPr>
-              <a:t> </a:t>
-            </a:r>
-            <a:r>
-              <a:rPr lang="en-US" sz="1600" dirty="0" smtClean="0">
-                <a:latin typeface="Consolas" panose="020B0609020204030204" pitchFamily="49" charset="0"/>
-              </a:rPr>
-              <a:t>               *result_ = 1;</a:t>
+              <a:t>                *result_ = 1;</a:t>
             </a:r>
           </a:p>
           <a:p>
@@ -30223,30 +29250,15 @@
               <a:rPr lang="en-US" sz="1600" dirty="0">
                 <a:latin typeface="Consolas" panose="020B0609020204030204" pitchFamily="49" charset="0"/>
               </a:rPr>
-              <a:t> </a:t>
-            </a:r>
-            <a:r>
-              <a:rPr lang="en-US" sz="1600" dirty="0" smtClean="0">
-                <a:latin typeface="Consolas" panose="020B0609020204030204" pitchFamily="49" charset="0"/>
-              </a:rPr>
-              <a:t>           } else {</a:t>
-            </a:r>
-            <a:endParaRPr lang="en-US" sz="1600" dirty="0">
-              <a:latin typeface="Consolas" panose="020B0609020204030204" pitchFamily="49" charset="0"/>
-            </a:endParaRPr>
-          </a:p>
-          <a:p>
-            <a:r>
-              <a:rPr lang="en-US" sz="1600" dirty="0" smtClean="0">
-                <a:latin typeface="Consolas" panose="020B0609020204030204" pitchFamily="49" charset="0"/>
-              </a:rPr>
-              <a:t>                long </a:t>
-            </a:r>
+              <a:t>            } else {</a:t>
+            </a:r>
+          </a:p>
+          <a:p>
             <a:r>
               <a:rPr lang="en-US" sz="1600" dirty="0">
                 <a:latin typeface="Consolas" panose="020B0609020204030204" pitchFamily="49" charset="0"/>
               </a:rPr>
-              <a:t>result_n_1;</a:t>
+              <a:t>                long result_n_1;</a:t>
             </a:r>
           </a:p>
           <a:p>
@@ -30254,19 +29266,7 @@
               <a:rPr lang="en-US" sz="1600" dirty="0">
                 <a:latin typeface="Consolas" panose="020B0609020204030204" pitchFamily="49" charset="0"/>
               </a:rPr>
-              <a:t>  </a:t>
-            </a:r>
-            <a:r>
-              <a:rPr lang="en-US" sz="1600" dirty="0" smtClean="0">
-                <a:latin typeface="Consolas" panose="020B0609020204030204" pitchFamily="49" charset="0"/>
-              </a:rPr>
-              <a:t>              long </a:t>
-            </a:r>
-            <a:r>
-              <a:rPr lang="en-US" sz="1600" dirty="0">
-                <a:latin typeface="Consolas" panose="020B0609020204030204" pitchFamily="49" charset="0"/>
-              </a:rPr>
-              <a:t>result_n_2;</a:t>
+              <a:t>                long result_n_2;</a:t>
             </a:r>
           </a:p>
           <a:p>
@@ -30277,19 +29277,10 @@
                 </a:solidFill>
                 <a:latin typeface="Consolas" panose="020B0609020204030204" pitchFamily="49" charset="0"/>
               </a:rPr>
-              <a:t>      </a:t>
-            </a:r>
-            <a:r>
-              <a:rPr lang="en-US" sz="1600" b="1" dirty="0" smtClean="0">
-                <a:solidFill>
-                  <a:srgbClr val="C00000"/>
-                </a:solidFill>
-                <a:latin typeface="Consolas" panose="020B0609020204030204" pitchFamily="49" charset="0"/>
-              </a:rPr>
-              <a:t>          </a:t>
-            </a:r>
-            <a:r>
-              <a:rPr lang="en-US" sz="1600" b="1" dirty="0" err="1" smtClean="0">
+              <a:t>                </a:t>
+            </a:r>
+            <a:r>
+              <a:rPr lang="en-US" sz="1600" b="1" dirty="0" err="1">
                 <a:solidFill>
                   <a:srgbClr val="C00000"/>
                 </a:solidFill>
@@ -30327,31 +29318,13 @@
           </a:p>
           <a:p>
             <a:r>
-              <a:rPr lang="en-US" sz="1600" b="1" dirty="0" smtClean="0">
-                <a:solidFill>
-                  <a:srgbClr val="C00000"/>
-                </a:solidFill>
-                <a:latin typeface="Consolas" panose="020B0609020204030204" pitchFamily="49" charset="0"/>
-              </a:rPr>
-              <a:t>                </a:t>
-            </a:r>
-            <a:r>
-              <a:rPr lang="en-US" sz="1600" b="1" dirty="0" err="1" smtClean="0">
-                <a:solidFill>
-                  <a:srgbClr val="C00000"/>
-                </a:solidFill>
-                <a:latin typeface="Consolas" panose="020B0609020204030204" pitchFamily="49" charset="0"/>
-              </a:rPr>
-              <a:t>list.push_back</a:t>
-            </a:r>
-            <a:r>
               <a:rPr lang="en-US" sz="1600" b="1" dirty="0">
                 <a:solidFill>
                   <a:srgbClr val="C00000"/>
                 </a:solidFill>
                 <a:latin typeface="Consolas" panose="020B0609020204030204" pitchFamily="49" charset="0"/>
               </a:rPr>
-              <a:t>(*new(</a:t>
+              <a:t>                </a:t>
             </a:r>
             <a:r>
               <a:rPr lang="en-US" sz="1600" b="1" dirty="0" err="1">
@@ -30360,7 +29333,7 @@
                 </a:solidFill>
                 <a:latin typeface="Consolas" panose="020B0609020204030204" pitchFamily="49" charset="0"/>
               </a:rPr>
-              <a:t>allocate_child</a:t>
+              <a:t>list.push_back</a:t>
             </a:r>
             <a:r>
               <a:rPr lang="en-US" sz="1600" b="1" dirty="0">
@@ -30369,7 +29342,7 @@
                 </a:solidFill>
                 <a:latin typeface="Consolas" panose="020B0609020204030204" pitchFamily="49" charset="0"/>
               </a:rPr>
-              <a:t>()) </a:t>
+              <a:t>(*new(</a:t>
             </a:r>
             <a:r>
               <a:rPr lang="en-US" sz="1600" b="1" dirty="0" err="1">
@@ -30378,7 +29351,7 @@
                 </a:solidFill>
                 <a:latin typeface="Consolas" panose="020B0609020204030204" pitchFamily="49" charset="0"/>
               </a:rPr>
-              <a:t>FibTask</a:t>
+              <a:t>allocate_child</a:t>
             </a:r>
             <a:r>
               <a:rPr lang="en-US" sz="1600" b="1" dirty="0">
@@ -30387,27 +29360,16 @@
                 </a:solidFill>
                 <a:latin typeface="Consolas" panose="020B0609020204030204" pitchFamily="49" charset="0"/>
               </a:rPr>
-              <a:t>(n_ - 1, &amp;result_n_1));</a:t>
-            </a:r>
-          </a:p>
-          <a:p>
-            <a:r>
-              <a:rPr lang="en-US" sz="1600" b="1" dirty="0" smtClean="0">
+              <a:t>()) </a:t>
+            </a:r>
+            <a:r>
+              <a:rPr lang="en-US" sz="1600" b="1" dirty="0" err="1">
                 <a:solidFill>
                   <a:srgbClr val="C00000"/>
                 </a:solidFill>
                 <a:latin typeface="Consolas" panose="020B0609020204030204" pitchFamily="49" charset="0"/>
               </a:rPr>
-              <a:t>                </a:t>
-            </a:r>
-            <a:r>
-              <a:rPr lang="en-US" sz="1600" b="1" dirty="0" err="1" smtClean="0">
-                <a:solidFill>
-                  <a:srgbClr val="C00000"/>
-                </a:solidFill>
-                <a:latin typeface="Consolas" panose="020B0609020204030204" pitchFamily="49" charset="0"/>
-              </a:rPr>
-              <a:t>list.push_back</a:t>
+              <a:t>FibTask</a:t>
             </a:r>
             <a:r>
               <a:rPr lang="en-US" sz="1600" b="1" dirty="0">
@@ -30416,7 +29378,18 @@
                 </a:solidFill>
                 <a:latin typeface="Consolas" panose="020B0609020204030204" pitchFamily="49" charset="0"/>
               </a:rPr>
-              <a:t>(*new(</a:t>
+              <a:t>(n_ - 1, &amp;result_n_1));</a:t>
+            </a:r>
+          </a:p>
+          <a:p>
+            <a:r>
+              <a:rPr lang="en-US" sz="1600" b="1" dirty="0">
+                <a:solidFill>
+                  <a:srgbClr val="C00000"/>
+                </a:solidFill>
+                <a:latin typeface="Consolas" panose="020B0609020204030204" pitchFamily="49" charset="0"/>
+              </a:rPr>
+              <a:t>                </a:t>
             </a:r>
             <a:r>
               <a:rPr lang="en-US" sz="1600" b="1" dirty="0" err="1">
@@ -30425,7 +29398,7 @@
                 </a:solidFill>
                 <a:latin typeface="Consolas" panose="020B0609020204030204" pitchFamily="49" charset="0"/>
               </a:rPr>
-              <a:t>allocate_child</a:t>
+              <a:t>list.push_back</a:t>
             </a:r>
             <a:r>
               <a:rPr lang="en-US" sz="1600" b="1" dirty="0">
@@ -30434,7 +29407,7 @@
                 </a:solidFill>
                 <a:latin typeface="Consolas" panose="020B0609020204030204" pitchFamily="49" charset="0"/>
               </a:rPr>
-              <a:t>()) </a:t>
+              <a:t>(*new(</a:t>
             </a:r>
             <a:r>
               <a:rPr lang="en-US" sz="1600" b="1" dirty="0" err="1">
@@ -30443,7 +29416,7 @@
                 </a:solidFill>
                 <a:latin typeface="Consolas" panose="020B0609020204030204" pitchFamily="49" charset="0"/>
               </a:rPr>
-              <a:t>FibTask</a:t>
+              <a:t>allocate_child</a:t>
             </a:r>
             <a:r>
               <a:rPr lang="en-US" sz="1600" b="1" dirty="0">
@@ -30452,36 +29425,16 @@
                 </a:solidFill>
                 <a:latin typeface="Consolas" panose="020B0609020204030204" pitchFamily="49" charset="0"/>
               </a:rPr>
-              <a:t>(n_ - 2, &amp;result_n_2));</a:t>
-            </a:r>
-          </a:p>
-          <a:p>
-            <a:r>
-              <a:rPr lang="en-US" sz="1600" b="1" dirty="0" smtClean="0">
+              <a:t>()) </a:t>
+            </a:r>
+            <a:r>
+              <a:rPr lang="en-US" sz="1600" b="1" dirty="0" err="1">
                 <a:solidFill>
                   <a:srgbClr val="C00000"/>
                 </a:solidFill>
                 <a:latin typeface="Consolas" panose="020B0609020204030204" pitchFamily="49" charset="0"/>
               </a:rPr>
-              <a:t>                </a:t>
-            </a:r>
-            <a:r>
-              <a:rPr lang="en-US" sz="1600" b="1" dirty="0" err="1" smtClean="0">
-                <a:solidFill>
-                  <a:srgbClr val="C00000"/>
-                </a:solidFill>
-                <a:latin typeface="Consolas" panose="020B0609020204030204" pitchFamily="49" charset="0"/>
-              </a:rPr>
-              <a:t>set_ref_count</a:t>
-            </a:r>
-            <a:r>
-              <a:rPr lang="en-US" sz="1600" b="1" dirty="0" smtClean="0">
-                <a:solidFill>
-                  <a:srgbClr val="C00000"/>
-                </a:solidFill>
-                <a:latin typeface="Consolas" panose="020B0609020204030204" pitchFamily="49" charset="0"/>
-              </a:rPr>
-              <a:t>(3</a:t>
+              <a:t>FibTask</a:t>
             </a:r>
             <a:r>
               <a:rPr lang="en-US" sz="1600" b="1" dirty="0">
@@ -30490,37 +29443,10 @@
                 </a:solidFill>
                 <a:latin typeface="Consolas" panose="020B0609020204030204" pitchFamily="49" charset="0"/>
               </a:rPr>
-              <a:t>);</a:t>
-            </a:r>
-          </a:p>
-          <a:p>
-            <a:r>
-              <a:rPr lang="en-US" sz="1600" b="1" dirty="0" smtClean="0">
-                <a:solidFill>
-                  <a:srgbClr val="C00000"/>
-                </a:solidFill>
-                <a:latin typeface="Consolas" panose="020B0609020204030204" pitchFamily="49" charset="0"/>
-              </a:rPr>
-              <a:t>                </a:t>
-            </a:r>
-            <a:r>
-              <a:rPr lang="en-US" sz="1600" b="1" dirty="0" err="1" smtClean="0">
-                <a:solidFill>
-                  <a:srgbClr val="C00000"/>
-                </a:solidFill>
-                <a:latin typeface="Consolas" panose="020B0609020204030204" pitchFamily="49" charset="0"/>
-              </a:rPr>
-              <a:t>spawn_and_wait_for_all</a:t>
-            </a:r>
-            <a:r>
-              <a:rPr lang="en-US" sz="1600" b="1" dirty="0" smtClean="0">
-                <a:solidFill>
-                  <a:srgbClr val="C00000"/>
-                </a:solidFill>
-                <a:latin typeface="Consolas" panose="020B0609020204030204" pitchFamily="49" charset="0"/>
-              </a:rPr>
-              <a:t>(list</a:t>
-            </a:r>
+              <a:t>(n_ - 2, &amp;result_n_2));</a:t>
+            </a:r>
+          </a:p>
+          <a:p>
             <a:r>
               <a:rPr lang="en-US" sz="1600" b="1" dirty="0">
                 <a:solidFill>
@@ -30528,7 +29454,54 @@
                 </a:solidFill>
                 <a:latin typeface="Consolas" panose="020B0609020204030204" pitchFamily="49" charset="0"/>
               </a:rPr>
-              <a:t>);</a:t>
+              <a:t>                </a:t>
+            </a:r>
+            <a:r>
+              <a:rPr lang="en-US" sz="1600" b="1" dirty="0" err="1">
+                <a:solidFill>
+                  <a:srgbClr val="C00000"/>
+                </a:solidFill>
+                <a:latin typeface="Consolas" panose="020B0609020204030204" pitchFamily="49" charset="0"/>
+              </a:rPr>
+              <a:t>set_ref_count</a:t>
+            </a:r>
+            <a:r>
+              <a:rPr lang="en-US" sz="1600" b="1" dirty="0">
+                <a:solidFill>
+                  <a:srgbClr val="C00000"/>
+                </a:solidFill>
+                <a:latin typeface="Consolas" panose="020B0609020204030204" pitchFamily="49" charset="0"/>
+              </a:rPr>
+              <a:t>(3);</a:t>
+            </a:r>
+          </a:p>
+          <a:p>
+            <a:r>
+              <a:rPr lang="en-US" sz="1600" b="1" dirty="0">
+                <a:solidFill>
+                  <a:srgbClr val="C00000"/>
+                </a:solidFill>
+                <a:latin typeface="Consolas" panose="020B0609020204030204" pitchFamily="49" charset="0"/>
+              </a:rPr>
+              <a:t>                </a:t>
+            </a:r>
+            <a:r>
+              <a:rPr lang="en-US" sz="1600" b="1" dirty="0" err="1">
+                <a:solidFill>
+                  <a:srgbClr val="C00000"/>
+                </a:solidFill>
+                <a:latin typeface="Consolas" panose="020B0609020204030204" pitchFamily="49" charset="0"/>
+              </a:rPr>
+              <a:t>spawn_and_wait_for_all</a:t>
+            </a:r>
+            <a:r>
+              <a:rPr lang="en-US" sz="1600" b="1" dirty="0">
+                <a:solidFill>
+                  <a:srgbClr val="C00000"/>
+                </a:solidFill>
+                <a:latin typeface="Consolas" panose="020B0609020204030204" pitchFamily="49" charset="0"/>
+              </a:rPr>
+              <a:t>(list);</a:t>
             </a:r>
           </a:p>
           <a:p>
@@ -30536,47 +29509,20 @@
               <a:rPr lang="en-US" sz="1600" dirty="0">
                 <a:latin typeface="Consolas" panose="020B0609020204030204" pitchFamily="49" charset="0"/>
               </a:rPr>
-              <a:t>  </a:t>
-            </a:r>
-            <a:r>
-              <a:rPr lang="en-US" sz="1600" dirty="0" smtClean="0">
-                <a:latin typeface="Consolas" panose="020B0609020204030204" pitchFamily="49" charset="0"/>
-              </a:rPr>
-              <a:t>              *</a:t>
-            </a:r>
+              <a:t>                *result_ = result_n_1 + result_n_2;</a:t>
+            </a:r>
+          </a:p>
+          <a:p>
             <a:r>
               <a:rPr lang="en-US" sz="1600" dirty="0">
                 <a:latin typeface="Consolas" panose="020B0609020204030204" pitchFamily="49" charset="0"/>
               </a:rPr>
-              <a:t>result_ = result_n_1 + result_n_2</a:t>
-            </a:r>
-            <a:r>
-              <a:rPr lang="en-US" sz="1600" dirty="0" smtClean="0">
-                <a:latin typeface="Consolas" panose="020B0609020204030204" pitchFamily="49" charset="0"/>
-              </a:rPr>
-              <a:t>;</a:t>
-            </a:r>
-          </a:p>
-          <a:p>
-            <a:r>
-              <a:rPr lang="en-US" sz="1600" dirty="0">
-                <a:latin typeface="Consolas" panose="020B0609020204030204" pitchFamily="49" charset="0"/>
-              </a:rPr>
-              <a:t> </a:t>
-            </a:r>
-            <a:r>
-              <a:rPr lang="en-US" sz="1600" dirty="0" smtClean="0">
-                <a:latin typeface="Consolas" panose="020B0609020204030204" pitchFamily="49" charset="0"/>
-              </a:rPr>
-              <a:t>           }</a:t>
-            </a:r>
-            <a:endParaRPr lang="en-US" sz="1600" dirty="0">
-              <a:latin typeface="Consolas" panose="020B0609020204030204" pitchFamily="49" charset="0"/>
-            </a:endParaRPr>
-          </a:p>
-          <a:p>
-            <a:r>
-              <a:rPr lang="en-US" sz="1600" b="1" dirty="0" smtClean="0">
+              <a:t>            }</a:t>
+            </a:r>
+          </a:p>
+          <a:p>
+            <a:r>
+              <a:rPr lang="en-US" sz="1600" b="1" dirty="0">
                 <a:solidFill>
                   <a:srgbClr val="C00000"/>
                 </a:solidFill>
@@ -30656,22 +29602,13 @@
           <a:lstStyle/>
           <a:p>
             <a:r>
-              <a:rPr lang="en-US" sz="1600" dirty="0" smtClean="0">
+              <a:rPr lang="en-US" sz="1600" dirty="0">
                 <a:latin typeface="Consolas" panose="020B0609020204030204" pitchFamily="49" charset="0"/>
               </a:rPr>
               <a:t>…</a:t>
             </a:r>
           </a:p>
           <a:p>
-            <a:r>
-              <a:rPr lang="en-GB" sz="1600" b="1" dirty="0" smtClean="0">
-                <a:solidFill>
-                  <a:srgbClr val="C00000"/>
-                </a:solidFill>
-                <a:latin typeface="Consolas" panose="020B0609020204030204" pitchFamily="49" charset="0"/>
-              </a:rPr>
-              <a:t>auto </a:t>
-            </a:r>
             <a:r>
               <a:rPr lang="en-GB" sz="1600" b="1" dirty="0">
                 <a:solidFill>
@@ -30679,7 +29616,7 @@
                 </a:solidFill>
                 <a:latin typeface="Consolas" panose="020B0609020204030204" pitchFamily="49" charset="0"/>
               </a:rPr>
-              <a:t>task = new(</a:t>
+              <a:t>auto task = new(</a:t>
             </a:r>
             <a:r>
               <a:rPr lang="en-GB" sz="1600" b="1" dirty="0" err="1">
@@ -30738,7 +29675,7 @@
           </a:p>
           <a:p>
             <a:r>
-              <a:rPr lang="en-GB" sz="1600" b="1" dirty="0" err="1" smtClean="0">
+              <a:rPr lang="en-GB" sz="1600" b="1" dirty="0" err="1">
                 <a:solidFill>
                   <a:srgbClr val="C00000"/>
                 </a:solidFill>
@@ -30771,28 +29708,16 @@
                 </a:solidFill>
                 <a:latin typeface="Consolas" panose="020B0609020204030204" pitchFamily="49" charset="0"/>
               </a:rPr>
-              <a:t>(*task</a:t>
-            </a:r>
-            <a:r>
-              <a:rPr lang="en-GB" sz="1600" b="1" dirty="0" smtClean="0">
-                <a:solidFill>
-                  <a:srgbClr val="C00000"/>
-                </a:solidFill>
-                <a:latin typeface="Consolas" panose="020B0609020204030204" pitchFamily="49" charset="0"/>
-              </a:rPr>
-              <a:t>);</a:t>
-            </a:r>
-          </a:p>
-          <a:p>
-            <a:r>
-              <a:rPr lang="en-US" sz="1600" dirty="0" smtClean="0">
+              <a:t>(*task);</a:t>
+            </a:r>
+          </a:p>
+          <a:p>
+            <a:r>
+              <a:rPr lang="en-US" sz="1600" dirty="0">
                 <a:latin typeface="Consolas" panose="020B0609020204030204" pitchFamily="49" charset="0"/>
               </a:rPr>
               <a:t>…</a:t>
             </a:r>
-            <a:endParaRPr lang="en-US" sz="1600" dirty="0">
-              <a:latin typeface="Consolas" panose="020B0609020204030204" pitchFamily="49" charset="0"/>
-            </a:endParaRPr>
           </a:p>
         </p:txBody>
       </p:sp>
@@ -30832,10 +29757,9 @@
           <a:lstStyle/>
           <a:p>
             <a:r>
-              <a:rPr lang="en-US" dirty="0" smtClean="0"/>
+              <a:rPr lang="en-US" dirty="0"/>
               <a:t>However, task granularity!</a:t>
             </a:r>
-            <a:endParaRPr lang="en-US" dirty="0"/>
           </a:p>
         </p:txBody>
       </p:sp>
@@ -31341,10 +30265,9 @@
           <a:lstStyle/>
           <a:p>
             <a:r>
-              <a:rPr lang="en-US" dirty="0" smtClean="0"/>
+              <a:rPr lang="en-US" dirty="0"/>
               <a:t>Task spawning: granularity</a:t>
             </a:r>
-            <a:endParaRPr lang="en-US" dirty="0"/>
           </a:p>
         </p:txBody>
       </p:sp>
@@ -31480,16 +30403,10 @@
           </a:p>
           <a:p>
             <a:r>
-              <a:rPr lang="en-US" sz="1600" dirty="0" smtClean="0">
-                <a:latin typeface="Consolas" panose="020B0609020204030204" pitchFamily="49" charset="0"/>
-              </a:rPr>
-              <a:t>public</a:t>
-            </a:r>
-            <a:r>
               <a:rPr lang="en-US" sz="1600" dirty="0">
                 <a:latin typeface="Consolas" panose="020B0609020204030204" pitchFamily="49" charset="0"/>
               </a:rPr>
-              <a:t>:</a:t>
+              <a:t>public:</a:t>
             </a:r>
           </a:p>
           <a:p>
@@ -31534,22 +30451,11 @@
           </a:p>
           <a:p>
             <a:r>
-              <a:rPr lang="en-US" sz="1600" dirty="0" smtClean="0">
+              <a:rPr lang="en-US" sz="1600" dirty="0">
                 <a:latin typeface="Consolas" panose="020B0609020204030204" pitchFamily="49" charset="0"/>
               </a:rPr>
               <a:t>            </a:t>
             </a:r>
-            <a:r>
-              <a:rPr lang="en-US" sz="1600" b="1" dirty="0" smtClean="0">
-                <a:solidFill>
-                  <a:srgbClr val="C00000"/>
-                </a:solidFill>
-                <a:latin typeface="Consolas" panose="020B0609020204030204" pitchFamily="49" charset="0"/>
-              </a:rPr>
-              <a:t>if (n_ &lt; 10) {</a:t>
-            </a:r>
-          </a:p>
-          <a:p>
             <a:r>
               <a:rPr lang="en-US" sz="1600" b="1" dirty="0">
                 <a:solidFill>
@@ -31557,34 +30463,7 @@
                 </a:solidFill>
                 <a:latin typeface="Consolas" panose="020B0609020204030204" pitchFamily="49" charset="0"/>
               </a:rPr>
-              <a:t> </a:t>
-            </a:r>
-            <a:r>
-              <a:rPr lang="en-US" sz="1600" b="1" dirty="0" smtClean="0">
-                <a:solidFill>
-                  <a:srgbClr val="C00000"/>
-                </a:solidFill>
-                <a:latin typeface="Consolas" panose="020B0609020204030204" pitchFamily="49" charset="0"/>
-              </a:rPr>
-              <a:t>               *result_ = </a:t>
-            </a:r>
-            <a:r>
-              <a:rPr lang="en-US" sz="1600" b="1" dirty="0" err="1" smtClean="0">
-                <a:solidFill>
-                  <a:srgbClr val="C00000"/>
-                </a:solidFill>
-                <a:latin typeface="Consolas" panose="020B0609020204030204" pitchFamily="49" charset="0"/>
-              </a:rPr>
-              <a:t>sequential_fib</a:t>
-            </a:r>
-            <a:r>
-              <a:rPr lang="en-US" sz="1600" b="1" dirty="0" smtClean="0">
-                <a:solidFill>
-                  <a:srgbClr val="C00000"/>
-                </a:solidFill>
-                <a:latin typeface="Consolas" panose="020B0609020204030204" pitchFamily="49" charset="0"/>
-              </a:rPr>
-              <a:t>(n_);</a:t>
+              <a:t>if (n_ &lt; 10) {</a:t>
             </a:r>
           </a:p>
           <a:p>
@@ -31595,65 +30474,70 @@
                 </a:solidFill>
                 <a:latin typeface="Consolas" panose="020B0609020204030204" pitchFamily="49" charset="0"/>
               </a:rPr>
-              <a:t> </a:t>
-            </a:r>
-            <a:r>
-              <a:rPr lang="en-US" sz="1600" b="1" dirty="0" smtClean="0">
+              <a:t>                *result_ = </a:t>
+            </a:r>
+            <a:r>
+              <a:rPr lang="en-US" sz="1600" b="1" dirty="0" err="1">
                 <a:solidFill>
                   <a:srgbClr val="C00000"/>
                 </a:solidFill>
                 <a:latin typeface="Consolas" panose="020B0609020204030204" pitchFamily="49" charset="0"/>
               </a:rPr>
-              <a:t>           } else {</a:t>
-            </a:r>
-          </a:p>
-          <a:p>
-            <a:r>
-              <a:rPr lang="en-US" sz="1600" dirty="0">
-                <a:latin typeface="Consolas" panose="020B0609020204030204" pitchFamily="49" charset="0"/>
-              </a:rPr>
-              <a:t> </a:t>
-            </a:r>
-            <a:r>
-              <a:rPr lang="en-US" sz="1600" dirty="0" smtClean="0">
-                <a:latin typeface="Consolas" panose="020B0609020204030204" pitchFamily="49" charset="0"/>
-              </a:rPr>
-              <a:t>               …</a:t>
-            </a:r>
-          </a:p>
-          <a:p>
-            <a:r>
-              <a:rPr lang="en-US" sz="1600" dirty="0">
-                <a:latin typeface="Consolas" panose="020B0609020204030204" pitchFamily="49" charset="0"/>
-              </a:rPr>
-              <a:t> </a:t>
-            </a:r>
-            <a:r>
-              <a:rPr lang="en-US" sz="1600" dirty="0" smtClean="0">
-                <a:latin typeface="Consolas" panose="020B0609020204030204" pitchFamily="49" charset="0"/>
-              </a:rPr>
-              <a:t>           </a:t>
-            </a:r>
-            <a:r>
-              <a:rPr lang="en-US" sz="1600" b="1" dirty="0" smtClean="0">
+              <a:t>sequential_fib</a:t>
+            </a:r>
+            <a:r>
+              <a:rPr lang="en-US" sz="1600" b="1" dirty="0">
                 <a:solidFill>
                   <a:srgbClr val="C00000"/>
                 </a:solidFill>
                 <a:latin typeface="Consolas" panose="020B0609020204030204" pitchFamily="49" charset="0"/>
               </a:rPr>
+              <a:t>(n_);</a:t>
+            </a:r>
+          </a:p>
+          <a:p>
+            <a:r>
+              <a:rPr lang="en-US" sz="1600" b="1" dirty="0">
+                <a:solidFill>
+                  <a:srgbClr val="C00000"/>
+                </a:solidFill>
+                <a:latin typeface="Consolas" panose="020B0609020204030204" pitchFamily="49" charset="0"/>
+              </a:rPr>
+              <a:t>            } else {</a:t>
+            </a:r>
+          </a:p>
+          <a:p>
+            <a:r>
+              <a:rPr lang="en-US" sz="1600" dirty="0">
+                <a:latin typeface="Consolas" panose="020B0609020204030204" pitchFamily="49" charset="0"/>
+              </a:rPr>
+              <a:t>                …</a:t>
+            </a:r>
+          </a:p>
+          <a:p>
+            <a:r>
+              <a:rPr lang="en-US" sz="1600" dirty="0">
+                <a:latin typeface="Consolas" panose="020B0609020204030204" pitchFamily="49" charset="0"/>
+              </a:rPr>
+              <a:t>            </a:t>
+            </a:r>
+            <a:r>
+              <a:rPr lang="en-US" sz="1600" b="1" dirty="0">
+                <a:solidFill>
+                  <a:srgbClr val="C00000"/>
+                </a:solidFill>
+                <a:latin typeface="Consolas" panose="020B0609020204030204" pitchFamily="49" charset="0"/>
+              </a:rPr>
               <a:t>}</a:t>
             </a:r>
           </a:p>
           <a:p>
             <a:r>
-              <a:rPr lang="en-US" sz="1600" dirty="0" smtClean="0">
+              <a:rPr lang="en-US" sz="1600" dirty="0">
                 <a:latin typeface="Consolas" panose="020B0609020204030204" pitchFamily="49" charset="0"/>
               </a:rPr>
               <a:t>        }</a:t>
             </a:r>
-            <a:endParaRPr lang="en-US" sz="1600" dirty="0">
-              <a:latin typeface="Consolas" panose="020B0609020204030204" pitchFamily="49" charset="0"/>
-            </a:endParaRPr>
           </a:p>
           <a:p>
             <a:r>
@@ -31675,13 +30559,6 @@
   <p:clrMapOvr>
     <a:masterClrMapping/>
   </p:clrMapOvr>
-  <p:timing>
-    <p:tnLst>
-      <p:par>
-        <p:cTn id="1" dur="indefinite" restart="never" nodeType="tmRoot"/>
-      </p:par>
-    </p:tnLst>
-  </p:timing>
 </p:sld>
 </file>
 
@@ -31718,10 +30595,9 @@
           <a:lstStyle/>
           <a:p>
             <a:r>
-              <a:rPr lang="en-US" dirty="0" smtClean="0"/>
+              <a:rPr lang="en-US" dirty="0"/>
               <a:t>Task spawning: timings</a:t>
             </a:r>
-            <a:endParaRPr lang="en-US" dirty="0"/>
           </a:p>
         </p:txBody>
       </p:sp>
@@ -31843,14 +30719,13 @@
           <a:lstStyle/>
           <a:p>
             <a:r>
-              <a:rPr lang="en-US" i="1" dirty="0" smtClean="0"/>
+              <a:rPr lang="en-US" i="1" dirty="0"/>
               <a:t>n</a:t>
             </a:r>
             <a:r>
-              <a:rPr lang="en-US" dirty="0" smtClean="0"/>
+              <a:rPr lang="en-US" dirty="0"/>
               <a:t> = 50</a:t>
             </a:r>
-            <a:endParaRPr lang="en-US" dirty="0"/>
           </a:p>
         </p:txBody>
       </p:sp>
@@ -32029,13 +30904,8 @@
           <a:p>
             <a:r>
               <a:rPr lang="en-US" dirty="0"/>
-              <a:t>Tree </a:t>
-            </a:r>
-            <a:r>
-              <a:rPr lang="en-US" dirty="0" smtClean="0"/>
-              <a:t>traversal</a:t>
-            </a:r>
-            <a:endParaRPr lang="en-US" dirty="0"/>
+              <a:t>Tree traversal</a:t>
+            </a:r>
           </a:p>
         </p:txBody>
       </p:sp>
@@ -32170,31 +31040,30 @@
           <a:lstStyle/>
           <a:p>
             <a:r>
-              <a:rPr lang="en-US" dirty="0" smtClean="0"/>
+              <a:rPr lang="en-US" dirty="0"/>
               <a:t>dual Intel Xeon </a:t>
             </a:r>
             <a:r>
-              <a:rPr lang="en-US" dirty="0" err="1" smtClean="0"/>
+              <a:rPr lang="en-US" dirty="0" err="1"/>
               <a:t>skylake</a:t>
             </a:r>
             <a:endParaRPr lang="en-US" dirty="0"/>
           </a:p>
           <a:p>
             <a:r>
-              <a:rPr lang="en-US" dirty="0" smtClean="0"/>
+              <a:rPr lang="en-US" dirty="0"/>
               <a:t>2 </a:t>
             </a:r>
             <a:r>
-              <a:rPr lang="en-US" dirty="0" smtClean="0">
+              <a:rPr lang="en-US" dirty="0">
                 <a:sym typeface="Symbol" panose="05050102010706020507" pitchFamily="18" charset="2"/>
               </a:rPr>
               <a:t></a:t>
             </a:r>
             <a:r>
-              <a:rPr lang="en-US" dirty="0" smtClean="0"/>
+              <a:rPr lang="en-US" dirty="0"/>
               <a:t> 18 cores</a:t>
             </a:r>
-            <a:endParaRPr lang="en-US" dirty="0"/>
           </a:p>
         </p:txBody>
       </p:sp>
@@ -32447,10 +31316,9 @@
           <a:lstStyle/>
           <a:p>
             <a:r>
-              <a:rPr lang="en-US" dirty="0" smtClean="0"/>
+              <a:rPr lang="en-US" dirty="0"/>
               <a:t>Flow graphs</a:t>
             </a:r>
-            <a:endParaRPr lang="en-US" dirty="0"/>
           </a:p>
         </p:txBody>
       </p:sp>
@@ -32506,13 +31374,6 @@
   <p:clrMapOvr>
     <a:masterClrMapping/>
   </p:clrMapOvr>
-  <p:timing>
-    <p:tnLst>
-      <p:par>
-        <p:cTn id="1" dur="indefinite" restart="never" nodeType="tmRoot"/>
-      </p:par>
-    </p:tnLst>
-  </p:timing>
 </p:sld>
 </file>
 
@@ -32549,15 +31410,15 @@
           <a:lstStyle/>
           <a:p>
             <a:r>
-              <a:rPr lang="en-BE" dirty="0" smtClean="0"/>
+              <a:rPr lang="en-BE" dirty="0"/>
               <a:t>Why </a:t>
             </a:r>
             <a:r>
-              <a:rPr lang="en-US" dirty="0" smtClean="0"/>
+              <a:rPr lang="en-US" dirty="0"/>
               <a:t>s</a:t>
             </a:r>
             <a:r>
-              <a:rPr lang="en-BE" dirty="0" smtClean="0"/>
+              <a:rPr lang="en-BE" dirty="0"/>
               <a:t>hared memory programming?</a:t>
             </a:r>
             <a:endParaRPr lang="en-US" dirty="0"/>
@@ -32585,40 +31446,40 @@
           <a:lstStyle/>
           <a:p>
             <a:r>
-              <a:rPr lang="en-BE" dirty="0" smtClean="0"/>
+              <a:rPr lang="en-BE" dirty="0"/>
               <a:t>All CPUs have multiple cores</a:t>
             </a:r>
           </a:p>
           <a:p>
             <a:r>
-              <a:rPr lang="en-BE" dirty="0" smtClean="0"/>
+              <a:rPr lang="en-BE" dirty="0"/>
               <a:t>Cores have vector registers</a:t>
             </a:r>
           </a:p>
           <a:p>
             <a:r>
-              <a:rPr lang="en-BE" dirty="0" smtClean="0"/>
+              <a:rPr lang="en-BE" dirty="0"/>
               <a:t>Accelerators</a:t>
             </a:r>
           </a:p>
           <a:p>
             <a:pPr lvl="1"/>
             <a:r>
-              <a:rPr lang="en-BE" dirty="0" smtClean="0"/>
+              <a:rPr lang="en-BE" dirty="0"/>
               <a:t>GPGPUs</a:t>
             </a:r>
           </a:p>
           <a:p>
             <a:pPr lvl="1"/>
             <a:r>
-              <a:rPr lang="en-BE" dirty="0" smtClean="0"/>
+              <a:rPr lang="en-BE" dirty="0"/>
               <a:t>FPGAs</a:t>
             </a:r>
           </a:p>
           <a:p>
             <a:pPr lvl="1"/>
             <a:r>
-              <a:rPr lang="en-BE" dirty="0" smtClean="0"/>
+              <a:rPr lang="en-BE" dirty="0"/>
               <a:t>...</a:t>
             </a:r>
             <a:endParaRPr lang="en-US" dirty="0"/>
@@ -32675,7 +31536,7 @@
             <a:lstStyle/>
             <a:p>
               <a:r>
-                <a:rPr lang="en-BE" sz="2800" dirty="0" smtClean="0"/>
+                <a:rPr lang="en-BE" sz="2800" dirty="0"/>
                 <a:t>Various levels of parallelism</a:t>
               </a:r>
               <a:endParaRPr lang="en-US" sz="2800" dirty="0"/>
@@ -33119,10 +31980,9 @@
           <a:lstStyle/>
           <a:p>
             <a:r>
-              <a:rPr lang="en-US" dirty="0" smtClean="0"/>
+              <a:rPr lang="en-US" dirty="0"/>
               <a:t>TBB scheduler</a:t>
             </a:r>
-            <a:endParaRPr lang="en-US" dirty="0"/>
           </a:p>
         </p:txBody>
       </p:sp>
@@ -33178,13 +32038,6 @@
   <p:clrMapOvr>
     <a:masterClrMapping/>
   </p:clrMapOvr>
-  <p:timing>
-    <p:tnLst>
-      <p:par>
-        <p:cTn id="1" dur="indefinite" restart="never" nodeType="tmRoot"/>
-      </p:par>
-    </p:tnLst>
-  </p:timing>
 </p:sld>
 </file>
 
@@ -33221,10 +32074,9 @@
           <a:lstStyle/>
           <a:p>
             <a:r>
-              <a:rPr lang="en-US" dirty="0" smtClean="0"/>
+              <a:rPr lang="en-US" dirty="0"/>
               <a:t>TBB task scheduler</a:t>
             </a:r>
-            <a:endParaRPr lang="en-US" dirty="0"/>
           </a:p>
         </p:txBody>
       </p:sp>
@@ -33244,19 +32096,19 @@
           <a:lstStyle/>
           <a:p>
             <a:r>
-              <a:rPr lang="en-US" dirty="0" smtClean="0"/>
+              <a:rPr lang="en-US" dirty="0"/>
               <a:t>thread pool</a:t>
             </a:r>
           </a:p>
           <a:p>
             <a:r>
-              <a:rPr lang="en-US" dirty="0" smtClean="0"/>
+              <a:rPr lang="en-US" dirty="0"/>
               <a:t>task queue</a:t>
             </a:r>
           </a:p>
           <a:p>
             <a:r>
-              <a:rPr lang="en-US" dirty="0" smtClean="0"/>
+              <a:rPr lang="en-US" dirty="0"/>
               <a:t>when thread is done, it steals work</a:t>
             </a:r>
           </a:p>
@@ -33265,17 +32117,16 @@
           </a:p>
           <a:p>
             <a:r>
-              <a:rPr lang="en-US" dirty="0" smtClean="0"/>
+              <a:rPr lang="en-US" dirty="0"/>
               <a:t>Load balancing: thread on busy core</a:t>
             </a:r>
             <a:br>
-              <a:rPr lang="en-US" dirty="0" smtClean="0"/>
+              <a:rPr lang="en-US" dirty="0"/>
             </a:br>
             <a:r>
-              <a:rPr lang="en-US" dirty="0" smtClean="0"/>
+              <a:rPr lang="en-US" dirty="0"/>
               <a:t>will poll less often for work</a:t>
             </a:r>
-            <a:endParaRPr lang="en-US" dirty="0"/>
           </a:p>
         </p:txBody>
       </p:sp>
@@ -33379,11 +32230,11 @@
             <a:lstStyle/>
             <a:p>
               <a:r>
-                <a:rPr lang="en-US" dirty="0" err="1" smtClean="0"/>
+                <a:rPr lang="en-US" dirty="0" err="1"/>
                 <a:t>t</a:t>
               </a:r>
               <a:r>
-                <a:rPr lang="en-US" baseline="-25000" dirty="0" err="1" smtClean="0"/>
+                <a:rPr lang="en-US" baseline="-25000" dirty="0" err="1"/>
                 <a:t>j</a:t>
               </a:r>
               <a:endParaRPr lang="en-US" baseline="-25000" dirty="0"/>
@@ -33468,11 +32319,11 @@
             <a:lstStyle/>
             <a:p>
               <a:r>
-                <a:rPr lang="en-US" dirty="0" err="1" smtClean="0"/>
+                <a:rPr lang="en-US" dirty="0" err="1"/>
                 <a:t>t</a:t>
               </a:r>
               <a:r>
-                <a:rPr lang="en-US" baseline="-25000" dirty="0" err="1" smtClean="0"/>
+                <a:rPr lang="en-US" baseline="-25000" dirty="0" err="1"/>
                 <a:t>i</a:t>
               </a:r>
               <a:endParaRPr lang="en-US" baseline="-25000" dirty="0"/>
@@ -33531,10 +32382,9 @@
             <a:p>
               <a:pPr algn="ctr"/>
               <a:r>
-                <a:rPr lang="en-US" dirty="0" smtClean="0"/>
+                <a:rPr lang="en-US" dirty="0"/>
                 <a:t>0</a:t>
               </a:r>
-              <a:endParaRPr lang="en-US" dirty="0"/>
             </a:p>
           </p:txBody>
         </p:sp>
@@ -33575,10 +32425,9 @@
             <a:p>
               <a:pPr algn="ctr"/>
               <a:r>
-                <a:rPr lang="en-US" dirty="0" smtClean="0"/>
+                <a:rPr lang="en-US" dirty="0"/>
                 <a:t>1</a:t>
               </a:r>
-              <a:endParaRPr lang="en-US" dirty="0"/>
             </a:p>
           </p:txBody>
         </p:sp>
@@ -33634,10 +32483,9 @@
             <a:p>
               <a:pPr algn="ctr"/>
               <a:r>
-                <a:rPr lang="en-US" dirty="0" smtClean="0"/>
+                <a:rPr lang="en-US" dirty="0"/>
                 <a:t>2</a:t>
               </a:r>
-              <a:endParaRPr lang="en-US" dirty="0"/>
             </a:p>
           </p:txBody>
         </p:sp>
@@ -33678,10 +32526,9 @@
             <a:p>
               <a:pPr algn="ctr"/>
               <a:r>
-                <a:rPr lang="en-US" dirty="0" smtClean="0"/>
+                <a:rPr lang="en-US" dirty="0"/>
                 <a:t>3</a:t>
               </a:r>
-              <a:endParaRPr lang="en-US" dirty="0"/>
             </a:p>
           </p:txBody>
         </p:sp>
@@ -34106,10 +32953,9 @@
           <a:lstStyle/>
           <a:p>
             <a:r>
-              <a:rPr lang="en-US" dirty="0" smtClean="0"/>
+              <a:rPr lang="en-US" dirty="0"/>
               <a:t>Conclusions</a:t>
             </a:r>
-            <a:endParaRPr lang="en-US" dirty="0"/>
           </a:p>
         </p:txBody>
       </p:sp>
@@ -34165,13 +33011,6 @@
   <p:clrMapOvr>
     <a:masterClrMapping/>
   </p:clrMapOvr>
-  <p:timing>
-    <p:tnLst>
-      <p:par>
-        <p:cTn id="1" dur="indefinite" restart="never" nodeType="tmRoot"/>
-      </p:par>
-    </p:tnLst>
-  </p:timing>
 </p:sld>
 </file>
 
@@ -34208,10 +33047,9 @@
           <a:lstStyle/>
           <a:p>
             <a:r>
-              <a:rPr lang="en-US" dirty="0" smtClean="0"/>
+              <a:rPr lang="en-US" dirty="0"/>
               <a:t>Conclusions</a:t>
             </a:r>
-            <a:endParaRPr lang="en-US" dirty="0"/>
           </a:p>
         </p:txBody>
       </p:sp>
@@ -34231,55 +33069,55 @@
           <a:lstStyle/>
           <a:p>
             <a:r>
-              <a:rPr lang="en-US" dirty="0" smtClean="0"/>
+              <a:rPr lang="en-US" dirty="0"/>
               <a:t>Advantages</a:t>
             </a:r>
           </a:p>
           <a:p>
             <a:pPr lvl="1"/>
             <a:r>
-              <a:rPr lang="en-US" dirty="0" smtClean="0"/>
+              <a:rPr lang="en-US" dirty="0"/>
               <a:t>Interesting programming model</a:t>
             </a:r>
           </a:p>
           <a:p>
             <a:pPr lvl="1"/>
             <a:r>
-              <a:rPr lang="en-US" dirty="0" smtClean="0"/>
+              <a:rPr lang="en-US" dirty="0"/>
               <a:t>Integrates nicely with modern C++</a:t>
             </a:r>
           </a:p>
           <a:p>
             <a:pPr lvl="1"/>
             <a:r>
-              <a:rPr lang="en-US" dirty="0" smtClean="0"/>
+              <a:rPr lang="en-US" dirty="0"/>
               <a:t>Works with any compiler</a:t>
             </a:r>
           </a:p>
           <a:p>
             <a:pPr lvl="1"/>
             <a:r>
-              <a:rPr lang="en-US" dirty="0" smtClean="0"/>
+              <a:rPr lang="en-US" dirty="0"/>
               <a:t>Nice for heterogeneous hardware</a:t>
             </a:r>
           </a:p>
           <a:p>
             <a:r>
-              <a:rPr lang="en-US" dirty="0" smtClean="0"/>
+              <a:rPr lang="en-US" dirty="0"/>
               <a:t>Disadvantages</a:t>
             </a:r>
           </a:p>
           <a:p>
             <a:pPr lvl="1"/>
             <a:r>
-              <a:rPr lang="en-US" dirty="0" smtClean="0"/>
+              <a:rPr lang="en-US" dirty="0"/>
               <a:t>Thread affinity?</a:t>
             </a:r>
           </a:p>
           <a:p>
             <a:pPr lvl="1"/>
             <a:r>
-              <a:rPr lang="en-US" dirty="0" smtClean="0"/>
+              <a:rPr lang="en-US" dirty="0"/>
               <a:t>Code base critically depends on TBB</a:t>
             </a:r>
           </a:p>
@@ -34674,7 +33512,7 @@
           <a:lstStyle/>
           <a:p>
             <a:r>
-              <a:rPr lang="en-BE" dirty="0" smtClean="0"/>
+              <a:rPr lang="en-BE" dirty="0"/>
               <a:t>Options for C++?</a:t>
             </a:r>
             <a:endParaRPr lang="en-US" dirty="0"/>
@@ -34699,77 +33537,74 @@
           <a:lstStyle/>
           <a:p>
             <a:r>
-              <a:rPr lang="en-BE" dirty="0" smtClean="0"/>
+              <a:rPr lang="en-BE" dirty="0"/>
               <a:t>pthreads</a:t>
             </a:r>
           </a:p>
           <a:p>
             <a:pPr lvl="1"/>
             <a:r>
-              <a:rPr lang="en-BE" dirty="0" smtClean="0"/>
+              <a:rPr lang="en-BE" dirty="0"/>
               <a:t>disadvantages: programming model not really suited for scientic programming</a:t>
             </a:r>
-            <a:endParaRPr lang="en-BE" dirty="0"/>
-          </a:p>
-          <a:p>
-            <a:r>
-              <a:rPr lang="en-BE" dirty="0" smtClean="0"/>
+          </a:p>
+          <a:p>
+            <a:r>
+              <a:rPr lang="en-BE" dirty="0"/>
               <a:t>C++ threads</a:t>
             </a:r>
           </a:p>
           <a:p>
             <a:pPr lvl="1"/>
             <a:r>
-              <a:rPr lang="en-BE" dirty="0" smtClean="0"/>
+              <a:rPr lang="en-BE" dirty="0"/>
               <a:t>advantages: part of C++ standard</a:t>
             </a:r>
           </a:p>
           <a:p>
             <a:pPr lvl="1"/>
             <a:r>
-              <a:rPr lang="en-BE" dirty="0" smtClean="0"/>
+              <a:rPr lang="en-BE" dirty="0"/>
               <a:t>disadvantages: programming model not really suited for scientic programming</a:t>
             </a:r>
-            <a:endParaRPr lang="en-BE" dirty="0"/>
-          </a:p>
-          <a:p>
-            <a:r>
-              <a:rPr lang="en-BE" dirty="0" smtClean="0"/>
+          </a:p>
+          <a:p>
+            <a:r>
+              <a:rPr lang="en-BE" dirty="0"/>
               <a:t>OpenMP</a:t>
             </a:r>
           </a:p>
           <a:p>
             <a:pPr lvl="1"/>
             <a:r>
-              <a:rPr lang="en-BE" dirty="0" smtClean="0"/>
+              <a:rPr lang="en-BE" dirty="0"/>
               <a:t>advantages: de facto standard in scientific computing; standard supported by "all" compilers; standard for C and Fortran</a:t>
             </a:r>
           </a:p>
           <a:p>
             <a:pPr lvl="1"/>
             <a:r>
-              <a:rPr lang="en-BE" dirty="0" smtClean="0"/>
+              <a:rPr lang="en-BE" dirty="0"/>
               <a:t>disadvantages: multilevel parallelization is tricky</a:t>
             </a:r>
-            <a:endParaRPr lang="en-BE" dirty="0"/>
-          </a:p>
-          <a:p>
-            <a:r>
-              <a:rPr lang="en-BE" dirty="0" smtClean="0"/>
+          </a:p>
+          <a:p>
+            <a:r>
+              <a:rPr lang="en-BE" dirty="0"/>
               <a:t>Threading Building Blocks (TBB)</a:t>
             </a:r>
           </a:p>
           <a:p>
             <a:pPr lvl="1"/>
             <a:r>
-              <a:rPr lang="en-BE" dirty="0" smtClean="0"/>
+              <a:rPr lang="en-BE" dirty="0"/>
               <a:t>advantages: multilevel parallelism is easier; integrates well with modern C++</a:t>
             </a:r>
           </a:p>
           <a:p>
             <a:pPr lvl="1"/>
             <a:r>
-              <a:rPr lang="en-BE" dirty="0" smtClean="0"/>
+              <a:rPr lang="en-BE" dirty="0"/>
               <a:t>disadvantages: no standard, C++ only</a:t>
             </a:r>
             <a:endParaRPr lang="en-US" dirty="0"/>
@@ -35294,7 +34129,7 @@
           <a:lstStyle/>
           <a:p>
             <a:r>
-              <a:rPr lang="en-BE" dirty="0" smtClean="0"/>
+              <a:rPr lang="en-BE" dirty="0"/>
               <a:t>Whence TBB?</a:t>
             </a:r>
             <a:endParaRPr lang="en-US" dirty="0"/>
@@ -35317,69 +34152,69 @@
           <a:lstStyle/>
           <a:p>
             <a:r>
-              <a:rPr lang="en-BE" dirty="0" smtClean="0"/>
+              <a:rPr lang="en-BE" dirty="0"/>
               <a:t>History</a:t>
             </a:r>
           </a:p>
           <a:p>
             <a:pPr lvl="1"/>
             <a:r>
-              <a:rPr lang="en-BE" dirty="0" smtClean="0"/>
+              <a:rPr lang="en-BE" dirty="0"/>
               <a:t>199</a:t>
             </a:r>
             <a:r>
-              <a:rPr lang="en-US" dirty="0" smtClean="0"/>
+              <a:rPr lang="en-US" dirty="0"/>
               <a:t>5</a:t>
             </a:r>
             <a:r>
-              <a:rPr lang="en-BE" dirty="0" smtClean="0"/>
+              <a:rPr lang="en-BE" dirty="0"/>
               <a:t>-2006: MIT Cilk</a:t>
             </a:r>
           </a:p>
           <a:p>
             <a:pPr lvl="1"/>
             <a:r>
-              <a:rPr lang="en-BE" dirty="0" smtClean="0"/>
+              <a:rPr lang="en-BE" dirty="0"/>
               <a:t>2006-2009: Cilk++</a:t>
             </a:r>
           </a:p>
           <a:p>
             <a:pPr lvl="1"/>
             <a:r>
-              <a:rPr lang="en-BE" dirty="0" smtClean="0"/>
+              <a:rPr lang="en-BE" dirty="0"/>
               <a:t>2009-...: Intel Cilk Plus</a:t>
             </a:r>
           </a:p>
           <a:p>
             <a:pPr lvl="1"/>
             <a:r>
-              <a:rPr lang="en-BE" dirty="0" smtClean="0"/>
+              <a:rPr lang="en-BE" dirty="0"/>
               <a:t>2006-...: Intel Threading Building Blocks</a:t>
             </a:r>
           </a:p>
           <a:p>
             <a:pPr lvl="2"/>
             <a:r>
-              <a:rPr lang="en-BE" dirty="0" smtClean="0"/>
+              <a:rPr lang="en-BE" dirty="0"/>
               <a:t>optimized for Intel hardware</a:t>
             </a:r>
           </a:p>
           <a:p>
             <a:pPr lvl="1"/>
             <a:r>
-              <a:rPr lang="en-BE" dirty="0" smtClean="0"/>
+              <a:rPr lang="en-BE" dirty="0"/>
               <a:t>2016-...: Threading building blocks open source</a:t>
             </a:r>
           </a:p>
           <a:p>
             <a:pPr lvl="2"/>
             <a:r>
-              <a:rPr lang="en-US" dirty="0" smtClean="0">
+              <a:rPr lang="en-US" dirty="0">
                 <a:hlinkClick r:id="rId2"/>
               </a:rPr>
               <a:t>https://www.threadingbuildingblocks.org/</a:t>
             </a:r>
-            <a:endParaRPr lang="en-BE" dirty="0" smtClean="0"/>
+            <a:endParaRPr lang="en-BE" dirty="0"/>
           </a:p>
         </p:txBody>
       </p:sp>
@@ -35416,13 +34251,6 @@
   <p:clrMapOvr>
     <a:masterClrMapping/>
   </p:clrMapOvr>
-  <p:timing>
-    <p:tnLst>
-      <p:par>
-        <p:cTn id="1" dur="indefinite" restart="never" nodeType="tmRoot"/>
-      </p:par>
-    </p:tnLst>
-  </p:timing>
 </p:sld>
 </file>
 
@@ -35459,10 +34287,9 @@
           <a:lstStyle/>
           <a:p>
             <a:r>
-              <a:rPr lang="en-US" dirty="0" smtClean="0"/>
+              <a:rPr lang="en-US" dirty="0"/>
               <a:t>What is TBB?</a:t>
             </a:r>
-            <a:endParaRPr lang="en-US" dirty="0"/>
           </a:p>
         </p:txBody>
       </p:sp>
@@ -35482,55 +34309,54 @@
           <a:lstStyle/>
           <a:p>
             <a:r>
-              <a:rPr lang="en-US" dirty="0" smtClean="0"/>
+              <a:rPr lang="en-US" dirty="0"/>
               <a:t>Algorithms</a:t>
             </a:r>
-            <a:endParaRPr lang="en-US" dirty="0"/>
           </a:p>
           <a:p>
             <a:pPr lvl="1"/>
             <a:r>
-              <a:rPr lang="en-US" dirty="0" err="1" smtClean="0">
+              <a:rPr lang="en-US" dirty="0" err="1">
                 <a:latin typeface="Consolas" panose="020B0609020204030204" pitchFamily="49" charset="0"/>
               </a:rPr>
               <a:t>parallel_for</a:t>
             </a:r>
             <a:r>
-              <a:rPr lang="en-US" dirty="0" smtClean="0"/>
+              <a:rPr lang="en-US" dirty="0"/>
               <a:t>, </a:t>
             </a:r>
             <a:r>
-              <a:rPr lang="en-US" dirty="0" err="1" smtClean="0">
+              <a:rPr lang="en-US" dirty="0" err="1">
                 <a:latin typeface="Consolas" panose="020B0609020204030204" pitchFamily="49" charset="0"/>
               </a:rPr>
               <a:t>parallel_reduce</a:t>
             </a:r>
             <a:r>
-              <a:rPr lang="en-US" dirty="0" smtClean="0"/>
+              <a:rPr lang="en-US" dirty="0"/>
               <a:t>, </a:t>
             </a:r>
             <a:r>
-              <a:rPr lang="en-US" dirty="0" err="1" smtClean="0">
+              <a:rPr lang="en-US" dirty="0" err="1">
                 <a:latin typeface="Consolas" panose="020B0609020204030204" pitchFamily="49" charset="0"/>
               </a:rPr>
               <a:t>parallel_scan</a:t>
             </a:r>
             <a:r>
-              <a:rPr lang="en-US" dirty="0" smtClean="0"/>
+              <a:rPr lang="en-US" dirty="0"/>
               <a:t>, </a:t>
             </a:r>
             <a:r>
-              <a:rPr lang="en-US" dirty="0" err="1" smtClean="0">
+              <a:rPr lang="en-US" dirty="0" err="1">
                 <a:latin typeface="Consolas" panose="020B0609020204030204" pitchFamily="49" charset="0"/>
               </a:rPr>
               <a:t>parallel_do</a:t>
             </a:r>
             <a:r>
-              <a:rPr lang="en-US" dirty="0" smtClean="0"/>
+              <a:rPr lang="en-US" dirty="0"/>
               <a:t>, </a:t>
             </a:r>
             <a:r>
-              <a:rPr lang="en-US" dirty="0" smtClean="0">
+              <a:rPr lang="en-US" dirty="0">
                 <a:latin typeface="Consolas" panose="020B0609020204030204" pitchFamily="49" charset="0"/>
               </a:rPr>
               <a:t>pipeline</a:t>
@@ -35538,66 +34364,65 @@
           </a:p>
           <a:p>
             <a:r>
-              <a:rPr lang="en-US" dirty="0" smtClean="0"/>
+              <a:rPr lang="en-US" dirty="0"/>
               <a:t>Tasks &amp; flow graphs</a:t>
             </a:r>
           </a:p>
           <a:p>
             <a:r>
-              <a:rPr lang="en-US" dirty="0" smtClean="0"/>
+              <a:rPr lang="en-US" dirty="0"/>
               <a:t>Concurrent containers</a:t>
             </a:r>
           </a:p>
           <a:p>
             <a:pPr lvl="1"/>
             <a:r>
-              <a:rPr lang="en-US" dirty="0" err="1" smtClean="0">
+              <a:rPr lang="en-US" dirty="0" err="1">
                 <a:latin typeface="Consolas" panose="020B0609020204030204" pitchFamily="49" charset="0"/>
               </a:rPr>
               <a:t>concurrent_queue</a:t>
             </a:r>
             <a:r>
-              <a:rPr lang="en-US" dirty="0" smtClean="0"/>
+              <a:rPr lang="en-US" dirty="0"/>
               <a:t>, </a:t>
             </a:r>
             <a:r>
-              <a:rPr lang="en-US" dirty="0" err="1" smtClean="0">
+              <a:rPr lang="en-US" dirty="0" err="1">
                 <a:latin typeface="Consolas" panose="020B0609020204030204" pitchFamily="49" charset="0"/>
               </a:rPr>
               <a:t>concurrent_vector</a:t>
             </a:r>
             <a:r>
-              <a:rPr lang="en-US" dirty="0" smtClean="0"/>
+              <a:rPr lang="en-US" dirty="0"/>
               <a:t>, </a:t>
             </a:r>
             <a:r>
-              <a:rPr lang="en-US" dirty="0" err="1" smtClean="0">
+              <a:rPr lang="en-US" dirty="0" err="1">
                 <a:latin typeface="Consolas" panose="020B0609020204030204" pitchFamily="49" charset="0"/>
               </a:rPr>
               <a:t>concurrent_hash_map</a:t>
             </a:r>
-            <a:endParaRPr lang="en-US" dirty="0" smtClean="0">
+            <a:endParaRPr lang="en-US" dirty="0">
               <a:latin typeface="Consolas" panose="020B0609020204030204" pitchFamily="49" charset="0"/>
             </a:endParaRPr>
           </a:p>
           <a:p>
             <a:r>
-              <a:rPr lang="en-US" dirty="0" smtClean="0"/>
+              <a:rPr lang="en-US" dirty="0"/>
               <a:t>Mutual exclusion</a:t>
             </a:r>
           </a:p>
           <a:p>
             <a:r>
-              <a:rPr lang="en-US" dirty="0" smtClean="0"/>
+              <a:rPr lang="en-US" dirty="0"/>
               <a:t>Atomic operations</a:t>
             </a:r>
           </a:p>
           <a:p>
             <a:r>
-              <a:rPr lang="en-US" dirty="0" smtClean="0"/>
+              <a:rPr lang="en-US" dirty="0"/>
               <a:t>Memory allocation</a:t>
             </a:r>
-            <a:endParaRPr lang="en-US" dirty="0"/>
           </a:p>
         </p:txBody>
       </p:sp>
@@ -36062,10 +34887,9 @@
           <a:lstStyle/>
           <a:p>
             <a:r>
-              <a:rPr lang="en-US" dirty="0" smtClean="0"/>
+              <a:rPr lang="en-US" dirty="0"/>
               <a:t>Where to find info?</a:t>
             </a:r>
-            <a:endParaRPr lang="en-US" dirty="0"/>
           </a:p>
         </p:txBody>
       </p:sp>
@@ -36087,151 +34911,115 @@
           <a:lstStyle/>
           <a:p>
             <a:r>
-              <a:rPr lang="en-US" dirty="0" smtClean="0"/>
+              <a:rPr lang="en-US" dirty="0"/>
               <a:t>TBB website:</a:t>
             </a:r>
             <a:br>
-              <a:rPr lang="en-US" dirty="0" smtClean="0"/>
+              <a:rPr lang="en-US" dirty="0"/>
             </a:br>
-            <a:r>
-              <a:rPr lang="en-US" sz="2600" dirty="0" smtClean="0">
-                <a:hlinkClick r:id="rId2"/>
-              </a:rPr>
-              <a:t>https</a:t>
-            </a:r>
             <a:r>
               <a:rPr lang="en-US" sz="2600" dirty="0">
                 <a:hlinkClick r:id="rId2"/>
               </a:rPr>
-              <a:t>://www.threadingbuildingblocks.org</a:t>
-            </a:r>
-            <a:r>
-              <a:rPr lang="en-US" sz="2600" dirty="0" smtClean="0">
-                <a:hlinkClick r:id="rId2"/>
-              </a:rPr>
-              <a:t>/</a:t>
-            </a:r>
-            <a:endParaRPr lang="en-US" dirty="0" smtClean="0"/>
-          </a:p>
-          <a:p>
-            <a:r>
-              <a:rPr lang="en-US" dirty="0" smtClean="0"/>
+              <a:t>https://www.threadingbuildingblocks.org/</a:t>
+            </a:r>
+            <a:endParaRPr lang="en-US" dirty="0"/>
+          </a:p>
+          <a:p>
+            <a:r>
+              <a:rPr lang="en-US" dirty="0"/>
               <a:t>Documentation: see website</a:t>
             </a:r>
           </a:p>
           <a:p>
             <a:r>
-              <a:rPr lang="en-US" dirty="0" smtClean="0"/>
+              <a:rPr lang="en-US" dirty="0"/>
               <a:t>Books:</a:t>
             </a:r>
-            <a:endParaRPr lang="en-US" dirty="0"/>
           </a:p>
           <a:p>
             <a:pPr lvl="1"/>
             <a:r>
-              <a:rPr lang="en-US" i="1" dirty="0" smtClean="0"/>
-              <a:t>Intel </a:t>
-            </a:r>
-            <a:r>
-              <a:rPr lang="en-US" i="1" dirty="0" smtClean="0"/>
-              <a:t>Threading Building Blocks: outfitting C++ for multi-core parallelism</a:t>
-            </a:r>
-            <a:r>
-              <a:rPr lang="en-US" dirty="0" smtClean="0"/>
-              <a:t/>
+              <a:rPr lang="en-US" i="1" dirty="0"/>
+              <a:t>Intel Threading Building Blocks: outfitting C++ for multi-core parallelism</a:t>
             </a:r>
             <a:br>
-              <a:rPr lang="en-US" dirty="0" smtClean="0"/>
+              <a:rPr lang="en-US" dirty="0"/>
             </a:br>
             <a:r>
-              <a:rPr lang="en-US" dirty="0" smtClean="0"/>
+              <a:rPr lang="en-US" dirty="0"/>
               <a:t>James </a:t>
             </a:r>
             <a:r>
-              <a:rPr lang="en-US" dirty="0" err="1" smtClean="0"/>
+              <a:rPr lang="en-US" dirty="0" err="1"/>
               <a:t>Reinders</a:t>
             </a:r>
             <a:r>
-              <a:rPr lang="en-US" dirty="0" smtClean="0"/>
-              <a:t>, 2010, </a:t>
-            </a:r>
-            <a:r>
-              <a:rPr lang="en-US" dirty="0" smtClean="0"/>
-              <a:t>O'Reilly</a:t>
+              <a:rPr lang="en-US" dirty="0"/>
+              <a:t>, 2010, O'Reilly</a:t>
             </a:r>
           </a:p>
           <a:p>
             <a:pPr lvl="1"/>
             <a:r>
-              <a:rPr lang="en-US" i="1" dirty="0" smtClean="0"/>
+              <a:rPr lang="en-US" i="1" dirty="0"/>
               <a:t>Pro TBB: C++ parallel programming with Threading Building Blocks</a:t>
             </a:r>
-            <a:r>
-              <a:rPr lang="en-US" dirty="0" smtClean="0"/>
-              <a:t/>
-            </a:r>
             <a:br>
-              <a:rPr lang="en-US" dirty="0" smtClean="0"/>
+              <a:rPr lang="en-US" dirty="0"/>
             </a:br>
             <a:r>
-              <a:rPr lang="en-US" dirty="0" smtClean="0"/>
+              <a:rPr lang="en-US" dirty="0"/>
               <a:t>Michael Voss, Rafael </a:t>
             </a:r>
             <a:r>
-              <a:rPr lang="en-US" dirty="0" err="1" smtClean="0"/>
+              <a:rPr lang="en-US" dirty="0" err="1"/>
               <a:t>Asenjo</a:t>
             </a:r>
             <a:r>
-              <a:rPr lang="en-US" dirty="0" smtClean="0"/>
+              <a:rPr lang="en-US" dirty="0"/>
               <a:t>, James </a:t>
             </a:r>
             <a:r>
-              <a:rPr lang="en-US" dirty="0" err="1" smtClean="0"/>
+              <a:rPr lang="en-US" dirty="0" err="1"/>
               <a:t>Reinders</a:t>
             </a:r>
             <a:r>
-              <a:rPr lang="en-US" dirty="0" smtClean="0"/>
+              <a:rPr lang="en-US" dirty="0"/>
               <a:t>, 2019, </a:t>
             </a:r>
             <a:r>
-              <a:rPr lang="en-US" dirty="0" err="1" smtClean="0"/>
+              <a:rPr lang="en-US" dirty="0" err="1"/>
               <a:t>Apress</a:t>
             </a:r>
             <a:r>
-              <a:rPr lang="en-US" dirty="0" smtClean="0"/>
+              <a:rPr lang="en-US" dirty="0"/>
               <a:t> Open</a:t>
             </a:r>
-            <a:endParaRPr lang="en-US" dirty="0"/>
-          </a:p>
-          <a:p>
-            <a:r>
-              <a:rPr lang="en-US" dirty="0" smtClean="0"/>
+          </a:p>
+          <a:p>
+            <a:r>
+              <a:rPr lang="en-US" dirty="0"/>
               <a:t>Slides</a:t>
             </a:r>
             <a:br>
-              <a:rPr lang="en-US" dirty="0" smtClean="0"/>
+              <a:rPr lang="en-US" dirty="0"/>
             </a:br>
             <a:r>
               <a:rPr lang="en-US" sz="2600" dirty="0">
                 <a:hlinkClick r:id="rId3"/>
               </a:rPr>
-              <a:t>https://</a:t>
-            </a:r>
-            <a:r>
-              <a:rPr lang="en-US" sz="2600" dirty="0" smtClean="0">
-                <a:hlinkClick r:id="rId3"/>
-              </a:rPr>
-              <a:t>github.com/gjbex/training-material/blob/master/CPlusPlus/Tbb/tbb.pptx</a:t>
-            </a:r>
-            <a:endParaRPr lang="en-US" dirty="0" smtClean="0"/>
-          </a:p>
-          <a:p>
-            <a:r>
-              <a:rPr lang="en-US" dirty="0" smtClean="0"/>
+              <a:t>https://github.com/gjbex/training-material/blob/master/CPlusPlus/Tbb/tbb.pptx</a:t>
+            </a:r>
+            <a:endParaRPr lang="en-US" dirty="0"/>
+          </a:p>
+          <a:p>
+            <a:r>
+              <a:rPr lang="en-US" dirty="0"/>
               <a:t>Sample code</a:t>
             </a:r>
             <a:br>
-              <a:rPr lang="en-US" dirty="0" smtClean="0"/>
+              <a:rPr lang="en-US" dirty="0"/>
             </a:br>
             <a:r>
               <a:rPr lang="en-US" sz="2600" dirty="0">
@@ -36276,13 +35064,6 @@
   <p:clrMapOvr>
     <a:masterClrMapping/>
   </p:clrMapOvr>
-  <p:timing>
-    <p:tnLst>
-      <p:par>
-        <p:cTn id="1" dur="indefinite" restart="never" nodeType="tmRoot"/>
-      </p:par>
-    </p:tnLst>
-  </p:timing>
 </p:sld>
 </file>
 
@@ -36319,10 +35100,9 @@
           <a:lstStyle/>
           <a:p>
             <a:r>
-              <a:rPr lang="en-US" dirty="0" smtClean="0"/>
+              <a:rPr lang="en-US" dirty="0"/>
               <a:t>C++ refresher</a:t>
             </a:r>
-            <a:endParaRPr lang="en-US" dirty="0"/>
           </a:p>
         </p:txBody>
       </p:sp>
@@ -36378,13 +35158,6 @@
   <p:clrMapOvr>
     <a:masterClrMapping/>
   </p:clrMapOvr>
-  <p:timing>
-    <p:tnLst>
-      <p:par>
-        <p:cTn id="1" dur="indefinite" restart="never" nodeType="tmRoot"/>
-      </p:par>
-    </p:tnLst>
-  </p:timing>
 </p:sld>
 </file>
 
@@ -36421,10 +35194,9 @@
           <a:lstStyle/>
           <a:p>
             <a:r>
-              <a:rPr lang="en-US" dirty="0" smtClean="0"/>
+              <a:rPr lang="en-US" dirty="0"/>
               <a:t>C++ prerequisites</a:t>
             </a:r>
-            <a:endParaRPr lang="en-US" dirty="0"/>
           </a:p>
         </p:txBody>
       </p:sp>
@@ -36444,25 +35216,25 @@
           <a:lstStyle/>
           <a:p>
             <a:r>
-              <a:rPr lang="en-US" dirty="0" smtClean="0"/>
+              <a:rPr lang="en-US" dirty="0"/>
               <a:t>Iterators</a:t>
             </a:r>
           </a:p>
           <a:p>
             <a:r>
-              <a:rPr lang="en-US" dirty="0" smtClean="0"/>
+              <a:rPr lang="en-US" dirty="0"/>
               <a:t>Classes/</a:t>
             </a:r>
             <a:r>
-              <a:rPr lang="en-US" dirty="0" err="1" smtClean="0"/>
+              <a:rPr lang="en-US" dirty="0" err="1"/>
               <a:t>structs</a:t>
             </a:r>
             <a:r>
-              <a:rPr lang="en-US" dirty="0" smtClean="0"/>
+              <a:rPr lang="en-US" dirty="0"/>
               <a:t> defining </a:t>
             </a:r>
             <a:r>
-              <a:rPr lang="en-US" dirty="0" smtClean="0">
+              <a:rPr lang="en-US" dirty="0">
                 <a:latin typeface="Consolas" panose="020B0609020204030204" pitchFamily="49" charset="0"/>
               </a:rPr>
               <a:t>operator()</a:t>
@@ -36471,19 +35243,14 @@
           <a:p>
             <a:r>
               <a:rPr lang="en-US" dirty="0"/>
-              <a:t>L</a:t>
-            </a:r>
-            <a:r>
-              <a:rPr lang="en-US" dirty="0" smtClean="0"/>
-              <a:t>ambda functions</a:t>
-            </a:r>
-          </a:p>
-          <a:p>
-            <a:r>
-              <a:rPr lang="en-US" dirty="0" smtClean="0"/>
+              <a:t>Lambda functions</a:t>
+            </a:r>
+          </a:p>
+          <a:p>
+            <a:r>
+              <a:rPr lang="en-US" dirty="0"/>
               <a:t>Placement new</a:t>
             </a:r>
-            <a:endParaRPr lang="en-US" dirty="0"/>
           </a:p>
         </p:txBody>
       </p:sp>
@@ -36520,13 +35287,6 @@
   <p:clrMapOvr>
     <a:masterClrMapping/>
   </p:clrMapOvr>
-  <p:timing>
-    <p:tnLst>
-      <p:par>
-        <p:cTn id="1" dur="indefinite" restart="never" nodeType="tmRoot"/>
-      </p:par>
-    </p:tnLst>
-  </p:timing>
 </p:sld>
 </file>
 
